--- a/PAY LENS - VISUALISING SALARY TRUTH WITH BI & AI.pptx
+++ b/PAY LENS - VISUALISING SALARY TRUTH WITH BI & AI.pptx
@@ -5012,7 +5012,18 @@
           <a:bodyPr wrap="square" rtlCol="0" anchor="t"/>
           <a:lstStyle/>
           <a:p>
-            <a:pPr algn="l"/>
+            <a:pPr algn="just"/>
+            <a:r>
+              <a:rPr lang="en-US" sz="1600" b="0" i="0" dirty="0">
+                <a:solidFill>
+                  <a:srgbClr val="27251E"/>
+                </a:solidFill>
+                <a:effectLst/>
+                <a:latin typeface="Times New Roman" panose="02020603050405020304" pitchFamily="18" charset="0"/>
+                <a:cs typeface="Times New Roman" panose="02020603050405020304" pitchFamily="18" charset="0"/>
+              </a:rPr>
+              <a:t>This project integrates Excel, Power BI, Copilot AI, and chatbot technology to improve payroll transparency and compliance. It delivers clear salary insights, reduces disputes, and supports scalable AI-driven payroll management</a:t>
+            </a:r>
             <a:r>
               <a:rPr lang="en-US" sz="1600" b="0" i="0" dirty="0">
                 <a:solidFill>
@@ -5021,7 +5032,7 @@
                 <a:effectLst/>
                 <a:latin typeface="pplxSerif"/>
               </a:rPr>
-              <a:t>This project integrates Excel, Power BI, Copilot AI, and chatbot technology to improve payroll transparency and compliance. It delivers clear salary insights, reduces disputes, and supports scalable AI-driven payroll management.</a:t>
+              <a:t>.</a:t>
             </a:r>
           </a:p>
           <a:p>
@@ -5202,7 +5213,7 @@
         <p:spPr>
           <a:xfrm>
             <a:off x="125486" y="1084927"/>
-            <a:ext cx="4446513" cy="2829347"/>
+            <a:ext cx="4446513" cy="3838765"/>
           </a:xfrm>
           <a:prstGeom prst="rect">
             <a:avLst/>
@@ -5214,11 +5225,11 @@
           <a:bodyPr wrap="square" rtlCol="0" anchor="t"/>
           <a:lstStyle/>
           <a:p>
-            <a:pPr marL="0" indent="0">
+            <a:pPr marL="0" indent="0" algn="just">
               <a:buNone/>
             </a:pPr>
             <a:r>
-              <a:rPr lang="en-US" sz="1600" dirty="0">
+              <a:rPr lang="en-US" dirty="0">
                 <a:latin typeface="Times New Roman" panose="02020603050405020304" pitchFamily="18" charset="0"/>
                 <a:cs typeface="Times New Roman" panose="02020603050405020304" pitchFamily="18" charset="0"/>
               </a:rPr>
@@ -5231,7 +5242,7 @@
               <a:buChar char="Ø"/>
             </a:pPr>
             <a:r>
-              <a:rPr lang="en-US" sz="1600" dirty="0">
+              <a:rPr lang="en-US" dirty="0">
                 <a:latin typeface="Times New Roman" panose="02020603050405020304" pitchFamily="18" charset="0"/>
                 <a:cs typeface="Times New Roman" panose="02020603050405020304" pitchFamily="18" charset="0"/>
               </a:rPr>
@@ -5244,7 +5255,7 @@
               <a:buChar char="Ø"/>
             </a:pPr>
             <a:r>
-              <a:rPr lang="en-US" sz="1600" dirty="0">
+              <a:rPr lang="en-US" dirty="0">
                 <a:latin typeface="Times New Roman" panose="02020603050405020304" pitchFamily="18" charset="0"/>
                 <a:cs typeface="Times New Roman" panose="02020603050405020304" pitchFamily="18" charset="0"/>
               </a:rPr>
@@ -5257,11 +5268,11 @@
               <a:buChar char="Ø"/>
             </a:pPr>
             <a:r>
-              <a:rPr lang="en-US" sz="1600" dirty="0">
+              <a:rPr lang="en-US" dirty="0">
                 <a:latin typeface="Times New Roman" panose="02020603050405020304" pitchFamily="18" charset="0"/>
                 <a:cs typeface="Times New Roman" panose="02020603050405020304" pitchFamily="18" charset="0"/>
               </a:rPr>
-              <a:t>A copilot agent which can prepare report, summary, policy update, discrepancy alerts.</a:t>
+              <a:t>A copilot agent to prepare report, summary, policy update, discrepancy alerts.</a:t>
             </a:r>
           </a:p>
           <a:p>
@@ -5270,11 +5281,11 @@
               <a:buChar char="Ø"/>
             </a:pPr>
             <a:r>
-              <a:rPr lang="en-US" sz="1600" dirty="0">
+              <a:rPr lang="en-US" dirty="0">
                 <a:latin typeface="Times New Roman" panose="02020603050405020304" pitchFamily="18" charset="0"/>
                 <a:cs typeface="Times New Roman" panose="02020603050405020304" pitchFamily="18" charset="0"/>
               </a:rPr>
-              <a:t>A chatbot enabled in Copilot to simplify and explain the payroll structure, compliance fulfilled or not, policy explanation.  </a:t>
+              <a:t>An enabled chatbot to simplify and explain the payroll structure, compliance fulfilled or not, policy explanation.  </a:t>
             </a:r>
           </a:p>
         </p:txBody>
@@ -5455,18 +5466,18 @@
           <a:bodyPr wrap="square" rtlCol="0" anchor="t"/>
           <a:lstStyle/>
           <a:p>
-            <a:pPr marL="285750" indent="-285750">
+            <a:pPr marL="285750" indent="-285750" algn="just">
               <a:buFont typeface="Wingdings" panose="05000000000000000000" pitchFamily="2" charset="2"/>
               <a:buChar char="Ø"/>
             </a:pPr>
             <a:r>
-              <a:rPr lang="en-IN" sz="1600" dirty="0">
+              <a:rPr lang="en-IN" dirty="0">
                 <a:latin typeface="Times New Roman" panose="02020603050405020304" pitchFamily="18" charset="0"/>
                 <a:cs typeface="Times New Roman" panose="02020603050405020304" pitchFamily="18" charset="0"/>
               </a:rPr>
               <a:t>Real-Time Data Integration</a:t>
             </a:r>
-            <a:endParaRPr lang="en-US" sz="1600" dirty="0">
+            <a:endParaRPr lang="en-US" dirty="0">
               <a:solidFill>
                 <a:srgbClr val="1A1A2E"/>
               </a:solidFill>
@@ -5476,18 +5487,18 @@
             </a:endParaRPr>
           </a:p>
           <a:p>
-            <a:pPr marL="285750" indent="-285750">
+            <a:pPr marL="285750" indent="-285750" algn="just">
               <a:buFont typeface="Wingdings" panose="05000000000000000000" pitchFamily="2" charset="2"/>
               <a:buChar char="Ø"/>
             </a:pPr>
             <a:r>
-              <a:rPr lang="en-US" sz="1600" dirty="0">
+              <a:rPr lang="en-US" dirty="0">
                 <a:latin typeface="Times New Roman" panose="02020603050405020304" pitchFamily="18" charset="0"/>
                 <a:cs typeface="Times New Roman" panose="02020603050405020304" pitchFamily="18" charset="0"/>
               </a:rPr>
               <a:t>Predictive Analytics </a:t>
             </a:r>
-            <a:endParaRPr lang="en-US" sz="1600" dirty="0">
+            <a:endParaRPr lang="en-US" dirty="0">
               <a:solidFill>
                 <a:srgbClr val="1A1A2E"/>
               </a:solidFill>
@@ -5497,12 +5508,12 @@
             </a:endParaRPr>
           </a:p>
           <a:p>
-            <a:pPr marL="285750" indent="-285750">
+            <a:pPr marL="285750" indent="-285750" algn="just">
               <a:buFont typeface="Wingdings" panose="05000000000000000000" pitchFamily="2" charset="2"/>
               <a:buChar char="Ø"/>
             </a:pPr>
             <a:r>
-              <a:rPr lang="en-US" sz="1600" dirty="0">
+              <a:rPr lang="en-US" dirty="0">
                 <a:latin typeface="Times New Roman" panose="02020603050405020304" pitchFamily="18" charset="0"/>
                 <a:cs typeface="Times New Roman" panose="02020603050405020304" pitchFamily="18" charset="0"/>
               </a:rPr>
@@ -5510,12 +5521,12 @@
             </a:r>
           </a:p>
           <a:p>
-            <a:pPr marL="285750" indent="-285750">
+            <a:pPr marL="285750" indent="-285750" algn="just">
               <a:buFont typeface="Wingdings" panose="05000000000000000000" pitchFamily="2" charset="2"/>
               <a:buChar char="Ø"/>
             </a:pPr>
             <a:r>
-              <a:rPr lang="en-US" sz="1600" dirty="0">
+              <a:rPr lang="en-US" dirty="0">
                 <a:latin typeface="Times New Roman" panose="02020603050405020304" pitchFamily="18" charset="0"/>
                 <a:cs typeface="Times New Roman" panose="02020603050405020304" pitchFamily="18" charset="0"/>
               </a:rPr>
@@ -5523,12 +5534,25 @@
             </a:r>
           </a:p>
           <a:p>
-            <a:pPr marL="285750" indent="-285750">
+            <a:pPr marL="285750" indent="-285750" algn="just">
               <a:buFont typeface="Wingdings" panose="05000000000000000000" pitchFamily="2" charset="2"/>
               <a:buChar char="Ø"/>
             </a:pPr>
             <a:r>
-              <a:rPr lang="en-US" sz="1600" dirty="0">
+              <a:rPr lang="en-US" dirty="0">
+                <a:latin typeface="Times New Roman" panose="02020603050405020304" pitchFamily="18" charset="0"/>
+                <a:cs typeface="Times New Roman" panose="02020603050405020304" pitchFamily="18" charset="0"/>
+              </a:rPr>
+              <a:t>Automated Benchmarking</a:t>
+            </a:r>
+          </a:p>
+          <a:p>
+            <a:pPr marL="285750" indent="-285750" algn="just">
+              <a:buFont typeface="Wingdings" panose="05000000000000000000" pitchFamily="2" charset="2"/>
+              <a:buChar char="Ø"/>
+            </a:pPr>
+            <a:r>
+              <a:rPr lang="en-US" dirty="0">
                 <a:latin typeface="Times New Roman" panose="02020603050405020304" pitchFamily="18" charset="0"/>
                 <a:cs typeface="Times New Roman" panose="02020603050405020304" pitchFamily="18" charset="0"/>
               </a:rPr>
@@ -5536,25 +5560,12 @@
             </a:r>
           </a:p>
           <a:p>
-            <a:pPr marL="285750" indent="-285750">
+            <a:pPr marL="285750" indent="-285750" algn="just">
               <a:buFont typeface="Wingdings" panose="05000000000000000000" pitchFamily="2" charset="2"/>
               <a:buChar char="Ø"/>
             </a:pPr>
             <a:r>
-              <a:rPr lang="en-US" sz="1600" dirty="0">
-                <a:latin typeface="Times New Roman" panose="02020603050405020304" pitchFamily="18" charset="0"/>
-                <a:cs typeface="Times New Roman" panose="02020603050405020304" pitchFamily="18" charset="0"/>
-              </a:rPr>
-              <a:t>Automated Benchmarking</a:t>
-            </a:r>
-          </a:p>
-          <a:p>
-            <a:pPr marL="285750" indent="-285750">
-              <a:buFont typeface="Wingdings" panose="05000000000000000000" pitchFamily="2" charset="2"/>
-              <a:buChar char="Ø"/>
-            </a:pPr>
-            <a:r>
-              <a:rPr lang="en-US" sz="1600" dirty="0">
+              <a:rPr lang="en-US" dirty="0">
                 <a:latin typeface="Times New Roman" panose="02020603050405020304" pitchFamily="18" charset="0"/>
                 <a:cs typeface="Times New Roman" panose="02020603050405020304" pitchFamily="18" charset="0"/>
               </a:rPr>
@@ -7181,7 +7192,7 @@
                 <a:latin typeface="Times New Roman" panose="02020603050405020304" pitchFamily="18" charset="0"/>
                 <a:cs typeface="Times New Roman" panose="02020603050405020304" pitchFamily="18" charset="0"/>
               </a:rPr>
-              <a:t> – solve the problem of data complexity and automation with formula based. Clean payroll data, calculate Gross CTC, Net Salary, and Overtime Pay. </a:t>
+              <a:t> – solve the problem of data complexity and automation with formula based. </a:t>
             </a:r>
           </a:p>
           <a:p>
@@ -7348,67 +7359,6 @@
       </p:sp>
       <p:sp>
         <p:nvSpPr>
-          <p:cNvPr id="6" name="Shape 4"/>
-          <p:cNvSpPr/>
-          <p:nvPr/>
-        </p:nvSpPr>
-        <p:spPr>
-          <a:xfrm>
-            <a:off x="235408" y="1243200"/>
-            <a:ext cx="4114800" cy="384048"/>
-          </a:xfrm>
-          <a:prstGeom prst="rect">
-            <a:avLst/>
-          </a:prstGeom>
-          <a:solidFill>
-            <a:schemeClr val="accent1">
-              <a:lumMod val="20000"/>
-              <a:lumOff val="80000"/>
-            </a:schemeClr>
-          </a:solidFill>
-          <a:ln/>
-        </p:spPr>
-        <p:txBody>
-          <a:bodyPr/>
-          <a:lstStyle/>
-          <a:p>
-            <a:endParaRPr lang="en-IN">
-              <a:latin typeface="Lato" panose="020F0502020204030203" pitchFamily="34" charset="0"/>
-            </a:endParaRPr>
-          </a:p>
-        </p:txBody>
-      </p:sp>
-      <p:sp>
-        <p:nvSpPr>
-          <p:cNvPr id="7" name="Shape 5"/>
-          <p:cNvSpPr/>
-          <p:nvPr/>
-        </p:nvSpPr>
-        <p:spPr>
-          <a:xfrm>
-            <a:off x="4167328" y="1243200"/>
-            <a:ext cx="320040" cy="384048"/>
-          </a:xfrm>
-          <a:prstGeom prst="rect">
-            <a:avLst/>
-          </a:prstGeom>
-          <a:solidFill>
-            <a:srgbClr val="1B3A8A"/>
-          </a:solidFill>
-          <a:ln/>
-        </p:spPr>
-        <p:txBody>
-          <a:bodyPr/>
-          <a:lstStyle/>
-          <a:p>
-            <a:endParaRPr lang="en-IN">
-              <a:latin typeface="Lato" panose="020F0502020204030203" pitchFamily="34" charset="0"/>
-            </a:endParaRPr>
-          </a:p>
-        </p:txBody>
-      </p:sp>
-      <p:sp>
-        <p:nvSpPr>
           <p:cNvPr id="8" name="Text 6"/>
           <p:cNvSpPr/>
           <p:nvPr/>
@@ -7431,14 +7381,6 @@
             <a:pPr marL="0" indent="0">
               <a:buNone/>
             </a:pPr>
-            <a:r>
-              <a:rPr lang="en-US" sz="1600" b="1" dirty="0">
-                <a:latin typeface="Times New Roman" panose="02020603050405020304" pitchFamily="18" charset="0"/>
-                <a:ea typeface="Calibri" pitchFamily="34" charset="-122"/>
-                <a:cs typeface="Times New Roman" panose="02020603050405020304" pitchFamily="18" charset="0"/>
-              </a:rPr>
-              <a:t>Data Input / Source – step 1</a:t>
-            </a:r>
             <a:endParaRPr lang="en-US" sz="1600" dirty="0">
               <a:latin typeface="Times New Roman" panose="02020603050405020304" pitchFamily="18" charset="0"/>
               <a:cs typeface="Times New Roman" panose="02020603050405020304" pitchFamily="18" charset="0"/>
@@ -7470,74 +7412,9 @@
             <a:pPr marL="0" indent="0" algn="just">
               <a:buNone/>
             </a:pPr>
-            <a:r>
-              <a:rPr lang="en-US" sz="1600" dirty="0">
-                <a:latin typeface="Times New Roman" panose="02020603050405020304" pitchFamily="18" charset="0"/>
-                <a:cs typeface="Times New Roman" panose="02020603050405020304" pitchFamily="18" charset="0"/>
-              </a:rPr>
-              <a:t>Payroll dataset (Excel records: Employee ID, CTC, Overtime, Deductions).</a:t>
-            </a:r>
-          </a:p>
-        </p:txBody>
-      </p:sp>
-      <p:sp>
-        <p:nvSpPr>
-          <p:cNvPr id="10" name="Shape 8"/>
-          <p:cNvSpPr/>
-          <p:nvPr/>
-        </p:nvSpPr>
-        <p:spPr>
-          <a:xfrm>
-            <a:off x="4670248" y="1243200"/>
-            <a:ext cx="4114800" cy="384048"/>
-          </a:xfrm>
-          <a:prstGeom prst="rect">
-            <a:avLst/>
-          </a:prstGeom>
-          <a:solidFill>
-            <a:schemeClr val="accent1">
-              <a:lumMod val="20000"/>
-              <a:lumOff val="80000"/>
-            </a:schemeClr>
-          </a:solidFill>
-          <a:ln/>
-        </p:spPr>
-        <p:txBody>
-          <a:bodyPr/>
-          <a:lstStyle/>
-          <a:p>
-            <a:endParaRPr lang="en-IN" sz="1600">
-              <a:latin typeface="Lato" panose="020F0502020204030203" pitchFamily="34" charset="0"/>
-              <a:cs typeface="Arial" panose="020B0604020202020204" pitchFamily="34" charset="0"/>
-            </a:endParaRPr>
-          </a:p>
-        </p:txBody>
-      </p:sp>
-      <p:sp>
-        <p:nvSpPr>
-          <p:cNvPr id="11" name="Shape 9"/>
-          <p:cNvSpPr/>
-          <p:nvPr/>
-        </p:nvSpPr>
-        <p:spPr>
-          <a:xfrm>
-            <a:off x="8602168" y="1243200"/>
-            <a:ext cx="320040" cy="384048"/>
-          </a:xfrm>
-          <a:prstGeom prst="rect">
-            <a:avLst/>
-          </a:prstGeom>
-          <a:solidFill>
-            <a:srgbClr val="1B3A8A"/>
-          </a:solidFill>
-          <a:ln/>
-        </p:spPr>
-        <p:txBody>
-          <a:bodyPr/>
-          <a:lstStyle/>
-          <a:p>
-            <a:endParaRPr lang="en-IN">
-              <a:latin typeface="Lato" panose="020F0502020204030203" pitchFamily="34" charset="0"/>
+            <a:endParaRPr lang="en-US" sz="1600" dirty="0">
+              <a:latin typeface="Times New Roman" panose="02020603050405020304" pitchFamily="18" charset="0"/>
+              <a:cs typeface="Times New Roman" panose="02020603050405020304" pitchFamily="18" charset="0"/>
             </a:endParaRPr>
           </a:p>
         </p:txBody>
@@ -7566,14 +7443,6 @@
             <a:pPr marL="0" indent="0">
               <a:buNone/>
             </a:pPr>
-            <a:r>
-              <a:rPr lang="en-US" sz="1600" b="1" dirty="0">
-                <a:latin typeface="Times New Roman" panose="02020603050405020304" pitchFamily="18" charset="0"/>
-                <a:ea typeface="Calibri" pitchFamily="34" charset="-122"/>
-                <a:cs typeface="Times New Roman" panose="02020603050405020304" pitchFamily="18" charset="0"/>
-              </a:rPr>
-              <a:t>Processing / Analysis – step 2</a:t>
-            </a:r>
             <a:endParaRPr lang="en-US" sz="1600" dirty="0">
               <a:latin typeface="Times New Roman" panose="02020603050405020304" pitchFamily="18" charset="0"/>
               <a:cs typeface="Times New Roman" panose="02020603050405020304" pitchFamily="18" charset="0"/>
@@ -7605,73 +7474,9 @@
             <a:pPr marL="0" indent="0" algn="just">
               <a:buNone/>
             </a:pPr>
-            <a:r>
-              <a:rPr lang="en-US" sz="1600" dirty="0">
-                <a:latin typeface="Times New Roman" panose="02020603050405020304" pitchFamily="18" charset="0"/>
-                <a:cs typeface="Times New Roman" panose="02020603050405020304" pitchFamily="18" charset="0"/>
-              </a:rPr>
-              <a:t>Excel formulas &amp; DAX in Power BI - clean, calculate, and analyze payroll data.</a:t>
-            </a:r>
-          </a:p>
-        </p:txBody>
-      </p:sp>
-      <p:sp>
-        <p:nvSpPr>
-          <p:cNvPr id="14" name="Shape 12"/>
-          <p:cNvSpPr/>
-          <p:nvPr/>
-        </p:nvSpPr>
-        <p:spPr>
-          <a:xfrm>
-            <a:off x="235408" y="2969856"/>
-            <a:ext cx="4114800" cy="384048"/>
-          </a:xfrm>
-          <a:prstGeom prst="rect">
-            <a:avLst/>
-          </a:prstGeom>
-          <a:solidFill>
-            <a:schemeClr val="accent1">
-              <a:lumMod val="20000"/>
-              <a:lumOff val="80000"/>
-            </a:schemeClr>
-          </a:solidFill>
-          <a:ln/>
-        </p:spPr>
-        <p:txBody>
-          <a:bodyPr/>
-          <a:lstStyle/>
-          <a:p>
-            <a:endParaRPr lang="en-IN">
-              <a:latin typeface="Lato" panose="020F0502020204030203" pitchFamily="34" charset="0"/>
-            </a:endParaRPr>
-          </a:p>
-        </p:txBody>
-      </p:sp>
-      <p:sp>
-        <p:nvSpPr>
-          <p:cNvPr id="15" name="Shape 13"/>
-          <p:cNvSpPr/>
-          <p:nvPr/>
-        </p:nvSpPr>
-        <p:spPr>
-          <a:xfrm>
-            <a:off x="4167328" y="2969856"/>
-            <a:ext cx="320040" cy="384048"/>
-          </a:xfrm>
-          <a:prstGeom prst="rect">
-            <a:avLst/>
-          </a:prstGeom>
-          <a:solidFill>
-            <a:srgbClr val="1B3A8A"/>
-          </a:solidFill>
-          <a:ln/>
-        </p:spPr>
-        <p:txBody>
-          <a:bodyPr/>
-          <a:lstStyle/>
-          <a:p>
-            <a:endParaRPr lang="en-IN">
-              <a:latin typeface="Lato" panose="020F0502020204030203" pitchFamily="34" charset="0"/>
+            <a:endParaRPr lang="en-US" sz="1600" dirty="0">
+              <a:latin typeface="Times New Roman" panose="02020603050405020304" pitchFamily="18" charset="0"/>
+              <a:cs typeface="Times New Roman" panose="02020603050405020304" pitchFamily="18" charset="0"/>
             </a:endParaRPr>
           </a:p>
         </p:txBody>
@@ -7700,14 +7505,6 @@
             <a:pPr marL="0" indent="0">
               <a:buNone/>
             </a:pPr>
-            <a:r>
-              <a:rPr lang="en-US" sz="1600" b="1" dirty="0">
-                <a:latin typeface="Times New Roman" panose="02020603050405020304" pitchFamily="18" charset="0"/>
-                <a:ea typeface="Calibri" pitchFamily="34" charset="-122"/>
-                <a:cs typeface="Times New Roman" panose="02020603050405020304" pitchFamily="18" charset="0"/>
-              </a:rPr>
-              <a:t>AI / Tool Integration – step 3</a:t>
-            </a:r>
             <a:endParaRPr lang="en-US" sz="1600" dirty="0">
               <a:latin typeface="Times New Roman" panose="02020603050405020304" pitchFamily="18" charset="0"/>
               <a:cs typeface="Times New Roman" panose="02020603050405020304" pitchFamily="18" charset="0"/>
@@ -7739,77 +7536,9 @@
             <a:pPr marL="0" indent="0" algn="just">
               <a:buNone/>
             </a:pPr>
-            <a:r>
-              <a:rPr lang="en-IN" sz="1600" dirty="0">
-                <a:latin typeface="Times New Roman" panose="02020603050405020304" pitchFamily="18" charset="0"/>
-                <a:cs typeface="Times New Roman" panose="02020603050405020304" pitchFamily="18" charset="0"/>
-              </a:rPr>
-              <a:t>Copilot AI -  anomaly detection &amp; compliance alerts; Chatbot handles employee queries</a:t>
-            </a:r>
             <a:endParaRPr lang="en-US" sz="1600" dirty="0">
               <a:latin typeface="Times New Roman" panose="02020603050405020304" pitchFamily="18" charset="0"/>
               <a:cs typeface="Times New Roman" panose="02020603050405020304" pitchFamily="18" charset="0"/>
-            </a:endParaRPr>
-          </a:p>
-        </p:txBody>
-      </p:sp>
-      <p:sp>
-        <p:nvSpPr>
-          <p:cNvPr id="18" name="Shape 16"/>
-          <p:cNvSpPr/>
-          <p:nvPr/>
-        </p:nvSpPr>
-        <p:spPr>
-          <a:xfrm>
-            <a:off x="4670248" y="2969856"/>
-            <a:ext cx="4114800" cy="384048"/>
-          </a:xfrm>
-          <a:prstGeom prst="rect">
-            <a:avLst/>
-          </a:prstGeom>
-          <a:solidFill>
-            <a:schemeClr val="accent1">
-              <a:lumMod val="20000"/>
-              <a:lumOff val="80000"/>
-            </a:schemeClr>
-          </a:solidFill>
-          <a:ln/>
-        </p:spPr>
-        <p:txBody>
-          <a:bodyPr/>
-          <a:lstStyle/>
-          <a:p>
-            <a:endParaRPr lang="en-IN">
-              <a:latin typeface="Lato" panose="020F0502020204030203" pitchFamily="34" charset="0"/>
-            </a:endParaRPr>
-          </a:p>
-        </p:txBody>
-      </p:sp>
-      <p:sp>
-        <p:nvSpPr>
-          <p:cNvPr id="19" name="Shape 17"/>
-          <p:cNvSpPr/>
-          <p:nvPr/>
-        </p:nvSpPr>
-        <p:spPr>
-          <a:xfrm>
-            <a:off x="8602168" y="2969856"/>
-            <a:ext cx="320040" cy="384048"/>
-          </a:xfrm>
-          <a:prstGeom prst="rect">
-            <a:avLst/>
-          </a:prstGeom>
-          <a:solidFill>
-            <a:srgbClr val="1B3A8A"/>
-          </a:solidFill>
-          <a:ln/>
-        </p:spPr>
-        <p:txBody>
-          <a:bodyPr/>
-          <a:lstStyle/>
-          <a:p>
-            <a:endParaRPr lang="en-IN">
-              <a:latin typeface="Lato" panose="020F0502020204030203" pitchFamily="34" charset="0"/>
             </a:endParaRPr>
           </a:p>
         </p:txBody>
@@ -7838,14 +7567,6 @@
             <a:pPr marL="0" indent="0">
               <a:buNone/>
             </a:pPr>
-            <a:r>
-              <a:rPr lang="en-US" sz="1600" b="1" dirty="0">
-                <a:latin typeface="Times New Roman" panose="02020603050405020304" pitchFamily="18" charset="0"/>
-                <a:ea typeface="Calibri" pitchFamily="34" charset="-122"/>
-                <a:cs typeface="Times New Roman" panose="02020603050405020304" pitchFamily="18" charset="0"/>
-              </a:rPr>
-              <a:t>Output / Dashboard – step 4 </a:t>
-            </a:r>
             <a:endParaRPr lang="en-US" sz="1600" dirty="0">
               <a:latin typeface="Times New Roman" panose="02020603050405020304" pitchFamily="18" charset="0"/>
               <a:cs typeface="Times New Roman" panose="02020603050405020304" pitchFamily="18" charset="0"/>
@@ -7853,48 +7574,36 @@
           </a:p>
         </p:txBody>
       </p:sp>
-      <p:sp>
-        <p:nvSpPr>
-          <p:cNvPr id="21" name="Text 19"/>
-          <p:cNvSpPr/>
-          <p:nvPr/>
-        </p:nvSpPr>
+      <p:pic>
+        <p:nvPicPr>
+          <p:cNvPr id="3" name="Picture 2" descr="A diagram of process automation&#10;&#10;AI-generated content may be incorrect.">
+            <a:extLst>
+              <a:ext uri="{FF2B5EF4-FFF2-40B4-BE49-F238E27FC236}">
+                <a16:creationId xmlns:a16="http://schemas.microsoft.com/office/drawing/2014/main" id="{389ECA45-6078-17FC-FB1D-D022E472334F}"/>
+              </a:ext>
+            </a:extLst>
+          </p:cNvPr>
+          <p:cNvPicPr>
+            <a:picLocks noChangeAspect="1"/>
+          </p:cNvPicPr>
+          <p:nvPr/>
+        </p:nvPicPr>
+        <p:blipFill>
+          <a:blip r:embed="rId4"/>
+          <a:stretch>
+            <a:fillRect/>
+          </a:stretch>
+        </p:blipFill>
         <p:spPr>
           <a:xfrm>
-            <a:off x="4761688" y="3427056"/>
-            <a:ext cx="4023360" cy="1188720"/>
+            <a:off x="1700704" y="1220374"/>
+            <a:ext cx="5607461" cy="3572116"/>
           </a:xfrm>
           <a:prstGeom prst="rect">
             <a:avLst/>
           </a:prstGeom>
-          <a:noFill/>
-          <a:ln/>
         </p:spPr>
-        <p:txBody>
-          <a:bodyPr wrap="square" rtlCol="0" anchor="t"/>
-          <a:lstStyle/>
-          <a:p>
-            <a:pPr marL="0" indent="0" algn="just">
-              <a:buNone/>
-            </a:pPr>
-            <a:r>
-              <a:rPr lang="en-US" sz="1600" dirty="0">
-                <a:latin typeface="Times New Roman" panose="02020603050405020304" pitchFamily="18" charset="0"/>
-                <a:cs typeface="Times New Roman" panose="02020603050405020304" pitchFamily="18" charset="0"/>
-              </a:rPr>
-              <a:t>Power BI dashboards - salary breakdown, pay equity visuals, compliance alerts, benchmarking</a:t>
-            </a:r>
-            <a:r>
-              <a:rPr lang="en-US" sz="1600" dirty="0"/>
-              <a:t>.</a:t>
-            </a:r>
-            <a:endParaRPr lang="en-US" sz="1600" dirty="0">
-              <a:latin typeface="Lato" panose="020F0502020204030203" pitchFamily="34" charset="0"/>
-              <a:cs typeface="Arial" panose="020B0604020202020204" pitchFamily="34" charset="0"/>
-            </a:endParaRPr>
-          </a:p>
-        </p:txBody>
-      </p:sp>
+      </p:pic>
     </p:spTree>
     <p:custDataLst>
       <p:tags r:id="rId1"/>
@@ -8154,33 +7863,7 @@
                 <a:ea typeface="Calibri" pitchFamily="34" charset="-122"/>
                 <a:cs typeface="Times New Roman" panose="02020603050405020304" pitchFamily="18" charset="0"/>
               </a:rPr>
-              <a:t>ETL approach – </a:t>
-            </a:r>
-          </a:p>
-          <a:p>
-            <a:pPr marL="0" indent="0" algn="ctr">
-              <a:buNone/>
-            </a:pPr>
-            <a:r>
-              <a:rPr lang="en-US" sz="1600" dirty="0">
-                <a:latin typeface="Times New Roman" panose="02020603050405020304" pitchFamily="18" charset="0"/>
-                <a:ea typeface="Calibri" pitchFamily="34" charset="-122"/>
-                <a:cs typeface="Times New Roman" panose="02020603050405020304" pitchFamily="18" charset="0"/>
-              </a:rPr>
-              <a:t>Extraction and transformation of data into structured standardized format. </a:t>
-            </a:r>
-          </a:p>
-          <a:p>
-            <a:pPr marL="0" indent="0" algn="ctr">
-              <a:buNone/>
-            </a:pPr>
-            <a:r>
-              <a:rPr lang="en-US" sz="1600" dirty="0">
-                <a:latin typeface="Times New Roman" panose="02020603050405020304" pitchFamily="18" charset="0"/>
-                <a:ea typeface="Calibri" pitchFamily="34" charset="-122"/>
-                <a:cs typeface="Times New Roman" panose="02020603050405020304" pitchFamily="18" charset="0"/>
-              </a:rPr>
-              <a:t>Loading it in Power BI for report creation.  </a:t>
+              <a:t>.  </a:t>
             </a:r>
           </a:p>
           <a:p>
@@ -8341,7 +8024,7 @@
                 <a:ea typeface="Calibri" pitchFamily="34" charset="-122"/>
                 <a:cs typeface="Times New Roman" panose="02020603050405020304" pitchFamily="18" charset="0"/>
               </a:rPr>
-              <a:t>DAX Measures applied, visualization were prepared. The dashboard is being prepared.  </a:t>
+              <a:t>.  </a:t>
             </a:r>
             <a:endParaRPr lang="en-US" sz="1600" dirty="0">
               <a:latin typeface="Times New Roman" panose="02020603050405020304" pitchFamily="18" charset="0"/>
@@ -8516,14 +8199,6 @@
             <a:pPr marL="0" indent="0" algn="ctr">
               <a:buNone/>
             </a:pPr>
-            <a:r>
-              <a:rPr lang="en-US" sz="1600" dirty="0">
-                <a:latin typeface="Times New Roman" panose="02020603050405020304" pitchFamily="18" charset="0"/>
-                <a:ea typeface="Calibri" pitchFamily="34" charset="-122"/>
-                <a:cs typeface="Times New Roman" panose="02020603050405020304" pitchFamily="18" charset="0"/>
-              </a:rPr>
-              <a:t>AI bot and agent to bridge transparency gap </a:t>
-            </a:r>
             <a:endParaRPr lang="en-US" sz="1600" dirty="0">
               <a:latin typeface="Times New Roman" panose="02020603050405020304" pitchFamily="18" charset="0"/>
               <a:cs typeface="Times New Roman" panose="02020603050405020304" pitchFamily="18" charset="0"/>
@@ -8531,36 +8206,6 @@
           </a:p>
         </p:txBody>
       </p:sp>
-      <p:pic>
-        <p:nvPicPr>
-          <p:cNvPr id="3" name="Picture 2">
-            <a:extLst>
-              <a:ext uri="{FF2B5EF4-FFF2-40B4-BE49-F238E27FC236}">
-                <a16:creationId xmlns:a16="http://schemas.microsoft.com/office/drawing/2014/main" id="{A1CB6BE0-EE5F-4CCB-A956-5F12622D35AD}"/>
-              </a:ext>
-            </a:extLst>
-          </p:cNvPr>
-          <p:cNvPicPr>
-            <a:picLocks noChangeAspect="1"/>
-          </p:cNvPicPr>
-          <p:nvPr/>
-        </p:nvPicPr>
-        <p:blipFill>
-          <a:blip r:embed="rId4"/>
-          <a:stretch>
-            <a:fillRect/>
-          </a:stretch>
-        </p:blipFill>
-        <p:spPr>
-          <a:xfrm flipH="1">
-            <a:off x="3488788" y="1457689"/>
-            <a:ext cx="2263238" cy="1169551"/>
-          </a:xfrm>
-          <a:prstGeom prst="rect">
-            <a:avLst/>
-          </a:prstGeom>
-        </p:spPr>
-      </p:pic>
       <p:pic>
         <p:nvPicPr>
           <p:cNvPr id="8" name="Picture 7">
@@ -8576,15 +8221,15 @@
           <p:nvPr/>
         </p:nvPicPr>
         <p:blipFill>
-          <a:blip r:embed="rId5"/>
+          <a:blip r:embed="rId4"/>
           <a:stretch>
             <a:fillRect/>
           </a:stretch>
         </p:blipFill>
         <p:spPr>
           <a:xfrm>
-            <a:off x="6481295" y="1439332"/>
-            <a:ext cx="2159955" cy="1214975"/>
+            <a:off x="6131634" y="3123641"/>
+            <a:ext cx="2924309" cy="1644925"/>
           </a:xfrm>
           <a:prstGeom prst="rect">
             <a:avLst/>
@@ -8606,6 +8251,36 @@
           <p:nvPr/>
         </p:nvPicPr>
         <p:blipFill>
+          <a:blip r:embed="rId5"/>
+          <a:stretch>
+            <a:fillRect/>
+          </a:stretch>
+        </p:blipFill>
+        <p:spPr>
+          <a:xfrm>
+            <a:off x="259802" y="3115792"/>
+            <a:ext cx="2793583" cy="1652774"/>
+          </a:xfrm>
+          <a:prstGeom prst="rect">
+            <a:avLst/>
+          </a:prstGeom>
+        </p:spPr>
+      </p:pic>
+      <p:pic>
+        <p:nvPicPr>
+          <p:cNvPr id="3" name="Picture 2">
+            <a:extLst>
+              <a:ext uri="{FF2B5EF4-FFF2-40B4-BE49-F238E27FC236}">
+                <a16:creationId xmlns:a16="http://schemas.microsoft.com/office/drawing/2014/main" id="{D57E55DB-EAD6-A4AF-9554-5C2D748E1960}"/>
+              </a:ext>
+            </a:extLst>
+          </p:cNvPr>
+          <p:cNvPicPr>
+            <a:picLocks noChangeAspect="1"/>
+          </p:cNvPicPr>
+          <p:nvPr/>
+        </p:nvPicPr>
+        <p:blipFill>
           <a:blip r:embed="rId6"/>
           <a:stretch>
             <a:fillRect/>
@@ -8613,8 +8288,8 @@
         </p:blipFill>
         <p:spPr>
           <a:xfrm>
-            <a:off x="682283" y="1437760"/>
-            <a:ext cx="2017111" cy="1193388"/>
+            <a:off x="3256208" y="3115792"/>
+            <a:ext cx="2747410" cy="1652774"/>
           </a:xfrm>
           <a:prstGeom prst="rect">
             <a:avLst/>

--- a/PAY LENS - VISUALISING SALARY TRUTH WITH BI & AI.pptx
+++ b/PAY LENS - VISUALISING SALARY TRUTH WITH BI & AI.pptx
@@ -5,28 +5,27 @@
     <p:sldMasterId id="2147483648" r:id="rId1"/>
   </p:sldMasterIdLst>
   <p:notesMasterIdLst>
-    <p:notesMasterId r:id="rId16"/>
+    <p:notesMasterId r:id="rId15"/>
   </p:notesMasterIdLst>
   <p:sldIdLst>
     <p:sldId id="268" r:id="rId2"/>
     <p:sldId id="257" r:id="rId3"/>
     <p:sldId id="258" r:id="rId4"/>
     <p:sldId id="259" r:id="rId5"/>
-    <p:sldId id="272" r:id="rId6"/>
+    <p:sldId id="269" r:id="rId6"/>
     <p:sldId id="260" r:id="rId7"/>
-    <p:sldId id="280" r:id="rId8"/>
-    <p:sldId id="261" r:id="rId9"/>
+    <p:sldId id="271" r:id="rId8"/>
+    <p:sldId id="272" r:id="rId9"/>
     <p:sldId id="262" r:id="rId10"/>
     <p:sldId id="263" r:id="rId11"/>
     <p:sldId id="264" r:id="rId12"/>
-    <p:sldId id="279" r:id="rId13"/>
-    <p:sldId id="265" r:id="rId14"/>
-    <p:sldId id="266" r:id="rId15"/>
+    <p:sldId id="265" r:id="rId13"/>
+    <p:sldId id="266" r:id="rId14"/>
   </p:sldIdLst>
   <p:sldSz cx="9144000" cy="5143500" type="screen16x9"/>
   <p:notesSz cx="5143500" cy="9144000"/>
   <p:custDataLst>
-    <p:tags r:id="rId17"/>
+    <p:tags r:id="rId16"/>
   </p:custDataLst>
   <p:defaultTextStyle>
     <a:lvl1pPr marL="0" algn="l" defTabSz="914400" rtl="0" eaLnBrk="1" latinLnBrk="0" hangingPunct="1">
@@ -427,7 +426,7 @@
           <a:p>
             <a:fld id="{F7021451-1387-4CA6-816F-3879F97B5CBC}" type="slidenum">
               <a:rPr lang="en-US"/>
-              <a:t>10</a:t>
+              <a:t>11</a:t>
             </a:fld>
             <a:endParaRPr lang="en-US"/>
           </a:p>
@@ -511,7 +510,7 @@
           <a:p>
             <a:fld id="{F7021451-1387-4CA6-816F-3879F97B5CBC}" type="slidenum">
               <a:rPr lang="en-US"/>
-              <a:t>11</a:t>
+              <a:t>12</a:t>
             </a:fld>
             <a:endParaRPr lang="en-US"/>
           </a:p>
@@ -595,175 +594,7 @@
           <a:p>
             <a:fld id="{F7021451-1387-4CA6-816F-3879F97B5CBC}" type="slidenum">
               <a:rPr lang="en-US"/>
-              <a:t>12</a:t>
-            </a:fld>
-            <a:endParaRPr lang="en-US"/>
-          </a:p>
-        </p:txBody>
-      </p:sp>
-    </p:spTree>
-    <p:extLst>
-      <p:ext uri="{BB962C8B-B14F-4D97-AF65-F5344CB8AC3E}">
-        <p14:creationId xmlns:p14="http://schemas.microsoft.com/office/powerpoint/2010/main" val="3092255726"/>
-      </p:ext>
-    </p:extLst>
-  </p:cSld>
-  <p:clrMapOvr>
-    <a:masterClrMapping/>
-  </p:clrMapOvr>
-</p:notes>
-</file>
-
-<file path=ppt/notesSlides/notesSlide13.xml><?xml version="1.0" encoding="utf-8"?>
-<p:notes xmlns:a="http://schemas.openxmlformats.org/drawingml/2006/main" xmlns:r="http://schemas.openxmlformats.org/officeDocument/2006/relationships" xmlns:p="http://schemas.openxmlformats.org/presentationml/2006/main">
-  <p:cSld>
-    <p:spTree>
-      <p:nvGrpSpPr>
-        <p:cNvPr id="1" name=""/>
-        <p:cNvGrpSpPr/>
-        <p:nvPr/>
-      </p:nvGrpSpPr>
-      <p:grpSpPr>
-        <a:xfrm>
-          <a:off x="0" y="0"/>
-          <a:ext cx="0" cy="0"/>
-          <a:chOff x="0" y="0"/>
-          <a:chExt cx="0" cy="0"/>
-        </a:xfrm>
-      </p:grpSpPr>
-      <p:sp>
-        <p:nvSpPr>
-          <p:cNvPr id="2" name="Slide Image Placeholder 1"/>
-          <p:cNvSpPr>
-            <a:spLocks noGrp="1" noRot="1" noChangeAspect="1"/>
-          </p:cNvSpPr>
-          <p:nvPr>
-            <p:ph type="sldImg"/>
-          </p:nvPr>
-        </p:nvSpPr>
-        <p:spPr/>
-      </p:sp>
-      <p:sp>
-        <p:nvSpPr>
-          <p:cNvPr id="3" name="Notes Placeholder 2"/>
-          <p:cNvSpPr>
-            <a:spLocks noGrp="1"/>
-          </p:cNvSpPr>
-          <p:nvPr>
-            <p:ph type="body" idx="1"/>
-          </p:nvPr>
-        </p:nvSpPr>
-        <p:spPr/>
-        <p:txBody>
-          <a:bodyPr/>
-          <a:lstStyle/>
-          <a:p>
-            <a:endParaRPr lang="en-US" dirty="0"/>
-          </a:p>
-        </p:txBody>
-      </p:sp>
-      <p:sp>
-        <p:nvSpPr>
-          <p:cNvPr id="4" name="Slide Number Placeholder 3"/>
-          <p:cNvSpPr>
-            <a:spLocks noGrp="1"/>
-          </p:cNvSpPr>
-          <p:nvPr>
-            <p:ph type="sldNum" sz="quarter" idx="10"/>
-          </p:nvPr>
-        </p:nvSpPr>
-        <p:spPr/>
-        <p:txBody>
-          <a:bodyPr/>
-          <a:lstStyle/>
-          <a:p>
-            <a:fld id="{F7021451-1387-4CA6-816F-3879F97B5CBC}" type="slidenum">
-              <a:rPr lang="en-US"/>
               <a:t>13</a:t>
-            </a:fld>
-            <a:endParaRPr lang="en-US"/>
-          </a:p>
-        </p:txBody>
-      </p:sp>
-    </p:spTree>
-    <p:extLst>
-      <p:ext uri="{BB962C8B-B14F-4D97-AF65-F5344CB8AC3E}">
-        <p14:creationId xmlns:p14="http://schemas.microsoft.com/office/powerpoint/2010/main" val="1024086991"/>
-      </p:ext>
-    </p:extLst>
-  </p:cSld>
-  <p:clrMapOvr>
-    <a:masterClrMapping/>
-  </p:clrMapOvr>
-</p:notes>
-</file>
-
-<file path=ppt/notesSlides/notesSlide14.xml><?xml version="1.0" encoding="utf-8"?>
-<p:notes xmlns:a="http://schemas.openxmlformats.org/drawingml/2006/main" xmlns:r="http://schemas.openxmlformats.org/officeDocument/2006/relationships" xmlns:p="http://schemas.openxmlformats.org/presentationml/2006/main">
-  <p:cSld>
-    <p:spTree>
-      <p:nvGrpSpPr>
-        <p:cNvPr id="1" name=""/>
-        <p:cNvGrpSpPr/>
-        <p:nvPr/>
-      </p:nvGrpSpPr>
-      <p:grpSpPr>
-        <a:xfrm>
-          <a:off x="0" y="0"/>
-          <a:ext cx="0" cy="0"/>
-          <a:chOff x="0" y="0"/>
-          <a:chExt cx="0" cy="0"/>
-        </a:xfrm>
-      </p:grpSpPr>
-      <p:sp>
-        <p:nvSpPr>
-          <p:cNvPr id="2" name="Slide Image Placeholder 1"/>
-          <p:cNvSpPr>
-            <a:spLocks noGrp="1" noRot="1" noChangeAspect="1"/>
-          </p:cNvSpPr>
-          <p:nvPr>
-            <p:ph type="sldImg"/>
-          </p:nvPr>
-        </p:nvSpPr>
-        <p:spPr/>
-      </p:sp>
-      <p:sp>
-        <p:nvSpPr>
-          <p:cNvPr id="3" name="Notes Placeholder 2"/>
-          <p:cNvSpPr>
-            <a:spLocks noGrp="1"/>
-          </p:cNvSpPr>
-          <p:nvPr>
-            <p:ph type="body" idx="1"/>
-          </p:nvPr>
-        </p:nvSpPr>
-        <p:spPr/>
-        <p:txBody>
-          <a:bodyPr/>
-          <a:lstStyle/>
-          <a:p>
-            <a:endParaRPr lang="en-US" dirty="0"/>
-          </a:p>
-        </p:txBody>
-      </p:sp>
-      <p:sp>
-        <p:nvSpPr>
-          <p:cNvPr id="4" name="Slide Number Placeholder 3"/>
-          <p:cNvSpPr>
-            <a:spLocks noGrp="1"/>
-          </p:cNvSpPr>
-          <p:nvPr>
-            <p:ph type="sldNum" sz="quarter" idx="10"/>
-          </p:nvPr>
-        </p:nvSpPr>
-        <p:spPr/>
-        <p:txBody>
-          <a:bodyPr/>
-          <a:lstStyle/>
-          <a:p>
-            <a:fld id="{F7021451-1387-4CA6-816F-3879F97B5CBC}" type="slidenum">
-              <a:rPr lang="en-US"/>
-              <a:t>14</a:t>
             </a:fld>
             <a:endParaRPr lang="en-US"/>
           </a:p>
@@ -1108,7 +939,7 @@
     </p:spTree>
     <p:extLst>
       <p:ext uri="{BB962C8B-B14F-4D97-AF65-F5344CB8AC3E}">
-        <p14:creationId xmlns:p14="http://schemas.microsoft.com/office/powerpoint/2010/main" val="532187104"/>
+        <p14:creationId xmlns:p14="http://schemas.microsoft.com/office/powerpoint/2010/main" val="2916338226"/>
       </p:ext>
     </p:extLst>
   </p:cSld>
@@ -1276,7 +1107,7 @@
     </p:spTree>
     <p:extLst>
       <p:ext uri="{BB962C8B-B14F-4D97-AF65-F5344CB8AC3E}">
-        <p14:creationId xmlns:p14="http://schemas.microsoft.com/office/powerpoint/2010/main" val="4000605064"/>
+        <p14:creationId xmlns:p14="http://schemas.microsoft.com/office/powerpoint/2010/main" val="3572796426"/>
       </p:ext>
     </p:extLst>
   </p:cSld>
@@ -1351,7 +1182,7 @@
           <a:p>
             <a:fld id="{F7021451-1387-4CA6-816F-3879F97B5CBC}" type="slidenum">
               <a:rPr lang="en-US"/>
-              <a:t>8</a:t>
+              <a:t>9</a:t>
             </a:fld>
             <a:endParaRPr lang="en-US"/>
           </a:p>
@@ -1435,7 +1266,7 @@
           <a:p>
             <a:fld id="{F7021451-1387-4CA6-816F-3879F97B5CBC}" type="slidenum">
               <a:rPr lang="en-US"/>
-              <a:t>9</a:t>
+              <a:t>10</a:t>
             </a:fld>
             <a:endParaRPr lang="en-US"/>
           </a:p>
@@ -2145,7 +1976,7 @@
         </p:nvSpPr>
         <p:spPr>
           <a:xfrm>
-            <a:off x="387458" y="451426"/>
+            <a:off x="364882" y="652908"/>
             <a:ext cx="3603333" cy="485021"/>
           </a:xfrm>
           <a:prstGeom prst="roundRect">
@@ -3377,10 +3208,10 @@
         </p:nvGrpSpPr>
         <p:grpSpPr>
           <a:xfrm>
-            <a:off x="-11288" y="2510327"/>
-            <a:ext cx="4224335" cy="431080"/>
+            <a:off x="-19007" y="2928677"/>
+            <a:ext cx="4276134" cy="431080"/>
             <a:chOff x="0" y="2985846"/>
-            <a:chExt cx="4224335" cy="431080"/>
+            <a:chExt cx="4276134" cy="431080"/>
           </a:xfrm>
         </p:grpSpPr>
         <p:grpSp>
@@ -3523,7 +3354,7 @@
           </p:nvSpPr>
           <p:spPr>
             <a:xfrm>
-              <a:off x="187307" y="3100839"/>
+              <a:off x="466725" y="3100839"/>
               <a:ext cx="3809409" cy="223587"/>
             </a:xfrm>
             <a:prstGeom prst="rect">
@@ -3571,7 +3402,7 @@
         </p:nvSpPr>
         <p:spPr>
           <a:xfrm>
-            <a:off x="854979" y="3645023"/>
+            <a:off x="2302781" y="4344678"/>
             <a:ext cx="1633432" cy="154209"/>
           </a:xfrm>
           <a:prstGeom prst="rect">
@@ -3615,7 +3446,7 @@
         </p:nvSpPr>
         <p:spPr>
           <a:xfrm>
-            <a:off x="854979" y="3806607"/>
+            <a:off x="2302779" y="4471625"/>
             <a:ext cx="1633432" cy="227435"/>
           </a:xfrm>
           <a:prstGeom prst="rect">
@@ -3671,7 +3502,7 @@
         </p:blipFill>
         <p:spPr>
           <a:xfrm>
-            <a:off x="429808" y="3639905"/>
+            <a:off x="1879018" y="4336133"/>
             <a:ext cx="395331" cy="381795"/>
           </a:xfrm>
           <a:prstGeom prst="rect">
@@ -3693,7 +3524,7 @@
         </p:nvSpPr>
         <p:spPr>
           <a:xfrm>
-            <a:off x="3176086" y="3642226"/>
+            <a:off x="3924234" y="4279537"/>
             <a:ext cx="1809978" cy="154209"/>
           </a:xfrm>
           <a:prstGeom prst="rect">
@@ -3737,7 +3568,7 @@
         </p:nvSpPr>
         <p:spPr>
           <a:xfrm>
-            <a:off x="3176086" y="3803810"/>
+            <a:off x="3945013" y="4413410"/>
             <a:ext cx="2272871" cy="483915"/>
           </a:xfrm>
           <a:prstGeom prst="rect">
@@ -3765,7 +3596,7 @@
                 <a:cs typeface="Arial" panose="020B0604020202020204" pitchFamily="34" charset="0"/>
                 <a:sym typeface="Aileron Bold"/>
               </a:rPr>
-              <a:t>snehakhandelwal666@gmail.com</a:t>
+              <a:t>Snehakhandelwal666@gmail.com</a:t>
             </a:r>
           </a:p>
         </p:txBody>
@@ -3793,7 +3624,7 @@
         </p:blipFill>
         <p:spPr>
           <a:xfrm>
-            <a:off x="2747249" y="3631981"/>
+            <a:off x="3523298" y="4318413"/>
             <a:ext cx="398279" cy="389719"/>
           </a:xfrm>
           <a:prstGeom prst="rect">
@@ -3815,7 +3646,7 @@
         </p:nvGrpSpPr>
         <p:grpSpPr>
           <a:xfrm>
-            <a:off x="860459" y="4337076"/>
+            <a:off x="514884" y="4294693"/>
             <a:ext cx="2272871" cy="389019"/>
             <a:chOff x="3139699" y="4295282"/>
             <a:chExt cx="2272871" cy="389019"/>
@@ -3960,7 +3791,7 @@
         </p:blipFill>
         <p:spPr>
           <a:xfrm>
-            <a:off x="447718" y="4346948"/>
+            <a:off x="109190" y="4290789"/>
             <a:ext cx="375815" cy="381063"/>
           </a:xfrm>
           <a:prstGeom prst="rect">
@@ -3982,7 +3813,7 @@
         </p:nvGrpSpPr>
         <p:grpSpPr>
           <a:xfrm>
-            <a:off x="595271" y="566321"/>
+            <a:off x="640733" y="769747"/>
             <a:ext cx="3051630" cy="258616"/>
             <a:chOff x="1068621" y="826472"/>
             <a:chExt cx="2166264" cy="183584"/>
@@ -4204,7 +4035,7 @@
         </p:blipFill>
         <p:spPr>
           <a:xfrm>
-            <a:off x="173754" y="773121"/>
+            <a:off x="173754" y="1046557"/>
             <a:ext cx="3854253" cy="1849530"/>
           </a:xfrm>
           <a:prstGeom prst="rect">
@@ -4214,10 +4045,10 @@
       </p:pic>
       <p:sp>
         <p:nvSpPr>
-          <p:cNvPr id="52" name="TextBox 42">
+          <p:cNvPr id="27" name="TextBox 26">
             <a:extLst>
               <a:ext uri="{FF2B5EF4-FFF2-40B4-BE49-F238E27FC236}">
-                <a16:creationId xmlns:a16="http://schemas.microsoft.com/office/drawing/2014/main" id="{6114E822-BCD2-EDCF-9B3E-9467CBBE7C59}"/>
+                <a16:creationId xmlns:a16="http://schemas.microsoft.com/office/drawing/2014/main" id="{56CE2B4C-42F3-6C3D-A2AC-C0C414252A53}"/>
               </a:ext>
             </a:extLst>
           </p:cNvPr>
@@ -4225,282 +4056,58 @@
           <p:nvPr/>
         </p:nvSpPr>
         <p:spPr>
-          <a:xfrm flipH="1">
-            <a:off x="5504509" y="1301897"/>
-            <a:ext cx="45719" cy="230832"/>
+          <a:xfrm>
+            <a:off x="68461" y="3462539"/>
+            <a:ext cx="5447162" cy="369332"/>
           </a:xfrm>
           <a:prstGeom prst="rect">
             <a:avLst/>
           </a:prstGeom>
+          <a:noFill/>
         </p:spPr>
         <p:txBody>
-          <a:bodyPr wrap="square" lIns="0" tIns="0" rIns="0" bIns="0" rtlCol="0" anchor="t">
+          <a:bodyPr wrap="square">
             <a:spAutoFit/>
           </a:bodyPr>
           <a:lstStyle/>
           <a:p>
-            <a:pPr algn="l"/>
-            <a:r>
-              <a:rPr lang="en-US" sz="1500" b="1" i="0" u="none" strike="noStrike" baseline="0" dirty="0">
+            <a:pPr algn="ctr">
+              <a:spcBef>
+                <a:spcPts val="400"/>
+              </a:spcBef>
+              <a:spcAft>
+                <a:spcPts val="400"/>
+              </a:spcAft>
+              <a:buNone/>
+            </a:pPr>
+            <a:r>
+              <a:rPr lang="en-US" b="1" dirty="0">
                 <a:solidFill>
-                  <a:schemeClr val="accent1">
-                    <a:lumMod val="75000"/>
-                  </a:schemeClr>
+                  <a:srgbClr val="1B3A8A"/>
                 </a:solidFill>
                 <a:latin typeface="Arial" panose="020B0604020202020204" pitchFamily="34" charset="0"/>
-                <a:cs typeface="Arial" panose="020B0604020202020204" pitchFamily="34" charset="0"/>
-              </a:rPr>
-              <a:t> </a:t>
-            </a:r>
-            <a:r>
-              <a:rPr lang="en-US" sz="1500" b="1" dirty="0">
+                <a:ea typeface="Arial" panose="020B0604020202020204" pitchFamily="34" charset="0"/>
+              </a:rPr>
+              <a:t>P</a:t>
+            </a:r>
+            <a:r>
+              <a:rPr lang="en-IN" b="1" dirty="0">
                 <a:solidFill>
-                  <a:schemeClr val="accent1">
-                    <a:lumMod val="75000"/>
-                  </a:schemeClr>
+                  <a:srgbClr val="1B3A8A"/>
                 </a:solidFill>
                 <a:latin typeface="Arial" panose="020B0604020202020204" pitchFamily="34" charset="0"/>
-                <a:ea typeface="Aileron Bold"/>
-                <a:cs typeface="Arial" panose="020B0604020202020204" pitchFamily="34" charset="0"/>
-                <a:sym typeface="Aileron Bold"/>
-              </a:rPr>
-              <a:t> </a:t>
-            </a:r>
-          </a:p>
-        </p:txBody>
-      </p:sp>
-      <p:grpSp>
-        <p:nvGrpSpPr>
-          <p:cNvPr id="26" name="Group 25">
-            <a:extLst>
-              <a:ext uri="{FF2B5EF4-FFF2-40B4-BE49-F238E27FC236}">
-                <a16:creationId xmlns:a16="http://schemas.microsoft.com/office/drawing/2014/main" id="{7C5B66B9-82FD-1216-EBCA-8E6DA277DF01}"/>
-              </a:ext>
-            </a:extLst>
-          </p:cNvPr>
-          <p:cNvGrpSpPr/>
-          <p:nvPr/>
-        </p:nvGrpSpPr>
-        <p:grpSpPr>
-          <a:xfrm>
-            <a:off x="-26406" y="2556734"/>
-            <a:ext cx="4254569" cy="1079483"/>
-            <a:chOff x="0" y="2985846"/>
-            <a:chExt cx="4254569" cy="1079483"/>
-          </a:xfrm>
-        </p:grpSpPr>
-        <p:grpSp>
-          <p:nvGrpSpPr>
-            <p:cNvPr id="27" name="Group 28">
-              <a:extLst>
-                <a:ext uri="{FF2B5EF4-FFF2-40B4-BE49-F238E27FC236}">
-                  <a16:creationId xmlns:a16="http://schemas.microsoft.com/office/drawing/2014/main" id="{DAE40591-CF81-76F2-E153-040DB44B9331}"/>
-                </a:ext>
-              </a:extLst>
-            </p:cNvPr>
-            <p:cNvGrpSpPr/>
-            <p:nvPr/>
-          </p:nvGrpSpPr>
-          <p:grpSpPr>
-            <a:xfrm>
-              <a:off x="0" y="2985846"/>
-              <a:ext cx="4254569" cy="930088"/>
-              <a:chOff x="0" y="-38100"/>
-              <a:chExt cx="4387017" cy="959043"/>
-            </a:xfrm>
-          </p:grpSpPr>
-          <p:sp>
-            <p:nvSpPr>
-              <p:cNvPr id="38" name="Freeform 29">
-                <a:extLst>
-                  <a:ext uri="{FF2B5EF4-FFF2-40B4-BE49-F238E27FC236}">
-                    <a16:creationId xmlns:a16="http://schemas.microsoft.com/office/drawing/2014/main" id="{D90728E9-11D8-BEA0-7F1A-11B6B0F3ED79}"/>
-                  </a:ext>
-                </a:extLst>
-              </p:cNvPr>
-              <p:cNvSpPr/>
-              <p:nvPr/>
-            </p:nvSpPr>
-            <p:spPr>
-              <a:xfrm>
-                <a:off x="31175" y="514543"/>
-                <a:ext cx="4355842" cy="406400"/>
-              </a:xfrm>
-              <a:custGeom>
-                <a:avLst/>
-                <a:gdLst/>
-                <a:ahLst/>
-                <a:cxnLst/>
-                <a:rect l="l" t="t" r="r" b="b"/>
-                <a:pathLst>
-                  <a:path w="4355842" h="406400">
-                    <a:moveTo>
-                      <a:pt x="4152642" y="0"/>
-                    </a:moveTo>
-                    <a:lnTo>
-                      <a:pt x="0" y="0"/>
-                    </a:lnTo>
-                    <a:lnTo>
-                      <a:pt x="0" y="406400"/>
-                    </a:lnTo>
-                    <a:lnTo>
-                      <a:pt x="4152642" y="406400"/>
-                    </a:lnTo>
-                    <a:lnTo>
-                      <a:pt x="4355842" y="203200"/>
-                    </a:lnTo>
-                    <a:lnTo>
-                      <a:pt x="4152642" y="0"/>
-                    </a:lnTo>
-                    <a:close/>
-                  </a:path>
-                </a:pathLst>
-              </a:custGeom>
-              <a:gradFill rotWithShape="1">
-                <a:gsLst>
-                  <a:gs pos="0">
-                    <a:srgbClr val="042882">
-                      <a:alpha val="100000"/>
-                    </a:srgbClr>
-                  </a:gs>
-                  <a:gs pos="100000">
-                    <a:srgbClr val="2A83D0">
-                      <a:alpha val="100000"/>
-                    </a:srgbClr>
-                  </a:gs>
-                </a:gsLst>
-                <a:lin ang="0"/>
-              </a:gradFill>
-            </p:spPr>
-            <p:txBody>
-              <a:bodyPr/>
-              <a:lstStyle/>
-              <a:p>
-                <a:endParaRPr lang="en-IN" sz="700"/>
-              </a:p>
-            </p:txBody>
-          </p:sp>
-          <p:sp>
-            <p:nvSpPr>
-              <p:cNvPr id="45" name="TextBox 30">
-                <a:extLst>
-                  <a:ext uri="{FF2B5EF4-FFF2-40B4-BE49-F238E27FC236}">
-                    <a16:creationId xmlns:a16="http://schemas.microsoft.com/office/drawing/2014/main" id="{FE910E71-87D6-9545-1B9A-94640B304A78}"/>
-                  </a:ext>
-                </a:extLst>
-              </p:cNvPr>
-              <p:cNvSpPr txBox="1"/>
-              <p:nvPr/>
-            </p:nvSpPr>
-            <p:spPr>
-              <a:xfrm>
-                <a:off x="0" y="-38100"/>
-                <a:ext cx="4241542" cy="444500"/>
-              </a:xfrm>
-              <a:prstGeom prst="rect">
-                <a:avLst/>
-              </a:prstGeom>
-            </p:spPr>
-            <p:txBody>
-              <a:bodyPr lIns="25400" tIns="25400" rIns="25400" bIns="25400" rtlCol="0" anchor="ctr"/>
-              <a:lstStyle/>
-              <a:p>
-                <a:pPr algn="ctr">
-                  <a:lnSpc>
-                    <a:spcPts val="1330"/>
-                  </a:lnSpc>
-                </a:pPr>
-                <a:endParaRPr sz="700"/>
-              </a:p>
-            </p:txBody>
-          </p:sp>
-        </p:grpSp>
-        <p:sp>
-          <p:nvSpPr>
-            <p:cNvPr id="37" name="TextBox 44">
-              <a:extLst>
-                <a:ext uri="{FF2B5EF4-FFF2-40B4-BE49-F238E27FC236}">
-                  <a16:creationId xmlns:a16="http://schemas.microsoft.com/office/drawing/2014/main" id="{32A87B5E-B531-4A22-FAB1-2256D2CE91D2}"/>
-                </a:ext>
-              </a:extLst>
-            </p:cNvPr>
-            <p:cNvSpPr txBox="1"/>
-            <p:nvPr/>
-          </p:nvSpPr>
-          <p:spPr>
-            <a:xfrm>
-              <a:off x="140947" y="3598085"/>
-              <a:ext cx="4107903" cy="467244"/>
-            </a:xfrm>
-            <a:prstGeom prst="rect">
-              <a:avLst/>
-            </a:prstGeom>
-          </p:spPr>
-          <p:txBody>
-            <a:bodyPr wrap="square" lIns="0" tIns="0" rIns="0" bIns="0" rtlCol="0" anchor="t">
-              <a:spAutoFit/>
-            </a:bodyPr>
-            <a:lstStyle/>
-            <a:p>
-              <a:pPr>
-                <a:lnSpc>
-                  <a:spcPts val="1943"/>
-                </a:lnSpc>
-              </a:pPr>
-              <a:r>
-                <a:rPr lang="en-US" sz="1400" b="1" dirty="0">
-                  <a:solidFill>
-                    <a:schemeClr val="bg1"/>
-                  </a:solidFill>
-                  <a:latin typeface="Arial" panose="020B0604020202020204" pitchFamily="34" charset="0"/>
-                  <a:ea typeface="Aileron Bold"/>
-                  <a:cs typeface="Arial" panose="020B0604020202020204" pitchFamily="34" charset="0"/>
-                  <a:sym typeface="Aileron Bold"/>
-                </a:rPr>
-                <a:t>Pay Lens: </a:t>
-              </a:r>
-              <a:r>
-                <a:rPr lang="en-US" sz="1400" b="1" i="0" u="none" strike="noStrike" baseline="0" dirty="0">
-                  <a:solidFill>
-                    <a:schemeClr val="bg1"/>
-                  </a:solidFill>
-                  <a:latin typeface="Arial" panose="020B0604020202020204" pitchFamily="34" charset="0"/>
-                  <a:cs typeface="Arial" panose="020B0604020202020204" pitchFamily="34" charset="0"/>
-                </a:rPr>
-                <a:t>visualizing salary truth with AI &amp; BI </a:t>
-              </a:r>
-              <a:r>
-                <a:rPr lang="en-US" sz="1400" b="1" dirty="0">
-                  <a:solidFill>
-                    <a:schemeClr val="bg1"/>
-                  </a:solidFill>
-                  <a:latin typeface="Arial" panose="020B0604020202020204" pitchFamily="34" charset="0"/>
-                  <a:ea typeface="Aileron Bold"/>
-                  <a:cs typeface="Arial" panose="020B0604020202020204" pitchFamily="34" charset="0"/>
-                  <a:sym typeface="Aileron Bold"/>
-                </a:rPr>
-                <a:t> </a:t>
-              </a:r>
-            </a:p>
-            <a:p>
-              <a:pPr>
-                <a:lnSpc>
-                  <a:spcPts val="1943"/>
-                </a:lnSpc>
-              </a:pPr>
-              <a:endParaRPr lang="en-US" sz="1400" b="1" spc="583" dirty="0">
-                <a:solidFill>
-                  <a:srgbClr val="FFFFFF"/>
-                </a:solidFill>
-                <a:latin typeface="Arial" panose="020B0604020202020204" pitchFamily="34" charset="0"/>
-                <a:ea typeface="Aileron Bold"/>
-                <a:cs typeface="Arial" panose="020B0604020202020204" pitchFamily="34" charset="0"/>
-                <a:sym typeface="Aileron Bold"/>
-              </a:endParaRPr>
-            </a:p>
-          </p:txBody>
-        </p:sp>
-      </p:grpSp>
+                <a:ea typeface="Arial" panose="020B0604020202020204" pitchFamily="34" charset="0"/>
+              </a:rPr>
+              <a:t>ay Lens – visualising salary truth by AI &amp; BI</a:t>
+            </a:r>
+            <a:endParaRPr lang="en-IN" sz="1050" dirty="0">
+              <a:effectLst/>
+              <a:latin typeface="Arial" panose="020B0604020202020204" pitchFamily="34" charset="0"/>
+              <a:ea typeface="Arial" panose="020B0604020202020204" pitchFamily="34" charset="0"/>
+            </a:endParaRPr>
+          </a:p>
+        </p:txBody>
+      </p:sp>
     </p:spTree>
     <p:custDataLst>
       <p:tags r:id="rId1"/>
@@ -4589,7 +4196,7 @@
         </p:nvSpPr>
         <p:spPr>
           <a:xfrm>
-            <a:off x="365760" y="692834"/>
+            <a:off x="365760" y="685800"/>
             <a:ext cx="8412480" cy="3977640"/>
           </a:xfrm>
           <a:prstGeom prst="rect">
@@ -4621,8 +4228,8 @@
         </p:nvSpPr>
         <p:spPr>
           <a:xfrm>
-            <a:off x="365760" y="685800"/>
-            <a:ext cx="8412480" cy="384048"/>
+            <a:off x="365760" y="685799"/>
+            <a:ext cx="8412480" cy="1002323"/>
           </a:xfrm>
           <a:prstGeom prst="rect">
             <a:avLst/>
@@ -4730,7 +4337,7 @@
         <p:spPr>
           <a:xfrm>
             <a:off x="1371600" y="777240"/>
-            <a:ext cx="5029200" cy="201168"/>
+            <a:ext cx="7223760" cy="777240"/>
           </a:xfrm>
           <a:prstGeom prst="rect">
             <a:avLst/>
@@ -4762,7 +4369,7 @@
         <p:spPr>
           <a:xfrm>
             <a:off x="1389888" y="768096"/>
-            <a:ext cx="4992624" cy="219456"/>
+            <a:ext cx="6558358" cy="740664"/>
           </a:xfrm>
           <a:prstGeom prst="rect">
             <a:avLst/>
@@ -4774,19 +4381,24 @@
           <a:bodyPr wrap="square" rtlCol="0" anchor="ctr"/>
           <a:lstStyle/>
           <a:p>
-            <a:pPr marL="0" indent="0">
-              <a:buNone/>
-            </a:pPr>
-            <a:r>
-              <a:rPr lang="en-US" sz="900" dirty="0">
+            <a:pPr algn="l"/>
+            <a:endParaRPr lang="en-IN" sz="1800" b="0" i="0" u="none" strike="noStrike" baseline="0" dirty="0">
+              <a:solidFill>
+                <a:srgbClr val="000000"/>
+              </a:solidFill>
+              <a:latin typeface="Times New Roman" panose="02020603050405020304" pitchFamily="18" charset="0"/>
+            </a:endParaRPr>
+          </a:p>
+          <a:p>
+            <a:pPr algn="just"/>
+            <a:r>
+              <a:rPr lang="en-IN" b="0" i="0" u="none" strike="noStrike" baseline="0" dirty="0">
                 <a:solidFill>
-                  <a:srgbClr val="607D8B"/>
+                  <a:srgbClr val="0462C1"/>
                 </a:solidFill>
-                <a:latin typeface="Calibri" pitchFamily="34" charset="0"/>
-                <a:ea typeface="Calibri" pitchFamily="34" charset="-122"/>
-                <a:cs typeface="Calibri" pitchFamily="34" charset="-120"/>
-              </a:rPr>
-              <a:t>[https://your-project-demo-link.com]</a:t>
+                <a:latin typeface="Times New Roman" panose="02020603050405020304" pitchFamily="18" charset="0"/>
+              </a:rPr>
+              <a:t>https://drive.google.com/file/d/16qmxqP11MpPYHH1ihfjbx9XcL1QYBSVm/view?usp=sharing</a:t>
             </a:r>
             <a:endParaRPr lang="en-US" sz="900" dirty="0"/>
           </a:p>
@@ -4978,15 +4590,15 @@
                 <a:solidFill>
                   <a:srgbClr val="1B3A8A"/>
                 </a:solidFill>
-                <a:latin typeface="Times New Roman" panose="02020603050405020304" pitchFamily="18" charset="0"/>
+                <a:latin typeface="Lato" panose="020F0502020204030203" pitchFamily="34" charset="0"/>
                 <a:ea typeface="Calibri" pitchFamily="34" charset="-122"/>
-                <a:cs typeface="Times New Roman" panose="02020603050405020304" pitchFamily="18" charset="0"/>
+                <a:cs typeface="Arial" panose="020B0604020202020204" pitchFamily="34" charset="0"/>
               </a:rPr>
               <a:t>Conclusion</a:t>
             </a:r>
             <a:endParaRPr lang="en-US" sz="2000" dirty="0">
-              <a:latin typeface="Times New Roman" panose="02020603050405020304" pitchFamily="18" charset="0"/>
-              <a:cs typeface="Times New Roman" panose="02020603050405020304" pitchFamily="18" charset="0"/>
+              <a:latin typeface="Lato" panose="020F0502020204030203" pitchFamily="34" charset="0"/>
+              <a:cs typeface="Arial" panose="020B0604020202020204" pitchFamily="34" charset="0"/>
             </a:endParaRPr>
           </a:p>
         </p:txBody>
@@ -5000,7 +4612,7 @@
         <p:spPr>
           <a:xfrm>
             <a:off x="125486" y="1084927"/>
-            <a:ext cx="4446513" cy="1987136"/>
+            <a:ext cx="4446513" cy="3474720"/>
           </a:xfrm>
           <a:prstGeom prst="rect">
             <a:avLst/>
@@ -5012,36 +4624,120 @@
           <a:bodyPr wrap="square" rtlCol="0" anchor="t"/>
           <a:lstStyle/>
           <a:p>
-            <a:pPr algn="just"/>
-            <a:r>
-              <a:rPr lang="en-US" sz="1600" b="0" i="0" dirty="0">
+            <a:pPr marL="285750" indent="-285750" algn="just">
+              <a:lnSpc>
+                <a:spcPct val="150000"/>
+              </a:lnSpc>
+              <a:buFont typeface="Wingdings" panose="05000000000000000000" pitchFamily="2" charset="2"/>
+              <a:buChar char="ü"/>
+            </a:pPr>
+            <a:r>
+              <a:rPr lang="en-US" dirty="0">
                 <a:solidFill>
-                  <a:srgbClr val="27251E"/>
+                  <a:srgbClr val="1A1A2E"/>
                 </a:solidFill>
-                <a:effectLst/>
-                <a:latin typeface="Times New Roman" panose="02020603050405020304" pitchFamily="18" charset="0"/>
-                <a:cs typeface="Times New Roman" panose="02020603050405020304" pitchFamily="18" charset="0"/>
-              </a:rPr>
-              <a:t>This project integrates Excel, Power BI, Copilot AI, and chatbot technology to improve payroll transparency and compliance. It delivers clear salary insights, reduces disputes, and supports scalable AI-driven payroll management</a:t>
-            </a:r>
-            <a:r>
-              <a:rPr lang="en-US" sz="1600" b="0" i="0" dirty="0">
+                <a:ea typeface="Calibri" pitchFamily="34" charset="-122"/>
+                <a:cs typeface="Arial" panose="020B0604020202020204" pitchFamily="34" charset="0"/>
+              </a:rPr>
+              <a:t>Intelligent Payroll Data Infrastructure </a:t>
+            </a:r>
+          </a:p>
+          <a:p>
+            <a:pPr marL="285750" indent="-285750" algn="just">
+              <a:lnSpc>
+                <a:spcPct val="150000"/>
+              </a:lnSpc>
+              <a:buFont typeface="Wingdings" panose="05000000000000000000" pitchFamily="2" charset="2"/>
+              <a:buChar char="ü"/>
+            </a:pPr>
+            <a:r>
+              <a:rPr lang="en-US" dirty="0">
                 <a:solidFill>
-                  <a:srgbClr val="27251E"/>
+                  <a:srgbClr val="1A1A2E"/>
                 </a:solidFill>
-                <a:effectLst/>
-                <a:latin typeface="pplxSerif"/>
-              </a:rPr>
-              <a:t>.</a:t>
-            </a:r>
-          </a:p>
-          <a:p>
-            <a:pPr marL="0" indent="0" algn="just">
-              <a:buNone/>
+                <a:ea typeface="Calibri" pitchFamily="34" charset="-122"/>
+                <a:cs typeface="Arial" panose="020B0604020202020204" pitchFamily="34" charset="0"/>
+              </a:rPr>
+              <a:t>Automated Legal Alerts</a:t>
+            </a:r>
+          </a:p>
+          <a:p>
+            <a:pPr marL="285750" indent="-285750" algn="just">
+              <a:lnSpc>
+                <a:spcPct val="150000"/>
+              </a:lnSpc>
+              <a:buFont typeface="Wingdings" panose="05000000000000000000" pitchFamily="2" charset="2"/>
+              <a:buChar char="ü"/>
             </a:pPr>
+            <a:r>
+              <a:rPr lang="en-US" dirty="0">
+                <a:solidFill>
+                  <a:srgbClr val="1A1A2E"/>
+                </a:solidFill>
+                <a:ea typeface="Calibri" pitchFamily="34" charset="-122"/>
+                <a:cs typeface="Arial" panose="020B0604020202020204" pitchFamily="34" charset="0"/>
+              </a:rPr>
+              <a:t>Quantitative Pay Equity Framework </a:t>
+            </a:r>
+          </a:p>
+          <a:p>
+            <a:pPr marL="285750" indent="-285750" algn="just">
+              <a:lnSpc>
+                <a:spcPct val="150000"/>
+              </a:lnSpc>
+              <a:buFont typeface="Wingdings" panose="05000000000000000000" pitchFamily="2" charset="2"/>
+              <a:buChar char="ü"/>
+            </a:pPr>
+            <a:r>
+              <a:rPr lang="en-US" dirty="0">
+                <a:solidFill>
+                  <a:srgbClr val="1A1A2E"/>
+                </a:solidFill>
+                <a:ea typeface="Calibri" pitchFamily="34" charset="-122"/>
+                <a:cs typeface="Arial" panose="020B0604020202020204" pitchFamily="34" charset="0"/>
+              </a:rPr>
+              <a:t>Financial Transparency for workforce</a:t>
+            </a:r>
+          </a:p>
+          <a:p>
+            <a:pPr marL="285750" indent="-285750" algn="just">
+              <a:lnSpc>
+                <a:spcPct val="150000"/>
+              </a:lnSpc>
+              <a:buFont typeface="Wingdings" panose="05000000000000000000" pitchFamily="2" charset="2"/>
+              <a:buChar char="ü"/>
+            </a:pPr>
+            <a:r>
+              <a:rPr lang="en-US" dirty="0">
+                <a:solidFill>
+                  <a:srgbClr val="1A1A2E"/>
+                </a:solidFill>
+                <a:ea typeface="Calibri" pitchFamily="34" charset="-122"/>
+                <a:cs typeface="Arial" panose="020B0604020202020204" pitchFamily="34" charset="0"/>
+              </a:rPr>
+              <a:t>Decision – Intelligent Dashboard </a:t>
+            </a:r>
+          </a:p>
+          <a:p>
+            <a:pPr marL="285750" indent="-285750" algn="just">
+              <a:lnSpc>
+                <a:spcPct val="150000"/>
+              </a:lnSpc>
+              <a:buFont typeface="Wingdings" panose="05000000000000000000" pitchFamily="2" charset="2"/>
+              <a:buChar char="ü"/>
+            </a:pPr>
+            <a:r>
+              <a:rPr lang="en-US" dirty="0">
+                <a:solidFill>
+                  <a:srgbClr val="1A1A2E"/>
+                </a:solidFill>
+                <a:ea typeface="Calibri" pitchFamily="34" charset="-122"/>
+                <a:cs typeface="Arial" panose="020B0604020202020204" pitchFamily="34" charset="0"/>
+              </a:rPr>
+              <a:t>Bridging transparency – skill - Analytical Gap.</a:t>
+            </a:r>
             <a:endParaRPr lang="en-US" dirty="0">
-              <a:latin typeface="Times New Roman" panose="02020603050405020304" pitchFamily="18" charset="0"/>
-              <a:cs typeface="Times New Roman" panose="02020603050405020304" pitchFamily="18" charset="0"/>
+              <a:cs typeface="Arial" panose="020B0604020202020204" pitchFamily="34" charset="0"/>
             </a:endParaRPr>
           </a:p>
         </p:txBody>
@@ -5139,255 +4835,6 @@
 
 <file path=ppt/slides/slide12.xml><?xml version="1.0" encoding="utf-8"?>
 <p:sld xmlns:a="http://schemas.openxmlformats.org/drawingml/2006/main" xmlns:r="http://schemas.openxmlformats.org/officeDocument/2006/relationships" xmlns:p="http://schemas.openxmlformats.org/presentationml/2006/main">
-  <p:cSld>
-    <p:bg>
-      <p:bgPr>
-        <a:solidFill>
-          <a:srgbClr val="FFFFFF"/>
-        </a:solidFill>
-        <a:effectLst/>
-      </p:bgPr>
-    </p:bg>
-    <p:spTree>
-      <p:nvGrpSpPr>
-        <p:cNvPr id="1" name=""/>
-        <p:cNvGrpSpPr/>
-        <p:nvPr/>
-      </p:nvGrpSpPr>
-      <p:grpSpPr>
-        <a:xfrm>
-          <a:off x="0" y="0"/>
-          <a:ext cx="0" cy="0"/>
-          <a:chOff x="0" y="0"/>
-          <a:chExt cx="0" cy="0"/>
-        </a:xfrm>
-      </p:grpSpPr>
-      <p:sp>
-        <p:nvSpPr>
-          <p:cNvPr id="4" name="Text 2"/>
-          <p:cNvSpPr/>
-          <p:nvPr/>
-        </p:nvSpPr>
-        <p:spPr>
-          <a:xfrm>
-            <a:off x="130351" y="612064"/>
-            <a:ext cx="8229600" cy="438912"/>
-          </a:xfrm>
-          <a:prstGeom prst="rect">
-            <a:avLst/>
-          </a:prstGeom>
-          <a:noFill/>
-          <a:ln/>
-        </p:spPr>
-        <p:txBody>
-          <a:bodyPr wrap="square" rtlCol="0" anchor="ctr"/>
-          <a:lstStyle/>
-          <a:p>
-            <a:pPr marL="0" indent="0">
-              <a:buNone/>
-            </a:pPr>
-            <a:r>
-              <a:rPr lang="en-US" sz="2000" b="1" dirty="0">
-                <a:solidFill>
-                  <a:srgbClr val="1B3A8A"/>
-                </a:solidFill>
-                <a:latin typeface="Times New Roman" panose="02020603050405020304" pitchFamily="18" charset="0"/>
-                <a:ea typeface="Calibri" pitchFamily="34" charset="-122"/>
-                <a:cs typeface="Times New Roman" panose="02020603050405020304" pitchFamily="18" charset="0"/>
-              </a:rPr>
-              <a:t>Conclusion</a:t>
-            </a:r>
-            <a:endParaRPr lang="en-US" sz="2000" dirty="0">
-              <a:latin typeface="Times New Roman" panose="02020603050405020304" pitchFamily="18" charset="0"/>
-              <a:cs typeface="Times New Roman" panose="02020603050405020304" pitchFamily="18" charset="0"/>
-            </a:endParaRPr>
-          </a:p>
-        </p:txBody>
-      </p:sp>
-      <p:sp>
-        <p:nvSpPr>
-          <p:cNvPr id="14" name="Text 12"/>
-          <p:cNvSpPr/>
-          <p:nvPr/>
-        </p:nvSpPr>
-        <p:spPr>
-          <a:xfrm>
-            <a:off x="125486" y="1084927"/>
-            <a:ext cx="4446513" cy="3838765"/>
-          </a:xfrm>
-          <a:prstGeom prst="rect">
-            <a:avLst/>
-          </a:prstGeom>
-          <a:noFill/>
-          <a:ln/>
-        </p:spPr>
-        <p:txBody>
-          <a:bodyPr wrap="square" rtlCol="0" anchor="t"/>
-          <a:lstStyle/>
-          <a:p>
-            <a:pPr marL="0" indent="0" algn="just">
-              <a:buNone/>
-            </a:pPr>
-            <a:r>
-              <a:rPr lang="en-US" dirty="0">
-                <a:latin typeface="Times New Roman" panose="02020603050405020304" pitchFamily="18" charset="0"/>
-                <a:cs typeface="Times New Roman" panose="02020603050405020304" pitchFamily="18" charset="0"/>
-              </a:rPr>
-              <a:t>Result achieved – </a:t>
-            </a:r>
-          </a:p>
-          <a:p>
-            <a:pPr marL="285750" indent="-285750" algn="just">
-              <a:buFont typeface="Wingdings" panose="05000000000000000000" pitchFamily="2" charset="2"/>
-              <a:buChar char="Ø"/>
-            </a:pPr>
-            <a:r>
-              <a:rPr lang="en-US" dirty="0">
-                <a:latin typeface="Times New Roman" panose="02020603050405020304" pitchFamily="18" charset="0"/>
-                <a:cs typeface="Times New Roman" panose="02020603050405020304" pitchFamily="18" charset="0"/>
-              </a:rPr>
-              <a:t>Created an Excel with standardized structure and automated financial calculation. </a:t>
-            </a:r>
-          </a:p>
-          <a:p>
-            <a:pPr marL="285750" indent="-285750" algn="just">
-              <a:buFont typeface="Wingdings" panose="05000000000000000000" pitchFamily="2" charset="2"/>
-              <a:buChar char="Ø"/>
-            </a:pPr>
-            <a:r>
-              <a:rPr lang="en-US" dirty="0">
-                <a:latin typeface="Times New Roman" panose="02020603050405020304" pitchFamily="18" charset="0"/>
-                <a:cs typeface="Times New Roman" panose="02020603050405020304" pitchFamily="18" charset="0"/>
-              </a:rPr>
-              <a:t>An Interactive power BI dashboard with Dax measure. </a:t>
-            </a:r>
-          </a:p>
-          <a:p>
-            <a:pPr marL="285750" indent="-285750" algn="just">
-              <a:buFont typeface="Wingdings" panose="05000000000000000000" pitchFamily="2" charset="2"/>
-              <a:buChar char="Ø"/>
-            </a:pPr>
-            <a:r>
-              <a:rPr lang="en-US" dirty="0">
-                <a:latin typeface="Times New Roman" panose="02020603050405020304" pitchFamily="18" charset="0"/>
-                <a:cs typeface="Times New Roman" panose="02020603050405020304" pitchFamily="18" charset="0"/>
-              </a:rPr>
-              <a:t>A copilot agent to prepare report, summary, policy update, discrepancy alerts.</a:t>
-            </a:r>
-          </a:p>
-          <a:p>
-            <a:pPr marL="285750" indent="-285750" algn="just">
-              <a:buFont typeface="Wingdings" panose="05000000000000000000" pitchFamily="2" charset="2"/>
-              <a:buChar char="Ø"/>
-            </a:pPr>
-            <a:r>
-              <a:rPr lang="en-US" dirty="0">
-                <a:latin typeface="Times New Roman" panose="02020603050405020304" pitchFamily="18" charset="0"/>
-                <a:cs typeface="Times New Roman" panose="02020603050405020304" pitchFamily="18" charset="0"/>
-              </a:rPr>
-              <a:t>An enabled chatbot to simplify and explain the payroll structure, compliance fulfilled or not, policy explanation.  </a:t>
-            </a:r>
-          </a:p>
-        </p:txBody>
-      </p:sp>
-      <p:sp>
-        <p:nvSpPr>
-          <p:cNvPr id="19" name="Text 17"/>
-          <p:cNvSpPr/>
-          <p:nvPr/>
-        </p:nvSpPr>
-        <p:spPr>
-          <a:xfrm>
-            <a:off x="5303520" y="3474720"/>
-            <a:ext cx="3017520" cy="502920"/>
-          </a:xfrm>
-          <a:prstGeom prst="rect">
-            <a:avLst/>
-          </a:prstGeom>
-          <a:noFill/>
-          <a:ln/>
-        </p:spPr>
-        <p:txBody>
-          <a:bodyPr wrap="square" rtlCol="0" anchor="ctr"/>
-          <a:lstStyle/>
-          <a:p>
-            <a:pPr marL="0" indent="0" algn="ctr">
-              <a:buNone/>
-            </a:pPr>
-            <a:r>
-              <a:rPr lang="en-US" sz="1600" b="1" kern="0" spc="200" dirty="0">
-                <a:solidFill>
-                  <a:srgbClr val="FFFFFF"/>
-                </a:solidFill>
-                <a:latin typeface="Lato" panose="020F0502020204030203" pitchFamily="34" charset="0"/>
-                <a:ea typeface="Calibri" pitchFamily="34" charset="-122"/>
-                <a:cs typeface="Calibri" pitchFamily="34" charset="-120"/>
-              </a:rPr>
-              <a:t>CONCLUSION</a:t>
-            </a:r>
-            <a:endParaRPr lang="en-US" sz="1600" dirty="0">
-              <a:latin typeface="Lato" panose="020F0502020204030203" pitchFamily="34" charset="0"/>
-            </a:endParaRPr>
-          </a:p>
-        </p:txBody>
-      </p:sp>
-      <p:pic>
-        <p:nvPicPr>
-          <p:cNvPr id="20" name="Picture 19" descr="A blue circle with a pencil and paper with a star on it&#10;&#10;AI-generated content may be incorrect.">
-            <a:extLst>
-              <a:ext uri="{FF2B5EF4-FFF2-40B4-BE49-F238E27FC236}">
-                <a16:creationId xmlns:a16="http://schemas.microsoft.com/office/drawing/2014/main" id="{BAE68F53-65EE-1751-E92D-7025D978B68E}"/>
-              </a:ext>
-            </a:extLst>
-          </p:cNvPr>
-          <p:cNvPicPr>
-            <a:picLocks noChangeAspect="1"/>
-          </p:cNvPicPr>
-          <p:nvPr/>
-        </p:nvPicPr>
-        <p:blipFill>
-          <a:blip r:embed="rId4">
-            <a:duotone>
-              <a:schemeClr val="accent1">
-                <a:shade val="45000"/>
-                <a:satMod val="135000"/>
-              </a:schemeClr>
-              <a:prstClr val="white"/>
-            </a:duotone>
-          </a:blip>
-          <a:srcRect l="25397" t="26296" r="26825" b="29752"/>
-          <a:stretch>
-            <a:fillRect/>
-          </a:stretch>
-        </p:blipFill>
-        <p:spPr>
-          <a:xfrm>
-            <a:off x="4898406" y="971550"/>
-            <a:ext cx="3597456" cy="3309355"/>
-          </a:xfrm>
-          <a:prstGeom prst="rect">
-            <a:avLst/>
-          </a:prstGeom>
-        </p:spPr>
-      </p:pic>
-    </p:spTree>
-    <p:custDataLst>
-      <p:tags r:id="rId1"/>
-    </p:custDataLst>
-    <p:extLst>
-      <p:ext uri="{BB962C8B-B14F-4D97-AF65-F5344CB8AC3E}">
-        <p14:creationId xmlns:p14="http://schemas.microsoft.com/office/powerpoint/2010/main" val="510777985"/>
-      </p:ext>
-    </p:extLst>
-  </p:cSld>
-  <p:clrMapOvr>
-    <a:masterClrMapping/>
-  </p:clrMapOvr>
-</p:sld>
-</file>
-
-<file path=ppt/slides/slide13.xml><?xml version="1.0" encoding="utf-8"?>
-<p:sld xmlns:a="http://schemas.openxmlformats.org/drawingml/2006/main" xmlns:r="http://schemas.openxmlformats.org/officeDocument/2006/relationships" xmlns:p="http://schemas.openxmlformats.org/presentationml/2006/main">
   <p:cSld name="Slide 10">
     <p:spTree>
       <p:nvGrpSpPr>
@@ -5432,15 +4879,15 @@
                 <a:solidFill>
                   <a:srgbClr val="1B3A8A"/>
                 </a:solidFill>
-                <a:latin typeface="Times New Roman" panose="02020603050405020304" pitchFamily="18" charset="0"/>
+                <a:latin typeface="Lato" panose="020F0502020204030203" pitchFamily="34" charset="0"/>
                 <a:ea typeface="Calibri" pitchFamily="34" charset="-122"/>
-                <a:cs typeface="Times New Roman" panose="02020603050405020304" pitchFamily="18" charset="0"/>
+                <a:cs typeface="Arial" panose="020B0604020202020204" pitchFamily="34" charset="0"/>
               </a:rPr>
               <a:t>Future Scope</a:t>
             </a:r>
             <a:endParaRPr lang="en-US" sz="2000" dirty="0">
-              <a:latin typeface="Times New Roman" panose="02020603050405020304" pitchFamily="18" charset="0"/>
-              <a:cs typeface="Times New Roman" panose="02020603050405020304" pitchFamily="18" charset="0"/>
+              <a:latin typeface="Lato" panose="020F0502020204030203" pitchFamily="34" charset="0"/>
+              <a:cs typeface="Arial" panose="020B0604020202020204" pitchFamily="34" charset="0"/>
             </a:endParaRPr>
           </a:p>
         </p:txBody>
@@ -5454,7 +4901,7 @@
         <p:spPr>
           <a:xfrm>
             <a:off x="123247" y="1082104"/>
-            <a:ext cx="4114800" cy="2776022"/>
+            <a:ext cx="5116968" cy="3595404"/>
           </a:xfrm>
           <a:prstGeom prst="rect">
             <a:avLst/>
@@ -5467,12 +4914,51 @@
           <a:lstStyle/>
           <a:p>
             <a:pPr marL="285750" indent="-285750" algn="just">
+              <a:lnSpc>
+                <a:spcPct val="150000"/>
+              </a:lnSpc>
               <a:buFont typeface="Wingdings" panose="05000000000000000000" pitchFamily="2" charset="2"/>
-              <a:buChar char="Ø"/>
+              <a:buChar char="ü"/>
             </a:pPr>
             <a:r>
+              <a:rPr lang="en-US" dirty="0">
+                <a:cs typeface="Times New Roman" panose="02020603050405020304" pitchFamily="18" charset="0"/>
+              </a:rPr>
+              <a:t>Extend solution to SMEs, startups, and educational institutions for payroll transparency.</a:t>
+            </a:r>
+          </a:p>
+          <a:p>
+            <a:pPr marL="285750" indent="-285750" algn="just">
+              <a:lnSpc>
+                <a:spcPct val="150000"/>
+              </a:lnSpc>
+              <a:buFont typeface="Wingdings" panose="05000000000000000000" pitchFamily="2" charset="2"/>
+              <a:buChar char="ü"/>
+            </a:pPr>
+            <a:r>
+              <a:rPr lang="en-US" dirty="0">
+                <a:cs typeface="Times New Roman" panose="02020603050405020304" pitchFamily="18" charset="0"/>
+              </a:rPr>
+              <a:t>Excel through Macros and VBA and power Query enabled</a:t>
+            </a:r>
+            <a:r>
+              <a:rPr lang="en-US" dirty="0">
+                <a:latin typeface="Times New Roman" panose="02020603050405020304" pitchFamily="18" charset="0"/>
+                <a:cs typeface="Times New Roman" panose="02020603050405020304" pitchFamily="18" charset="0"/>
+              </a:rPr>
+              <a:t>.</a:t>
+            </a:r>
+          </a:p>
+          <a:p>
+            <a:pPr marL="285750" indent="-285750" algn="just">
+              <a:lnSpc>
+                <a:spcPct val="150000"/>
+              </a:lnSpc>
+              <a:buFont typeface="Wingdings" panose="05000000000000000000" pitchFamily="2" charset="2"/>
+              <a:buChar char="ü"/>
+            </a:pPr>
+            <a:r>
               <a:rPr lang="en-IN" dirty="0">
-                <a:latin typeface="Times New Roman" panose="02020603050405020304" pitchFamily="18" charset="0"/>
                 <a:cs typeface="Times New Roman" panose="02020603050405020304" pitchFamily="18" charset="0"/>
               </a:rPr>
               <a:t>Real-Time Data Integration</a:t>
@@ -5481,19 +4967,20 @@
               <a:solidFill>
                 <a:srgbClr val="1A1A2E"/>
               </a:solidFill>
-              <a:latin typeface="Times New Roman" panose="02020603050405020304" pitchFamily="18" charset="0"/>
               <a:ea typeface="Calibri" pitchFamily="34" charset="-122"/>
               <a:cs typeface="Times New Roman" panose="02020603050405020304" pitchFamily="18" charset="0"/>
             </a:endParaRPr>
           </a:p>
           <a:p>
             <a:pPr marL="285750" indent="-285750" algn="just">
+              <a:lnSpc>
+                <a:spcPct val="150000"/>
+              </a:lnSpc>
               <a:buFont typeface="Wingdings" panose="05000000000000000000" pitchFamily="2" charset="2"/>
-              <a:buChar char="Ø"/>
+              <a:buChar char="ü"/>
             </a:pPr>
             <a:r>
               <a:rPr lang="en-US" dirty="0">
-                <a:latin typeface="Times New Roman" panose="02020603050405020304" pitchFamily="18" charset="0"/>
                 <a:cs typeface="Times New Roman" panose="02020603050405020304" pitchFamily="18" charset="0"/>
               </a:rPr>
               <a:t>Predictive Analytics </a:t>
@@ -5502,19 +4989,20 @@
               <a:solidFill>
                 <a:srgbClr val="1A1A2E"/>
               </a:solidFill>
-              <a:latin typeface="Times New Roman" panose="02020603050405020304" pitchFamily="18" charset="0"/>
               <a:ea typeface="Calibri" pitchFamily="34" charset="-122"/>
               <a:cs typeface="Times New Roman" panose="02020603050405020304" pitchFamily="18" charset="0"/>
             </a:endParaRPr>
           </a:p>
           <a:p>
             <a:pPr marL="285750" indent="-285750" algn="just">
+              <a:lnSpc>
+                <a:spcPct val="150000"/>
+              </a:lnSpc>
               <a:buFont typeface="Wingdings" panose="05000000000000000000" pitchFamily="2" charset="2"/>
-              <a:buChar char="Ø"/>
+              <a:buChar char="ü"/>
             </a:pPr>
             <a:r>
               <a:rPr lang="en-US" dirty="0">
-                <a:latin typeface="Times New Roman" panose="02020603050405020304" pitchFamily="18" charset="0"/>
                 <a:cs typeface="Times New Roman" panose="02020603050405020304" pitchFamily="18" charset="0"/>
               </a:rPr>
               <a:t>Mobile App Interface</a:t>
@@ -5522,12 +5010,14 @@
           </a:p>
           <a:p>
             <a:pPr marL="285750" indent="-285750" algn="just">
+              <a:lnSpc>
+                <a:spcPct val="150000"/>
+              </a:lnSpc>
               <a:buFont typeface="Wingdings" panose="05000000000000000000" pitchFamily="2" charset="2"/>
-              <a:buChar char="Ø"/>
+              <a:buChar char="ü"/>
             </a:pPr>
             <a:r>
               <a:rPr lang="en-US" dirty="0">
-                <a:latin typeface="Times New Roman" panose="02020603050405020304" pitchFamily="18" charset="0"/>
                 <a:cs typeface="Times New Roman" panose="02020603050405020304" pitchFamily="18" charset="0"/>
               </a:rPr>
               <a:t>Multilingual Support</a:t>
@@ -5535,47 +5025,26 @@
           </a:p>
           <a:p>
             <a:pPr marL="285750" indent="-285750" algn="just">
+              <a:lnSpc>
+                <a:spcPct val="150000"/>
+              </a:lnSpc>
               <a:buFont typeface="Wingdings" panose="05000000000000000000" pitchFamily="2" charset="2"/>
-              <a:buChar char="Ø"/>
+              <a:buChar char="ü"/>
             </a:pPr>
             <a:r>
               <a:rPr lang="en-US" dirty="0">
-                <a:latin typeface="Times New Roman" panose="02020603050405020304" pitchFamily="18" charset="0"/>
                 <a:cs typeface="Times New Roman" panose="02020603050405020304" pitchFamily="18" charset="0"/>
               </a:rPr>
               <a:t>Automated Benchmarking</a:t>
             </a:r>
           </a:p>
           <a:p>
-            <a:pPr marL="285750" indent="-285750" algn="just">
-              <a:buFont typeface="Wingdings" panose="05000000000000000000" pitchFamily="2" charset="2"/>
-              <a:buChar char="Ø"/>
+            <a:pPr marL="0" indent="0">
+              <a:buNone/>
             </a:pPr>
-            <a:r>
-              <a:rPr lang="en-US" dirty="0">
-                <a:latin typeface="Times New Roman" panose="02020603050405020304" pitchFamily="18" charset="0"/>
-                <a:cs typeface="Times New Roman" panose="02020603050405020304" pitchFamily="18" charset="0"/>
-              </a:rPr>
-              <a:t>Extend solution to SMEs, startups, and educational institutions for payroll transparency.</a:t>
-            </a:r>
-          </a:p>
-          <a:p>
-            <a:pPr marL="285750" indent="-285750" algn="just">
-              <a:buFont typeface="Wingdings" panose="05000000000000000000" pitchFamily="2" charset="2"/>
-              <a:buChar char="Ø"/>
-            </a:pPr>
-            <a:r>
-              <a:rPr lang="en-US" dirty="0">
-                <a:latin typeface="Times New Roman" panose="02020603050405020304" pitchFamily="18" charset="0"/>
-                <a:cs typeface="Times New Roman" panose="02020603050405020304" pitchFamily="18" charset="0"/>
-              </a:rPr>
-              <a:t>Excel through Macros and VBA and power Query enabled.</a:t>
-            </a:r>
-          </a:p>
-          <a:p>
-            <a:endParaRPr lang="en-US" sz="1600" dirty="0">
-              <a:latin typeface="Times New Roman" panose="02020603050405020304" pitchFamily="18" charset="0"/>
-              <a:cs typeface="Times New Roman" panose="02020603050405020304" pitchFamily="18" charset="0"/>
+            <a:endParaRPr lang="en-US" dirty="0">
+              <a:latin typeface="Lato" panose="020F0502020204030203" pitchFamily="34" charset="0"/>
+              <a:cs typeface="Arial" panose="020B0604020202020204" pitchFamily="34" charset="0"/>
             </a:endParaRPr>
           </a:p>
         </p:txBody>
@@ -5608,8 +5077,8 @@
         </p:blipFill>
         <p:spPr>
           <a:xfrm>
-            <a:off x="4631635" y="879613"/>
-            <a:ext cx="4512365" cy="3384274"/>
+            <a:off x="5456431" y="1498209"/>
+            <a:ext cx="3687569" cy="2765677"/>
           </a:xfrm>
           <a:prstGeom prst="rect">
             <a:avLst/>
@@ -5627,7 +5096,7 @@
 </p:sld>
 </file>
 
-<file path=ppt/slides/slide14.xml><?xml version="1.0" encoding="utf-8"?>
+<file path=ppt/slides/slide13.xml><?xml version="1.0" encoding="utf-8"?>
 <p:sld xmlns:a="http://schemas.openxmlformats.org/drawingml/2006/main" xmlns:r="http://schemas.openxmlformats.org/officeDocument/2006/relationships" xmlns:p="http://schemas.openxmlformats.org/presentationml/2006/main">
   <p:cSld name="Slide 11">
     <p:bg>
@@ -5678,15 +5147,13 @@
             </a:pPr>
             <a:r>
               <a:rPr lang="en-US" sz="1400" kern="0" spc="200" dirty="0">
-                <a:latin typeface="Times New Roman" panose="02020603050405020304" pitchFamily="18" charset="0"/>
                 <a:ea typeface="Calibri" pitchFamily="34" charset="-122"/>
-                <a:cs typeface="Times New Roman" panose="02020603050405020304" pitchFamily="18" charset="0"/>
+                <a:cs typeface="Arial" panose="020B0604020202020204" pitchFamily="34" charset="0"/>
               </a:rPr>
               <a:t>AICW Fellowship  |  Student Project Presentation 2026</a:t>
             </a:r>
             <a:endParaRPr lang="en-US" sz="1400" dirty="0">
-              <a:latin typeface="Times New Roman" panose="02020603050405020304" pitchFamily="18" charset="0"/>
-              <a:cs typeface="Times New Roman" panose="02020603050405020304" pitchFamily="18" charset="0"/>
+              <a:cs typeface="Arial" panose="020B0604020202020204" pitchFamily="34" charset="0"/>
             </a:endParaRPr>
           </a:p>
         </p:txBody>
@@ -5725,31 +5192,27 @@
             </a:r>
             <a:r>
               <a:rPr lang="en-US" sz="1100" dirty="0">
-                <a:latin typeface="Times New Roman" panose="02020603050405020304" pitchFamily="18" charset="0"/>
                 <a:ea typeface="Calibri"/>
-                <a:cs typeface="Times New Roman" panose="02020603050405020304" pitchFamily="18" charset="0"/>
+                <a:cs typeface="Arial" panose="020B0604020202020204" pitchFamily="34" charset="0"/>
               </a:rPr>
               <a:t>LinkedIn  |   </a:t>
             </a:r>
             <a:r>
               <a:rPr lang="en-US" sz="1100" dirty="0" err="1">
-                <a:latin typeface="Times New Roman" panose="02020603050405020304" pitchFamily="18" charset="0"/>
                 <a:ea typeface="Calibri"/>
-                <a:cs typeface="Times New Roman" panose="02020603050405020304" pitchFamily="18" charset="0"/>
+                <a:cs typeface="Arial" panose="020B0604020202020204" pitchFamily="34" charset="0"/>
               </a:rPr>
               <a:t>Edunet</a:t>
             </a:r>
             <a:r>
               <a:rPr lang="en-US" sz="1100" dirty="0">
-                <a:latin typeface="Times New Roman" panose="02020603050405020304" pitchFamily="18" charset="0"/>
                 <a:ea typeface="Calibri"/>
-                <a:cs typeface="Times New Roman" panose="02020603050405020304" pitchFamily="18" charset="0"/>
+                <a:cs typeface="Arial" panose="020B0604020202020204" pitchFamily="34" charset="0"/>
               </a:rPr>
               <a:t> Foundation</a:t>
             </a:r>
             <a:endParaRPr lang="en-US" sz="1100" dirty="0">
-              <a:latin typeface="Times New Roman" panose="02020603050405020304" pitchFamily="18" charset="0"/>
-              <a:cs typeface="Times New Roman" panose="02020603050405020304" pitchFamily="18" charset="0"/>
+              <a:cs typeface="Arial" panose="020B0604020202020204" pitchFamily="34" charset="0"/>
             </a:endParaRPr>
           </a:p>
         </p:txBody>
@@ -5769,7 +5232,7 @@
         <p:spPr>
           <a:xfrm>
             <a:off x="2632982" y="1705295"/>
-            <a:ext cx="3878036" cy="1175065"/>
+            <a:ext cx="3878036" cy="1198405"/>
           </a:xfrm>
           <a:prstGeom prst="rect">
             <a:avLst/>
@@ -5791,9 +5254,8 @@
                 <a:solidFill>
                   <a:srgbClr val="0D358D"/>
                 </a:solidFill>
-                <a:latin typeface="Times New Roman" panose="02020603050405020304" pitchFamily="18" charset="0"/>
-                <a:ea typeface="Aileron Ultra-Bold"/>
-                <a:cs typeface="Times New Roman" panose="02020603050405020304" pitchFamily="18" charset="0"/>
+                <a:ea typeface="Lato" panose="020F0502020204030203" pitchFamily="34" charset="0"/>
+                <a:cs typeface="Lato" panose="020F0502020204030203" pitchFamily="34" charset="0"/>
                 <a:sym typeface="Aileron Ultra-Bold"/>
               </a:rPr>
               <a:t>Thank You</a:t>
@@ -5866,15 +5328,15 @@
                 <a:solidFill>
                   <a:srgbClr val="1B3A8A"/>
                 </a:solidFill>
-                <a:latin typeface="Times New Roman" panose="02020603050405020304" pitchFamily="18" charset="0"/>
+                <a:latin typeface="Lato" panose="020F0502020204030203" pitchFamily="34" charset="0"/>
                 <a:ea typeface="Calibri" pitchFamily="34" charset="-122"/>
-                <a:cs typeface="Times New Roman" panose="02020603050405020304" pitchFamily="18" charset="0"/>
+                <a:cs typeface="Arial" panose="020B0604020202020204" pitchFamily="34" charset="0"/>
               </a:rPr>
               <a:t>Outline</a:t>
             </a:r>
             <a:endParaRPr lang="en-US" sz="2000" dirty="0">
-              <a:latin typeface="Times New Roman" panose="02020603050405020304" pitchFamily="18" charset="0"/>
-              <a:cs typeface="Times New Roman" panose="02020603050405020304" pitchFamily="18" charset="0"/>
+              <a:latin typeface="Lato" panose="020F0502020204030203" pitchFamily="34" charset="0"/>
+              <a:cs typeface="Arial" panose="020B0604020202020204" pitchFamily="34" charset="0"/>
             </a:endParaRPr>
           </a:p>
         </p:txBody>
@@ -5894,7 +5356,7 @@
         <p:spPr>
           <a:xfrm>
             <a:off x="125239" y="1080603"/>
-            <a:ext cx="4446761" cy="2780248"/>
+            <a:ext cx="4446761" cy="3026470"/>
           </a:xfrm>
           <a:prstGeom prst="rect">
             <a:avLst/>
@@ -5912,30 +5374,28 @@
                 <a:spcPts val="800"/>
               </a:spcAft>
               <a:buFont typeface="Wingdings" panose="05000000000000000000" pitchFamily="2" charset="2"/>
-              <a:buChar char="Ø"/>
+              <a:buChar char="ü"/>
               <a:tabLst>
                 <a:tab pos="4229100" algn="ctr"/>
               </a:tabLst>
             </a:pPr>
             <a:r>
-              <a:rPr lang="en-US" sz="1600" dirty="0">
+              <a:rPr lang="en-US" sz="1800" dirty="0">
                 <a:solidFill>
                   <a:schemeClr val="tx1"/>
                 </a:solidFill>
                 <a:effectLst/>
-                <a:latin typeface="Times New Roman" panose="02020603050405020304" pitchFamily="18" charset="0"/>
                 <a:ea typeface="Times New Roman" panose="02020603050405020304" pitchFamily="18" charset="0"/>
-                <a:cs typeface="Times New Roman" panose="02020603050405020304" pitchFamily="18" charset="0"/>
+                <a:cs typeface="Arial" panose="020B0604020202020204" pitchFamily="34" charset="0"/>
               </a:rPr>
               <a:t>Abstract of the Project</a:t>
             </a:r>
-            <a:endParaRPr lang="en-IN" sz="1600" dirty="0">
+            <a:endParaRPr lang="en-IN" sz="1800" dirty="0">
               <a:solidFill>
                 <a:schemeClr val="tx1"/>
               </a:solidFill>
-              <a:latin typeface="Times New Roman" panose="02020603050405020304" pitchFamily="18" charset="0"/>
               <a:ea typeface="Times New Roman" panose="02020603050405020304" pitchFamily="18" charset="0"/>
-              <a:cs typeface="Times New Roman" panose="02020603050405020304" pitchFamily="18" charset="0"/>
+              <a:cs typeface="Arial" panose="020B0604020202020204" pitchFamily="34" charset="0"/>
             </a:endParaRPr>
           </a:p>
           <a:p>
@@ -5944,16 +5404,15 @@
                 <a:spcPts val="800"/>
               </a:spcAft>
               <a:buFont typeface="Wingdings" panose="05000000000000000000" pitchFamily="2" charset="2"/>
-              <a:buChar char="Ø"/>
+              <a:buChar char="ü"/>
               <a:tabLst>
                 <a:tab pos="4229100" algn="ctr"/>
               </a:tabLst>
             </a:pPr>
             <a:r>
-              <a:rPr lang="en-US" sz="1600" dirty="0">
-                <a:latin typeface="Times New Roman" panose="02020603050405020304" pitchFamily="18" charset="0"/>
+              <a:rPr lang="en-US" sz="1800" dirty="0">
                 <a:ea typeface="+mn-lt"/>
-                <a:cs typeface="Times New Roman" panose="02020603050405020304" pitchFamily="18" charset="0"/>
+                <a:cs typeface="Arial" panose="020B0604020202020204" pitchFamily="34" charset="0"/>
               </a:rPr>
               <a:t>Problem Statement</a:t>
             </a:r>
@@ -5964,16 +5423,15 @@
                 <a:spcPts val="800"/>
               </a:spcAft>
               <a:buFont typeface="Wingdings" panose="05000000000000000000" pitchFamily="2" charset="2"/>
-              <a:buChar char="Ø"/>
+              <a:buChar char="ü"/>
               <a:tabLst>
                 <a:tab pos="4229100" algn="ctr"/>
               </a:tabLst>
             </a:pPr>
             <a:r>
-              <a:rPr lang="en-US" sz="1600" dirty="0">
-                <a:latin typeface="Times New Roman" panose="02020603050405020304" pitchFamily="18" charset="0"/>
+              <a:rPr lang="en-US" sz="1800" dirty="0">
                 <a:ea typeface="+mn-lt"/>
-                <a:cs typeface="Times New Roman" panose="02020603050405020304" pitchFamily="18" charset="0"/>
+                <a:cs typeface="Arial" panose="020B0604020202020204" pitchFamily="34" charset="0"/>
               </a:rPr>
               <a:t>Proposed Solution</a:t>
             </a:r>
@@ -5984,16 +5442,15 @@
                 <a:spcPts val="800"/>
               </a:spcAft>
               <a:buFont typeface="Wingdings" panose="05000000000000000000" pitchFamily="2" charset="2"/>
-              <a:buChar char="Ø"/>
+              <a:buChar char="ü"/>
               <a:tabLst>
                 <a:tab pos="4229100" algn="ctr"/>
               </a:tabLst>
             </a:pPr>
             <a:r>
-              <a:rPr lang="en-US" sz="1600" dirty="0">
-                <a:latin typeface="Times New Roman" panose="02020603050405020304" pitchFamily="18" charset="0"/>
+              <a:rPr lang="en-US" sz="1800" dirty="0">
                 <a:ea typeface="+mn-lt"/>
-                <a:cs typeface="Times New Roman" panose="02020603050405020304" pitchFamily="18" charset="0"/>
+                <a:cs typeface="Arial" panose="020B0604020202020204" pitchFamily="34" charset="0"/>
               </a:rPr>
               <a:t>System Architecture</a:t>
             </a:r>
@@ -6004,16 +5461,15 @@
                 <a:spcPts val="800"/>
               </a:spcAft>
               <a:buFont typeface="Wingdings" panose="05000000000000000000" pitchFamily="2" charset="2"/>
-              <a:buChar char="Ø"/>
+              <a:buChar char="ü"/>
               <a:tabLst>
                 <a:tab pos="4229100" algn="ctr"/>
               </a:tabLst>
             </a:pPr>
             <a:r>
-              <a:rPr lang="en-US" sz="1600" dirty="0">
-                <a:latin typeface="Times New Roman" panose="02020603050405020304" pitchFamily="18" charset="0"/>
+              <a:rPr lang="en-US" sz="1800" dirty="0">
                 <a:ea typeface="+mn-lt"/>
-                <a:cs typeface="Times New Roman" panose="02020603050405020304" pitchFamily="18" charset="0"/>
+                <a:cs typeface="Arial" panose="020B0604020202020204" pitchFamily="34" charset="0"/>
               </a:rPr>
               <a:t>Live Demo of the Project</a:t>
             </a:r>
@@ -6024,16 +5480,15 @@
                 <a:spcPts val="800"/>
               </a:spcAft>
               <a:buFont typeface="Wingdings" panose="05000000000000000000" pitchFamily="2" charset="2"/>
-              <a:buChar char="Ø"/>
+              <a:buChar char="ü"/>
               <a:tabLst>
                 <a:tab pos="4229100" algn="ctr"/>
               </a:tabLst>
             </a:pPr>
             <a:r>
-              <a:rPr lang="en-US" sz="1600" dirty="0">
-                <a:latin typeface="Times New Roman" panose="02020603050405020304" pitchFamily="18" charset="0"/>
+              <a:rPr lang="en-US" sz="1800" dirty="0">
                 <a:ea typeface="+mn-lt"/>
-                <a:cs typeface="Times New Roman" panose="02020603050405020304" pitchFamily="18" charset="0"/>
+                <a:cs typeface="Arial" panose="020B0604020202020204" pitchFamily="34" charset="0"/>
               </a:rPr>
               <a:t>Embedded Video of Project</a:t>
             </a:r>
@@ -6044,16 +5499,15 @@
                 <a:spcPts val="800"/>
               </a:spcAft>
               <a:buFont typeface="Wingdings" panose="05000000000000000000" pitchFamily="2" charset="2"/>
-              <a:buChar char="Ø"/>
+              <a:buChar char="ü"/>
               <a:tabLst>
                 <a:tab pos="4229100" algn="ctr"/>
               </a:tabLst>
             </a:pPr>
             <a:r>
-              <a:rPr lang="en-IN" sz="1600" dirty="0">
-                <a:latin typeface="Times New Roman" panose="02020603050405020304" pitchFamily="18" charset="0"/>
+              <a:rPr lang="en-IN" sz="1800" dirty="0">
                 <a:ea typeface="+mn-lt"/>
-                <a:cs typeface="Times New Roman" panose="02020603050405020304" pitchFamily="18" charset="0"/>
+                <a:cs typeface="Arial" panose="020B0604020202020204" pitchFamily="34" charset="0"/>
               </a:rPr>
               <a:t>Conclusion</a:t>
             </a:r>
@@ -6064,16 +5518,15 @@
                 <a:spcPts val="800"/>
               </a:spcAft>
               <a:buFont typeface="Wingdings" panose="05000000000000000000" pitchFamily="2" charset="2"/>
-              <a:buChar char="Ø"/>
+              <a:buChar char="ü"/>
               <a:tabLst>
                 <a:tab pos="4229100" algn="ctr"/>
               </a:tabLst>
             </a:pPr>
             <a:r>
-              <a:rPr lang="en-US" sz="1600" dirty="0">
-                <a:latin typeface="Times New Roman" panose="02020603050405020304" pitchFamily="18" charset="0"/>
+              <a:rPr lang="en-US" sz="1800" dirty="0">
                 <a:ea typeface="+mn-lt"/>
-                <a:cs typeface="Times New Roman" panose="02020603050405020304" pitchFamily="18" charset="0"/>
+                <a:cs typeface="Arial" panose="020B0604020202020204" pitchFamily="34" charset="0"/>
               </a:rPr>
               <a:t>Future Scope</a:t>
             </a:r>
@@ -6184,12 +5637,16 @@
                 <a:solidFill>
                   <a:srgbClr val="1B3A8A"/>
                 </a:solidFill>
-                <a:latin typeface="Times New Roman" panose="02020603050405020304" pitchFamily="18" charset="0"/>
+                <a:latin typeface="Lato" panose="020F0502020204030203" pitchFamily="34" charset="0"/>
                 <a:ea typeface="Calibri" pitchFamily="34" charset="-122"/>
-                <a:cs typeface="Times New Roman" panose="02020603050405020304" pitchFamily="18" charset="0"/>
+                <a:cs typeface="Arial" panose="020B0604020202020204" pitchFamily="34" charset="0"/>
               </a:rPr>
               <a:t>Abstract</a:t>
             </a:r>
+            <a:endParaRPr lang="en-US" sz="2000" dirty="0">
+              <a:latin typeface="Lato" panose="020F0502020204030203" pitchFamily="34" charset="0"/>
+              <a:cs typeface="Arial" panose="020B0604020202020204" pitchFamily="34" charset="0"/>
+            </a:endParaRPr>
           </a:p>
         </p:txBody>
       </p:sp>
@@ -6207,8 +5664,8 @@
         </p:nvSpPr>
         <p:spPr>
           <a:xfrm>
-            <a:off x="125240" y="1082801"/>
-            <a:ext cx="5002346" cy="3703578"/>
+            <a:off x="125239" y="1082801"/>
+            <a:ext cx="5607345" cy="4206280"/>
           </a:xfrm>
           <a:prstGeom prst="rect">
             <a:avLst/>
@@ -6222,138 +5679,186 @@
           <a:lstStyle/>
           <a:p>
             <a:pPr marL="285750" indent="-285750" algn="just">
+              <a:lnSpc>
+                <a:spcPct val="150000"/>
+              </a:lnSpc>
               <a:spcAft>
                 <a:spcPts val="800"/>
               </a:spcAft>
               <a:buFont typeface="Wingdings" panose="05000000000000000000" pitchFamily="2" charset="2"/>
-              <a:buChar char="Ø"/>
+              <a:buChar char="ü"/>
               <a:tabLst>
                 <a:tab pos="4229100" algn="ctr"/>
               </a:tabLst>
             </a:pPr>
             <a:r>
-              <a:rPr lang="en-US" sz="1600" b="0" i="0" dirty="0">
+              <a:rPr lang="en-US" sz="1800" dirty="0">
                 <a:solidFill>
-                  <a:srgbClr val="27251E"/>
+                  <a:schemeClr val="tx1"/>
                 </a:solidFill>
                 <a:effectLst/>
-                <a:latin typeface="Times New Roman" panose="02020603050405020304" pitchFamily="18" charset="0"/>
-                <a:cs typeface="Times New Roman" panose="02020603050405020304" pitchFamily="18" charset="0"/>
-              </a:rPr>
-              <a:t>Problem - Payroll systems often lack transparency, causing confusion in salary, overtime, deductions, &amp; benchmarking.</a:t>
-            </a:r>
-            <a:endParaRPr lang="en-US" sz="1600" dirty="0">
-              <a:latin typeface="Times New Roman" panose="02020603050405020304" pitchFamily="18" charset="0"/>
-              <a:cs typeface="Times New Roman" panose="02020603050405020304" pitchFamily="18" charset="0"/>
-            </a:endParaRPr>
+                <a:ea typeface="Open Sans" panose="020B0606030504020204" pitchFamily="34" charset="0"/>
+                <a:cs typeface="Arial" panose="020B0604020202020204" pitchFamily="34" charset="0"/>
+              </a:rPr>
+              <a:t>Problem - Complexity of Payro</a:t>
+            </a:r>
+            <a:r>
+              <a:rPr lang="en-US" dirty="0">
+                <a:ea typeface="Open Sans" panose="020B0606030504020204" pitchFamily="34" charset="0"/>
+                <a:cs typeface="Arial" panose="020B0604020202020204" pitchFamily="34" charset="0"/>
+              </a:rPr>
+              <a:t>ll system, lack of clarity, overtime compliance &amp; benchmarking</a:t>
+            </a:r>
+            <a:r>
+              <a:rPr lang="en-US" sz="1800" dirty="0">
+                <a:solidFill>
+                  <a:schemeClr val="tx1"/>
+                </a:solidFill>
+                <a:effectLst/>
+                <a:ea typeface="Open Sans" panose="020B0606030504020204" pitchFamily="34" charset="0"/>
+                <a:cs typeface="Arial" panose="020B0604020202020204" pitchFamily="34" charset="0"/>
+              </a:rPr>
+              <a:t>.</a:t>
+            </a:r>
           </a:p>
           <a:p>
             <a:pPr marL="285750" indent="-285750" algn="just">
+              <a:lnSpc>
+                <a:spcPct val="150000"/>
+              </a:lnSpc>
               <a:spcAft>
                 <a:spcPts val="800"/>
               </a:spcAft>
               <a:buFont typeface="Wingdings" panose="05000000000000000000" pitchFamily="2" charset="2"/>
-              <a:buChar char="Ø"/>
+              <a:buChar char="ü"/>
               <a:tabLst>
                 <a:tab pos="4229100" algn="ctr"/>
               </a:tabLst>
             </a:pPr>
             <a:r>
-              <a:rPr lang="en-US" sz="1600" dirty="0">
-                <a:latin typeface="Times New Roman" panose="02020603050405020304" pitchFamily="18" charset="0"/>
-                <a:cs typeface="Times New Roman" panose="02020603050405020304" pitchFamily="18" charset="0"/>
-              </a:rPr>
-              <a:t>Source - To preprocess payroll data taking reference from </a:t>
-            </a:r>
-            <a:r>
-              <a:rPr lang="en-US" sz="1600" dirty="0" err="1">
-                <a:latin typeface="Times New Roman" panose="02020603050405020304" pitchFamily="18" charset="0"/>
-                <a:cs typeface="Times New Roman" panose="02020603050405020304" pitchFamily="18" charset="0"/>
-              </a:rPr>
-              <a:t>kaggle</a:t>
-            </a:r>
-            <a:r>
-              <a:rPr lang="en-US" sz="1600" dirty="0">
-                <a:latin typeface="Times New Roman" panose="02020603050405020304" pitchFamily="18" charset="0"/>
-                <a:cs typeface="Times New Roman" panose="02020603050405020304" pitchFamily="18" charset="0"/>
+              <a:rPr lang="en-US" dirty="0">
+                <a:ea typeface="+mn-lt"/>
+                <a:cs typeface="Arial" panose="020B0604020202020204" pitchFamily="34" charset="0"/>
+              </a:rPr>
+              <a:t>P</a:t>
+            </a:r>
+            <a:r>
+              <a:rPr lang="en-US" sz="1800" dirty="0">
+                <a:ea typeface="+mn-lt"/>
+                <a:cs typeface="Arial" panose="020B0604020202020204" pitchFamily="34" charset="0"/>
+              </a:rPr>
+              <a:t>urpose - Building digital </a:t>
+            </a:r>
+            <a:r>
+              <a:rPr lang="en-US" dirty="0">
+                <a:ea typeface="+mn-lt"/>
+                <a:cs typeface="Arial" panose="020B0604020202020204" pitchFamily="34" charset="0"/>
+              </a:rPr>
+              <a:t>system combining tools, bridging gaps</a:t>
+            </a:r>
+            <a:r>
+              <a:rPr lang="en-US" sz="1800" dirty="0">
+                <a:ea typeface="+mn-lt"/>
+                <a:cs typeface="Arial" panose="020B0604020202020204" pitchFamily="34" charset="0"/>
               </a:rPr>
               <a:t>.</a:t>
             </a:r>
           </a:p>
           <a:p>
             <a:pPr marL="285750" indent="-285750" algn="just">
+              <a:lnSpc>
+                <a:spcPct val="150000"/>
+              </a:lnSpc>
               <a:spcAft>
                 <a:spcPts val="800"/>
               </a:spcAft>
               <a:buFont typeface="Wingdings" panose="05000000000000000000" pitchFamily="2" charset="2"/>
-              <a:buChar char="Ø"/>
+              <a:buChar char="ü"/>
               <a:tabLst>
                 <a:tab pos="4229100" algn="ctr"/>
               </a:tabLst>
             </a:pPr>
             <a:r>
-              <a:rPr lang="en-US" sz="1600" b="0" i="0" dirty="0">
-                <a:solidFill>
-                  <a:srgbClr val="27251E"/>
-                </a:solidFill>
-                <a:effectLst/>
-                <a:latin typeface="Times New Roman" panose="02020603050405020304" pitchFamily="18" charset="0"/>
-                <a:cs typeface="Times New Roman" panose="02020603050405020304" pitchFamily="18" charset="0"/>
-              </a:rPr>
-              <a:t>Tools - Excel for data cleaning and calculations, Power BI was used for visualization, copilot to </a:t>
-            </a:r>
-            <a:r>
-              <a:rPr lang="en-US" sz="1600" dirty="0">
-                <a:latin typeface="Times New Roman" panose="02020603050405020304" pitchFamily="18" charset="0"/>
-                <a:cs typeface="Times New Roman" panose="02020603050405020304" pitchFamily="18" charset="0"/>
-              </a:rPr>
-              <a:t>create summary and business report, chatbot for transparency.</a:t>
+              <a:rPr lang="en-US" dirty="0">
+                <a:ea typeface="+mn-lt"/>
+                <a:cs typeface="Arial" panose="020B0604020202020204" pitchFamily="34" charset="0"/>
+              </a:rPr>
+              <a:t>Tools – excel, power BI, copilot studio, AI assistant.</a:t>
             </a:r>
           </a:p>
           <a:p>
             <a:pPr marL="285750" indent="-285750" algn="just">
+              <a:lnSpc>
+                <a:spcPct val="150000"/>
+              </a:lnSpc>
               <a:spcAft>
                 <a:spcPts val="800"/>
               </a:spcAft>
               <a:buFont typeface="Wingdings" panose="05000000000000000000" pitchFamily="2" charset="2"/>
-              <a:buChar char="Ø"/>
+              <a:buChar char="ü"/>
               <a:tabLst>
                 <a:tab pos="4229100" algn="ctr"/>
               </a:tabLst>
             </a:pPr>
             <a:r>
-              <a:rPr lang="en-US" sz="1600" dirty="0">
-                <a:latin typeface="Times New Roman" panose="02020603050405020304" pitchFamily="18" charset="0"/>
-                <a:cs typeface="Times New Roman" panose="02020603050405020304" pitchFamily="18" charset="0"/>
-              </a:rPr>
-              <a:t>Expected – interactive dashboard, structured dataset, easy to use chatbot bridging all the gaps.  </a:t>
+              <a:rPr lang="en-US" dirty="0">
+                <a:ea typeface="+mn-lt"/>
+                <a:cs typeface="Arial" panose="020B0604020202020204" pitchFamily="34" charset="0"/>
+              </a:rPr>
+              <a:t>Expected – structured dataset with AI&amp; BI augmented framework</a:t>
+            </a:r>
+            <a:r>
+              <a:rPr lang="en-US" sz="1800" dirty="0">
+                <a:ea typeface="+mn-lt"/>
+                <a:cs typeface="Arial" panose="020B0604020202020204" pitchFamily="34" charset="0"/>
+              </a:rPr>
+              <a:t>.</a:t>
             </a:r>
           </a:p>
           <a:p>
             <a:pPr marL="285750" indent="-285750" algn="just">
+              <a:lnSpc>
+                <a:spcPct val="150000"/>
+              </a:lnSpc>
               <a:spcAft>
                 <a:spcPts val="800"/>
               </a:spcAft>
               <a:buFont typeface="Wingdings" panose="05000000000000000000" pitchFamily="2" charset="2"/>
-              <a:buChar char="Ø"/>
+              <a:buChar char="ü"/>
               <a:tabLst>
                 <a:tab pos="4229100" algn="ctr"/>
               </a:tabLst>
             </a:pPr>
             <a:r>
-              <a:rPr lang="en-US" sz="1600" b="0" i="0" dirty="0">
-                <a:solidFill>
-                  <a:srgbClr val="27251E"/>
-                </a:solidFill>
-                <a:effectLst/>
-                <a:latin typeface="Times New Roman" panose="02020603050405020304" pitchFamily="18" charset="0"/>
-                <a:cs typeface="Times New Roman" panose="02020603050405020304" pitchFamily="18" charset="0"/>
-              </a:rPr>
-              <a:t>Solution - An AI- and BI-based payroll transparency system can provide clear and explainable salary breakdowns</a:t>
-            </a:r>
-            <a:endParaRPr lang="en-US" sz="1600" dirty="0">
-              <a:latin typeface="Times New Roman" panose="02020603050405020304" pitchFamily="18" charset="0"/>
-              <a:cs typeface="Times New Roman" panose="02020603050405020304" pitchFamily="18" charset="0"/>
+              <a:rPr lang="en-US" dirty="0">
+                <a:ea typeface="+mn-lt"/>
+                <a:cs typeface="Arial" panose="020B0604020202020204" pitchFamily="34" charset="0"/>
+              </a:rPr>
+              <a:t>Solving problem for employees and employer</a:t>
+            </a:r>
+            <a:r>
+              <a:rPr lang="en-US" sz="1800" dirty="0">
+                <a:ea typeface="+mn-lt"/>
+                <a:cs typeface="Arial" panose="020B0604020202020204" pitchFamily="34" charset="0"/>
+              </a:rPr>
+              <a:t>.</a:t>
+            </a:r>
+          </a:p>
+          <a:p>
+            <a:pPr marL="228600" indent="-228600">
+              <a:spcAft>
+                <a:spcPts val="800"/>
+              </a:spcAft>
+              <a:buFont typeface="Arial" panose="020B0604020202020204" pitchFamily="34" charset="0"/>
+              <a:buChar char="•"/>
+              <a:tabLst>
+                <a:tab pos="4229100" algn="ctr"/>
+              </a:tabLst>
+            </a:pPr>
+            <a:endParaRPr lang="en-US" sz="1800" dirty="0">
+              <a:latin typeface="Lato" panose="020F0502020204030203" pitchFamily="34" charset="0"/>
+              <a:ea typeface="+mn-lt"/>
+              <a:cs typeface="Arial" panose="020B0604020202020204" pitchFamily="34" charset="0"/>
             </a:endParaRPr>
           </a:p>
         </p:txBody>
@@ -6372,8 +5877,8 @@
         </p:nvSpPr>
         <p:spPr>
           <a:xfrm>
-            <a:off x="5814470" y="1082801"/>
-            <a:ext cx="3070450" cy="2997875"/>
+            <a:off x="6675119" y="1174653"/>
+            <a:ext cx="2132193" cy="2430166"/>
           </a:xfrm>
           <a:custGeom>
             <a:avLst/>
@@ -6481,8 +5986,8 @@
         </p:blipFill>
         <p:spPr>
           <a:xfrm>
-            <a:off x="4888151" y="873760"/>
-            <a:ext cx="3947240" cy="3947240"/>
+            <a:off x="5548258" y="974064"/>
+            <a:ext cx="3470502" cy="3470502"/>
           </a:xfrm>
           <a:prstGeom prst="rect">
             <a:avLst/>
@@ -6518,15 +6023,15 @@
                 <a:solidFill>
                   <a:srgbClr val="1B3A8A"/>
                 </a:solidFill>
-                <a:latin typeface="Times New Roman" panose="02020603050405020304" pitchFamily="18" charset="0"/>
+                <a:latin typeface="Lato" panose="020F0502020204030203" pitchFamily="34" charset="0"/>
                 <a:ea typeface="Calibri" pitchFamily="34" charset="-122"/>
-                <a:cs typeface="Times New Roman" panose="02020603050405020304" pitchFamily="18" charset="0"/>
+                <a:cs typeface="Arial" panose="020B0604020202020204" pitchFamily="34" charset="0"/>
               </a:rPr>
               <a:t>Problem Statement</a:t>
             </a:r>
             <a:endParaRPr lang="en-US" sz="2000" dirty="0">
-              <a:latin typeface="Times New Roman" panose="02020603050405020304" pitchFamily="18" charset="0"/>
-              <a:cs typeface="Times New Roman" panose="02020603050405020304" pitchFamily="18" charset="0"/>
+              <a:latin typeface="Lato" panose="020F0502020204030203" pitchFamily="34" charset="0"/>
+              <a:cs typeface="Arial" panose="020B0604020202020204" pitchFamily="34" charset="0"/>
             </a:endParaRPr>
           </a:p>
         </p:txBody>
@@ -6545,8 +6050,8 @@
         </p:nvSpPr>
         <p:spPr>
           <a:xfrm>
-            <a:off x="125240" y="1082801"/>
-            <a:ext cx="4762910" cy="2021066"/>
+            <a:off x="125239" y="1082800"/>
+            <a:ext cx="5136077" cy="3771995"/>
           </a:xfrm>
           <a:prstGeom prst="rect">
             <a:avLst/>
@@ -6560,76 +6065,131 @@
           <a:lstStyle/>
           <a:p>
             <a:pPr marL="285750" indent="-285750" algn="just">
+              <a:lnSpc>
+                <a:spcPct val="150000"/>
+              </a:lnSpc>
               <a:spcAft>
                 <a:spcPts val="800"/>
               </a:spcAft>
               <a:buFont typeface="Wingdings" panose="05000000000000000000" pitchFamily="2" charset="2"/>
-              <a:buChar char="Ø"/>
+              <a:buChar char="ü"/>
               <a:tabLst>
                 <a:tab pos="4229100" algn="ctr"/>
               </a:tabLst>
             </a:pPr>
             <a:r>
-              <a:rPr lang="en-US" sz="1600" dirty="0">
-                <a:latin typeface="Times New Roman" panose="02020603050405020304" pitchFamily="18" charset="0"/>
-                <a:cs typeface="Times New Roman" panose="02020603050405020304" pitchFamily="18" charset="0"/>
-              </a:rPr>
-              <a:t>Complex Salary breakdown, overtime payment compliance, equity benchmark.  </a:t>
+              <a:rPr lang="en-US" dirty="0">
+                <a:ea typeface="Times New Roman" panose="02020603050405020304" pitchFamily="18" charset="0"/>
+                <a:cs typeface="Arial" panose="020B0604020202020204" pitchFamily="34" charset="0"/>
+              </a:rPr>
+              <a:t>Information asymmetry.</a:t>
             </a:r>
           </a:p>
           <a:p>
             <a:pPr marL="285750" indent="-285750" algn="just">
+              <a:lnSpc>
+                <a:spcPct val="150000"/>
+              </a:lnSpc>
               <a:spcAft>
                 <a:spcPts val="800"/>
               </a:spcAft>
               <a:buFont typeface="Wingdings" panose="05000000000000000000" pitchFamily="2" charset="2"/>
-              <a:buChar char="Ø"/>
+              <a:buChar char="ü"/>
               <a:tabLst>
                 <a:tab pos="4229100" algn="ctr"/>
               </a:tabLst>
             </a:pPr>
             <a:r>
-              <a:rPr lang="en-US" sz="1600" dirty="0">
-                <a:solidFill>
-                  <a:srgbClr val="27251E"/>
-                </a:solidFill>
-                <a:latin typeface="Times New Roman" panose="02020603050405020304" pitchFamily="18" charset="0"/>
-                <a:cs typeface="Times New Roman" panose="02020603050405020304" pitchFamily="18" charset="0"/>
-              </a:rPr>
-              <a:t>P</a:t>
-            </a:r>
-            <a:r>
-              <a:rPr lang="en-US" sz="1600" b="0" i="0" dirty="0">
-                <a:solidFill>
-                  <a:srgbClr val="27251E"/>
-                </a:solidFill>
-                <a:effectLst/>
-                <a:latin typeface="Times New Roman" panose="02020603050405020304" pitchFamily="18" charset="0"/>
-                <a:cs typeface="Times New Roman" panose="02020603050405020304" pitchFamily="18" charset="0"/>
-              </a:rPr>
-              <a:t>roblem is significant because poor payroll transparency can cause fairness issues, legal risks, employee distrust, and salary disputes.</a:t>
+              <a:rPr lang="en-US" dirty="0">
+                <a:ea typeface="Times New Roman" panose="02020603050405020304" pitchFamily="18" charset="0"/>
+                <a:cs typeface="Arial" panose="020B0604020202020204" pitchFamily="34" charset="0"/>
+              </a:rPr>
+              <a:t>Ensuring overtime compliance monitoring.</a:t>
             </a:r>
           </a:p>
           <a:p>
             <a:pPr marL="285750" indent="-285750" algn="just">
+              <a:lnSpc>
+                <a:spcPct val="150000"/>
+              </a:lnSpc>
               <a:spcAft>
                 <a:spcPts val="800"/>
               </a:spcAft>
               <a:buFont typeface="Wingdings" panose="05000000000000000000" pitchFamily="2" charset="2"/>
-              <a:buChar char="Ø"/>
+              <a:buChar char="ü"/>
               <a:tabLst>
                 <a:tab pos="4229100" algn="ctr"/>
               </a:tabLst>
             </a:pPr>
             <a:r>
-              <a:rPr lang="en-US" sz="1600" dirty="0">
+              <a:rPr lang="en-US" dirty="0">
                 <a:solidFill>
-                  <a:srgbClr val="27251E"/>
+                  <a:schemeClr val="tx1"/>
                 </a:solidFill>
-                <a:latin typeface="Times New Roman" panose="02020603050405020304" pitchFamily="18" charset="0"/>
-                <a:cs typeface="Times New Roman" panose="02020603050405020304" pitchFamily="18" charset="0"/>
-              </a:rPr>
-              <a:t>Affected user include HR, blue collar and gig economy, Management. </a:t>
+                <a:effectLst/>
+                <a:ea typeface="Times New Roman" panose="02020603050405020304" pitchFamily="18" charset="0"/>
+                <a:cs typeface="Arial" panose="020B0604020202020204" pitchFamily="34" charset="0"/>
+              </a:rPr>
+              <a:t>Equity benchmarking</a:t>
+            </a:r>
+            <a:r>
+              <a:rPr lang="en-US" dirty="0">
+                <a:ea typeface="Times New Roman" panose="02020603050405020304" pitchFamily="18" charset="0"/>
+                <a:cs typeface="Arial" panose="020B0604020202020204" pitchFamily="34" charset="0"/>
+              </a:rPr>
+              <a:t>.</a:t>
+            </a:r>
+            <a:endParaRPr lang="en-US" dirty="0">
+              <a:solidFill>
+                <a:schemeClr val="tx1"/>
+              </a:solidFill>
+              <a:effectLst/>
+              <a:ea typeface="Times New Roman" panose="02020603050405020304" pitchFamily="18" charset="0"/>
+              <a:cs typeface="Arial" panose="020B0604020202020204" pitchFamily="34" charset="0"/>
+            </a:endParaRPr>
+          </a:p>
+          <a:p>
+            <a:pPr marL="285750" indent="-285750" algn="just">
+              <a:lnSpc>
+                <a:spcPct val="150000"/>
+              </a:lnSpc>
+              <a:spcAft>
+                <a:spcPts val="800"/>
+              </a:spcAft>
+              <a:buFont typeface="Wingdings" panose="05000000000000000000" pitchFamily="2" charset="2"/>
+              <a:buChar char="ü"/>
+              <a:tabLst>
+                <a:tab pos="4229100" algn="ctr"/>
+              </a:tabLst>
+            </a:pPr>
+            <a:r>
+              <a:rPr lang="en-US" dirty="0">
+                <a:ea typeface="+mn-lt"/>
+                <a:cs typeface="Arial" panose="020B0604020202020204" pitchFamily="34" charset="0"/>
+              </a:rPr>
+              <a:t>Significant as poor payroll transparency cause fairness issue, legal risk, employee distrust, salary disputes.</a:t>
+            </a:r>
+          </a:p>
+          <a:p>
+            <a:pPr marL="285750" indent="-285750" algn="just">
+              <a:lnSpc>
+                <a:spcPct val="150000"/>
+              </a:lnSpc>
+              <a:spcAft>
+                <a:spcPts val="800"/>
+              </a:spcAft>
+              <a:buFont typeface="Wingdings" panose="05000000000000000000" pitchFamily="2" charset="2"/>
+              <a:buChar char="ü"/>
+              <a:tabLst>
+                <a:tab pos="4229100" algn="ctr"/>
+              </a:tabLst>
+            </a:pPr>
+            <a:r>
+              <a:rPr lang="en-US" dirty="0">
+                <a:ea typeface="+mn-lt"/>
+                <a:cs typeface="Arial" panose="020B0604020202020204" pitchFamily="34" charset="0"/>
+              </a:rPr>
+              <a:t>Affected user – HR, Blue collar &amp; Gig Workers, Management.</a:t>
             </a:r>
           </a:p>
         </p:txBody>
@@ -6692,8 +6252,8 @@
         </p:blipFill>
         <p:spPr>
           <a:xfrm>
-            <a:off x="4888151" y="873760"/>
-            <a:ext cx="3947240" cy="3947240"/>
+            <a:off x="5801477" y="1164804"/>
+            <a:ext cx="3217283" cy="3217283"/>
           </a:xfrm>
           <a:prstGeom prst="rect">
             <a:avLst/>
@@ -6729,15 +6289,15 @@
                 <a:solidFill>
                   <a:srgbClr val="1B3A8A"/>
                 </a:solidFill>
-                <a:latin typeface="Times New Roman" panose="02020603050405020304" pitchFamily="18" charset="0"/>
+                <a:latin typeface="Lato" panose="020F0502020204030203" pitchFamily="34" charset="0"/>
                 <a:ea typeface="Calibri" pitchFamily="34" charset="-122"/>
-                <a:cs typeface="Times New Roman" panose="02020603050405020304" pitchFamily="18" charset="0"/>
+                <a:cs typeface="Arial" panose="020B0604020202020204" pitchFamily="34" charset="0"/>
               </a:rPr>
               <a:t>Problem Statement</a:t>
             </a:r>
             <a:endParaRPr lang="en-US" sz="2000" dirty="0">
-              <a:latin typeface="Times New Roman" panose="02020603050405020304" pitchFamily="18" charset="0"/>
-              <a:cs typeface="Times New Roman" panose="02020603050405020304" pitchFamily="18" charset="0"/>
+              <a:latin typeface="Lato" panose="020F0502020204030203" pitchFamily="34" charset="0"/>
+              <a:cs typeface="Arial" panose="020B0604020202020204" pitchFamily="34" charset="0"/>
             </a:endParaRPr>
           </a:p>
         </p:txBody>
@@ -6757,7 +6317,7 @@
         <p:spPr>
           <a:xfrm>
             <a:off x="125240" y="1082801"/>
-            <a:ext cx="4762910" cy="1774845"/>
+            <a:ext cx="5438532" cy="3995966"/>
           </a:xfrm>
           <a:prstGeom prst="rect">
             <a:avLst/>
@@ -6770,26 +6330,26 @@
           </a:bodyPr>
           <a:lstStyle/>
           <a:p>
-            <a:pPr marL="285750" indent="-285750">
+            <a:pPr marL="285750" indent="-285750" algn="just">
               <a:spcAft>
                 <a:spcPts val="800"/>
               </a:spcAft>
               <a:buFont typeface="Wingdings" panose="05000000000000000000" pitchFamily="2" charset="2"/>
-              <a:buChar char="Ø"/>
+              <a:buChar char="ü"/>
               <a:tabLst>
                 <a:tab pos="4229100" algn="ctr"/>
               </a:tabLst>
             </a:pPr>
             <a:r>
-              <a:rPr lang="en-IN" sz="1600" b="1" dirty="0">
-                <a:latin typeface="Times New Roman" panose="02020603050405020304" pitchFamily="18" charset="0"/>
-                <a:cs typeface="Times New Roman" panose="02020603050405020304" pitchFamily="18" charset="0"/>
-              </a:rPr>
-              <a:t>Scope &amp; boundaries </a:t>
-            </a:r>
-          </a:p>
-          <a:p>
-            <a:pPr marL="228600" indent="-228600" algn="just">
+              <a:rPr lang="en-US" dirty="0">
+                <a:ea typeface="+mn-lt"/>
+                <a:cs typeface="Arial" panose="020B0604020202020204" pitchFamily="34" charset="0"/>
+              </a:rPr>
+              <a:t>Limitation of existing tools: </a:t>
+            </a:r>
+          </a:p>
+          <a:p>
+            <a:pPr marL="742950" lvl="1" indent="-285750" algn="just">
               <a:spcAft>
                 <a:spcPts val="800"/>
               </a:spcAft>
@@ -6800,19 +6360,15 @@
               </a:tabLst>
             </a:pPr>
             <a:r>
-              <a:rPr lang="en-US" sz="1600" dirty="0">
-                <a:latin typeface="Times New Roman" panose="02020603050405020304" pitchFamily="18" charset="0"/>
-                <a:cs typeface="Times New Roman" panose="02020603050405020304" pitchFamily="18" charset="0"/>
-              </a:rPr>
-              <a:t>Focus: Payroll transparency, pay equity benchmarking, compliance verification using Excel, Power BI, Copilot, and Chatbot.</a:t>
-            </a:r>
-            <a:endParaRPr lang="en-IN" sz="1600" dirty="0">
-              <a:latin typeface="Times New Roman" panose="02020603050405020304" pitchFamily="18" charset="0"/>
-              <a:cs typeface="Times New Roman" panose="02020603050405020304" pitchFamily="18" charset="0"/>
-            </a:endParaRPr>
-          </a:p>
-          <a:p>
-            <a:pPr marL="228600" indent="-228600" algn="just">
+              <a:rPr lang="en-US" dirty="0">
+                <a:ea typeface="+mn-lt"/>
+                <a:cs typeface="Arial" panose="020B0604020202020204" pitchFamily="34" charset="0"/>
+              </a:rPr>
+              <a:t>Underutilized AI skills.</a:t>
+            </a:r>
+          </a:p>
+          <a:p>
+            <a:pPr marL="742950" lvl="1" indent="-285750" algn="just">
               <a:spcAft>
                 <a:spcPts val="800"/>
               </a:spcAft>
@@ -6823,15 +6379,146 @@
               </a:tabLst>
             </a:pPr>
             <a:r>
-              <a:rPr lang="en-US" sz="1600" dirty="0">
-                <a:latin typeface="Times New Roman" panose="02020603050405020304" pitchFamily="18" charset="0"/>
-                <a:cs typeface="Times New Roman" panose="02020603050405020304" pitchFamily="18" charset="0"/>
-              </a:rPr>
-              <a:t>Excludes: Real-time integrations &amp; advanced ML models. </a:t>
-            </a:r>
-            <a:endParaRPr lang="en-IN" sz="1600" dirty="0">
-              <a:latin typeface="Times New Roman" panose="02020603050405020304" pitchFamily="18" charset="0"/>
-              <a:cs typeface="Times New Roman" panose="02020603050405020304" pitchFamily="18" charset="0"/>
+              <a:rPr lang="en-US" dirty="0">
+                <a:ea typeface="+mn-lt"/>
+                <a:cs typeface="Arial" panose="020B0604020202020204" pitchFamily="34" charset="0"/>
+              </a:rPr>
+              <a:t>Benchmarking often outsourced.</a:t>
+            </a:r>
+          </a:p>
+          <a:p>
+            <a:pPr marL="285750" indent="-285750" algn="just">
+              <a:spcAft>
+                <a:spcPts val="800"/>
+              </a:spcAft>
+              <a:buFont typeface="Wingdings" panose="05000000000000000000" pitchFamily="2" charset="2"/>
+              <a:buChar char="ü"/>
+              <a:tabLst>
+                <a:tab pos="4229100" algn="ctr"/>
+              </a:tabLst>
+            </a:pPr>
+            <a:r>
+              <a:rPr lang="en-US" dirty="0">
+                <a:ea typeface="+mn-lt"/>
+                <a:cs typeface="Arial" panose="020B0604020202020204" pitchFamily="34" charset="0"/>
+              </a:rPr>
+              <a:t>Scope :</a:t>
+            </a:r>
+          </a:p>
+          <a:p>
+            <a:pPr marL="685800" lvl="1" indent="-228600" algn="just">
+              <a:lnSpc>
+                <a:spcPct val="150000"/>
+              </a:lnSpc>
+              <a:spcAft>
+                <a:spcPts val="800"/>
+              </a:spcAft>
+              <a:buFont typeface="Arial" panose="020B0604020202020204" pitchFamily="34" charset="0"/>
+              <a:buChar char="•"/>
+              <a:tabLst>
+                <a:tab pos="4229100" algn="ctr"/>
+              </a:tabLst>
+            </a:pPr>
+            <a:r>
+              <a:rPr lang="en-US" dirty="0">
+                <a:solidFill>
+                  <a:srgbClr val="000000"/>
+                </a:solidFill>
+              </a:rPr>
+              <a:t>P</a:t>
+            </a:r>
+            <a:r>
+              <a:rPr lang="en-US" i="0" u="none" strike="noStrike" baseline="0" dirty="0">
+                <a:solidFill>
+                  <a:srgbClr val="000000"/>
+                </a:solidFill>
+              </a:rPr>
+              <a:t>ayroll transparency, pay equity benchmarking, overtime compliance verification, and financial literacy for employees.</a:t>
+            </a:r>
+            <a:r>
+              <a:rPr lang="en-US" dirty="0">
+                <a:solidFill>
+                  <a:srgbClr val="000000"/>
+                </a:solidFill>
+              </a:rPr>
+              <a:t> </a:t>
+            </a:r>
+            <a:endParaRPr lang="en-US" dirty="0">
+              <a:ea typeface="+mn-lt"/>
+              <a:cs typeface="Arial" panose="020B0604020202020204" pitchFamily="34" charset="0"/>
+            </a:endParaRPr>
+          </a:p>
+          <a:p>
+            <a:pPr marL="285750" indent="-285750" algn="just">
+              <a:spcAft>
+                <a:spcPts val="800"/>
+              </a:spcAft>
+              <a:buFont typeface="Wingdings" panose="05000000000000000000" pitchFamily="2" charset="2"/>
+              <a:buChar char="ü"/>
+              <a:tabLst>
+                <a:tab pos="4229100" algn="ctr"/>
+              </a:tabLst>
+            </a:pPr>
+            <a:r>
+              <a:rPr lang="en-US" dirty="0">
+                <a:ea typeface="+mn-lt"/>
+                <a:cs typeface="Arial" panose="020B0604020202020204" pitchFamily="34" charset="0"/>
+              </a:rPr>
+              <a:t> </a:t>
+            </a:r>
+            <a:r>
+              <a:rPr lang="en-US" i="0" u="none" strike="noStrike" baseline="0" dirty="0">
+                <a:solidFill>
+                  <a:srgbClr val="000000"/>
+                </a:solidFill>
+                <a:ea typeface="+mn-lt"/>
+                <a:cs typeface="Arial" panose="020B0604020202020204" pitchFamily="34" charset="0"/>
+              </a:rPr>
+              <a:t>Limitation</a:t>
+            </a:r>
+          </a:p>
+          <a:p>
+            <a:pPr marL="685800" lvl="1" indent="-228600" algn="just">
+              <a:spcAft>
+                <a:spcPts val="800"/>
+              </a:spcAft>
+              <a:buFont typeface="Arial" panose="020B0604020202020204" pitchFamily="34" charset="0"/>
+              <a:buChar char="•"/>
+              <a:tabLst>
+                <a:tab pos="4229100" algn="ctr"/>
+              </a:tabLst>
+            </a:pPr>
+            <a:r>
+              <a:rPr lang="en-US" dirty="0">
+                <a:solidFill>
+                  <a:srgbClr val="000000"/>
+                </a:solidFill>
+                <a:ea typeface="+mn-lt"/>
+                <a:cs typeface="Arial" panose="020B0604020202020204" pitchFamily="34" charset="0"/>
+              </a:rPr>
+              <a:t>Real – time integration &amp; advanced ML Models</a:t>
+            </a:r>
+            <a:endParaRPr lang="en-US" dirty="0">
+              <a:ea typeface="+mn-lt"/>
+              <a:cs typeface="Arial" panose="020B0604020202020204" pitchFamily="34" charset="0"/>
+            </a:endParaRPr>
+          </a:p>
+          <a:p>
+            <a:pPr lvl="1">
+              <a:spcAft>
+                <a:spcPts val="800"/>
+              </a:spcAft>
+              <a:tabLst>
+                <a:tab pos="4229100" algn="ctr"/>
+              </a:tabLst>
+            </a:pPr>
+            <a:endParaRPr lang="en-US" b="1" i="0" u="none" strike="noStrike" baseline="0" dirty="0">
+              <a:solidFill>
+                <a:srgbClr val="000000"/>
+              </a:solidFill>
+              <a:latin typeface="Lato" panose="020F0502020204030203" pitchFamily="34" charset="0"/>
+              <a:ea typeface="+mn-lt"/>
+              <a:cs typeface="Arial" panose="020B0604020202020204" pitchFamily="34" charset="0"/>
             </a:endParaRPr>
           </a:p>
         </p:txBody>
@@ -6842,7 +6529,7 @@
     </p:custDataLst>
     <p:extLst>
       <p:ext uri="{BB962C8B-B14F-4D97-AF65-F5344CB8AC3E}">
-        <p14:creationId xmlns:p14="http://schemas.microsoft.com/office/powerpoint/2010/main" val="2333358020"/>
+        <p14:creationId xmlns:p14="http://schemas.microsoft.com/office/powerpoint/2010/main" val="262854627"/>
       </p:ext>
     </p:extLst>
   </p:cSld>
@@ -6936,15 +6623,15 @@
                 <a:solidFill>
                   <a:srgbClr val="1B3A8A"/>
                 </a:solidFill>
-                <a:latin typeface="Times New Roman" panose="02020603050405020304" pitchFamily="18" charset="0"/>
+                <a:latin typeface="Lato" panose="020F0502020204030203" pitchFamily="34" charset="0"/>
                 <a:ea typeface="Calibri" pitchFamily="34" charset="-122"/>
-                <a:cs typeface="Times New Roman" panose="02020603050405020304" pitchFamily="18" charset="0"/>
+                <a:cs typeface="Arial" panose="020B0604020202020204" pitchFamily="34" charset="0"/>
               </a:rPr>
               <a:t>Proposed Solution</a:t>
             </a:r>
             <a:endParaRPr lang="en-US" sz="2000" dirty="0">
-              <a:latin typeface="Times New Roman" panose="02020603050405020304" pitchFamily="18" charset="0"/>
-              <a:cs typeface="Times New Roman" panose="02020603050405020304" pitchFamily="18" charset="0"/>
+              <a:latin typeface="Lato" panose="020F0502020204030203" pitchFamily="34" charset="0"/>
+              <a:cs typeface="Arial" panose="020B0604020202020204" pitchFamily="34" charset="0"/>
             </a:endParaRPr>
           </a:p>
         </p:txBody>
@@ -6986,7 +6673,7 @@
         <p:spPr>
           <a:xfrm>
             <a:off x="125486" y="1046013"/>
-            <a:ext cx="4416154" cy="1828800"/>
+            <a:ext cx="4416154" cy="3474720"/>
           </a:xfrm>
           <a:prstGeom prst="rect">
             <a:avLst/>
@@ -6999,22 +6686,38 @@
           <a:lstStyle/>
           <a:p>
             <a:pPr marL="0" indent="0" algn="just">
+              <a:lnSpc>
+                <a:spcPct val="150000"/>
+              </a:lnSpc>
               <a:buNone/>
             </a:pPr>
             <a:r>
-              <a:rPr lang="en-US" sz="1600" i="0" dirty="0">
+              <a:rPr lang="en-US" dirty="0">
                 <a:solidFill>
-                  <a:srgbClr val="27251E"/>
+                  <a:srgbClr val="1A1A2E"/>
                 </a:solidFill>
-                <a:effectLst/>
-                <a:latin typeface="Times New Roman" panose="02020603050405020304" pitchFamily="18" charset="0"/>
-                <a:cs typeface="Times New Roman" panose="02020603050405020304" pitchFamily="18" charset="0"/>
-              </a:rPr>
-              <a:t>An integrated digital payroll solution is proposed to enhance compensation transparency, automate discrepancy detection, support compliance monitoring, and improve employee access to payroll information. </a:t>
-            </a:r>
-            <a:endParaRPr lang="en-US" sz="1600" dirty="0">
-              <a:latin typeface="Times New Roman" panose="02020603050405020304" pitchFamily="18" charset="0"/>
-              <a:cs typeface="Times New Roman" panose="02020603050405020304" pitchFamily="18" charset="0"/>
+                <a:ea typeface="Calibri" pitchFamily="34" charset="-122"/>
+                <a:cs typeface="Arial" panose="020B0604020202020204" pitchFamily="34" charset="0"/>
+              </a:rPr>
+              <a:t>A digital Payroll solution, PAY-LENS proposed to enhance compensation transparency, automate discrepancy detection, compliance monitoring, employee accessibility. </a:t>
+            </a:r>
+          </a:p>
+          <a:p>
+            <a:pPr marL="0" indent="0">
+              <a:buNone/>
+            </a:pPr>
+            <a:endParaRPr lang="en-US" dirty="0">
+              <a:latin typeface="Lato" panose="020F0502020204030203" pitchFamily="34" charset="0"/>
+              <a:cs typeface="Arial" panose="020B0604020202020204" pitchFamily="34" charset="0"/>
+            </a:endParaRPr>
+          </a:p>
+          <a:p>
+            <a:pPr marL="0" indent="0">
+              <a:buNone/>
+            </a:pPr>
+            <a:endParaRPr lang="en-US" dirty="0">
+              <a:latin typeface="Lato" panose="020F0502020204030203" pitchFamily="34" charset="0"/>
+              <a:cs typeface="Arial" panose="020B0604020202020204" pitchFamily="34" charset="0"/>
             </a:endParaRPr>
           </a:p>
         </p:txBody>
@@ -7077,8 +6780,8 @@
         </p:blipFill>
         <p:spPr>
           <a:xfrm>
-            <a:off x="4240286" y="725532"/>
-            <a:ext cx="4903714" cy="4203183"/>
+            <a:off x="5000759" y="1082780"/>
+            <a:ext cx="4017755" cy="3443790"/>
           </a:xfrm>
           <a:prstGeom prst="rect">
             <a:avLst/>
@@ -7114,15 +6817,15 @@
                 <a:solidFill>
                   <a:srgbClr val="1B3A8A"/>
                 </a:solidFill>
-                <a:latin typeface="Times New Roman" panose="02020603050405020304" pitchFamily="18" charset="0"/>
+                <a:latin typeface="Lato" panose="020F0502020204030203" pitchFamily="34" charset="0"/>
                 <a:ea typeface="Calibri" pitchFamily="34" charset="-122"/>
-                <a:cs typeface="Times New Roman" panose="02020603050405020304" pitchFamily="18" charset="0"/>
+                <a:cs typeface="Arial" panose="020B0604020202020204" pitchFamily="34" charset="0"/>
               </a:rPr>
               <a:t>Proposed Solution</a:t>
             </a:r>
             <a:endParaRPr lang="en-US" sz="2000" dirty="0">
-              <a:latin typeface="Times New Roman" panose="02020603050405020304" pitchFamily="18" charset="0"/>
-              <a:cs typeface="Times New Roman" panose="02020603050405020304" pitchFamily="18" charset="0"/>
+              <a:latin typeface="Lato" panose="020F0502020204030203" pitchFamily="34" charset="0"/>
+              <a:cs typeface="Arial" panose="020B0604020202020204" pitchFamily="34" charset="0"/>
             </a:endParaRPr>
           </a:p>
         </p:txBody>
@@ -7163,8 +6866,8 @@
         </p:nvSpPr>
         <p:spPr>
           <a:xfrm>
-            <a:off x="125486" y="1046012"/>
-            <a:ext cx="4416154" cy="3758105"/>
+            <a:off x="125486" y="1046013"/>
+            <a:ext cx="5009222" cy="3882702"/>
           </a:xfrm>
           <a:prstGeom prst="rect">
             <a:avLst/>
@@ -7177,99 +6880,128 @@
           <a:lstStyle/>
           <a:p>
             <a:pPr marL="285750" indent="-285750" algn="just">
+              <a:lnSpc>
+                <a:spcPct val="150000"/>
+              </a:lnSpc>
               <a:buFont typeface="Wingdings" panose="05000000000000000000" pitchFamily="2" charset="2"/>
-              <a:buChar char="Ø"/>
+              <a:buChar char="ü"/>
             </a:pPr>
             <a:r>
-              <a:rPr lang="en-US" sz="1600" b="1" dirty="0">
-                <a:latin typeface="Times New Roman" panose="02020603050405020304" pitchFamily="18" charset="0"/>
-                <a:cs typeface="Times New Roman" panose="02020603050405020304" pitchFamily="18" charset="0"/>
-              </a:rPr>
-              <a:t>Excel</a:t>
-            </a:r>
-            <a:r>
-              <a:rPr lang="en-US" sz="1600" dirty="0">
-                <a:latin typeface="Times New Roman" panose="02020603050405020304" pitchFamily="18" charset="0"/>
-                <a:cs typeface="Times New Roman" panose="02020603050405020304" pitchFamily="18" charset="0"/>
-              </a:rPr>
-              <a:t> – solve the problem of data complexity and automation with formula based. </a:t>
+              <a:rPr lang="en-US" dirty="0">
+                <a:solidFill>
+                  <a:srgbClr val="1A1A2E"/>
+                </a:solidFill>
+                <a:latin typeface="Lato" panose="020F0502020204030203" pitchFamily="34" charset="0"/>
+                <a:ea typeface="Calibri" pitchFamily="34" charset="-122"/>
+                <a:cs typeface="Arial" panose="020B0604020202020204" pitchFamily="34" charset="0"/>
+              </a:rPr>
+              <a:t>Excel - structuring solves complexity.</a:t>
             </a:r>
           </a:p>
           <a:p>
             <a:pPr marL="285750" indent="-285750" algn="just">
+              <a:lnSpc>
+                <a:spcPct val="150000"/>
+              </a:lnSpc>
               <a:buFont typeface="Wingdings" panose="05000000000000000000" pitchFamily="2" charset="2"/>
-              <a:buChar char="Ø"/>
+              <a:buChar char="ü"/>
             </a:pPr>
             <a:r>
-              <a:rPr lang="en-US" sz="1600" b="1" dirty="0">
-                <a:latin typeface="Times New Roman" panose="02020603050405020304" pitchFamily="18" charset="0"/>
-                <a:cs typeface="Times New Roman" panose="02020603050405020304" pitchFamily="18" charset="0"/>
-              </a:rPr>
-              <a:t>Power BI Dashboards - </a:t>
-            </a:r>
-            <a:r>
-              <a:rPr lang="en-US" sz="1600" dirty="0">
-                <a:latin typeface="Times New Roman" panose="02020603050405020304" pitchFamily="18" charset="0"/>
-                <a:cs typeface="Times New Roman" panose="02020603050405020304" pitchFamily="18" charset="0"/>
-              </a:rPr>
-              <a:t>Visualize pay equity, compliance alerts, and departmental comparison. Assist business taking analytical decisions</a:t>
-            </a:r>
-            <a:r>
               <a:rPr lang="en-US" dirty="0">
-                <a:latin typeface="Times New Roman" panose="02020603050405020304" pitchFamily="18" charset="0"/>
-                <a:cs typeface="Times New Roman" panose="02020603050405020304" pitchFamily="18" charset="0"/>
-              </a:rPr>
-              <a:t>. </a:t>
+                <a:solidFill>
+                  <a:srgbClr val="1A1A2E"/>
+                </a:solidFill>
+                <a:latin typeface="Lato" panose="020F0502020204030203" pitchFamily="34" charset="0"/>
+                <a:ea typeface="Calibri" pitchFamily="34" charset="-122"/>
+                <a:cs typeface="Arial" panose="020B0604020202020204" pitchFamily="34" charset="0"/>
+              </a:rPr>
+              <a:t>Power BI – analytical modelling </a:t>
             </a:r>
           </a:p>
           <a:p>
             <a:pPr marL="285750" indent="-285750" algn="just">
+              <a:lnSpc>
+                <a:spcPct val="150000"/>
+              </a:lnSpc>
               <a:buFont typeface="Wingdings" panose="05000000000000000000" pitchFamily="2" charset="2"/>
-              <a:buChar char="Ø"/>
+              <a:buChar char="ü"/>
             </a:pPr>
             <a:r>
-              <a:rPr lang="en-US" sz="1600" b="1" dirty="0">
-                <a:latin typeface="Times New Roman" panose="02020603050405020304" pitchFamily="18" charset="0"/>
-                <a:cs typeface="Times New Roman" panose="02020603050405020304" pitchFamily="18" charset="0"/>
-              </a:rPr>
-              <a:t>Copilot AI -</a:t>
-            </a:r>
-            <a:r>
-              <a:rPr lang="en-US" sz="1600" dirty="0">
-                <a:latin typeface="Times New Roman" panose="02020603050405020304" pitchFamily="18" charset="0"/>
-                <a:cs typeface="Times New Roman" panose="02020603050405020304" pitchFamily="18" charset="0"/>
-              </a:rPr>
-              <a:t> Detect anomalies, flag statutory compliance issues, simplify policy communication, create summary and business report</a:t>
+              <a:rPr lang="en-US" dirty="0">
+                <a:solidFill>
+                  <a:srgbClr val="1A1A2E"/>
+                </a:solidFill>
+                <a:latin typeface="Lato" panose="020F0502020204030203" pitchFamily="34" charset="0"/>
+                <a:ea typeface="Calibri" pitchFamily="34" charset="-122"/>
+                <a:cs typeface="Arial" panose="020B0604020202020204" pitchFamily="34" charset="0"/>
+              </a:rPr>
+              <a:t>Copilot – assistant </a:t>
             </a:r>
           </a:p>
           <a:p>
             <a:pPr marL="285750" indent="-285750" algn="just">
+              <a:lnSpc>
+                <a:spcPct val="150000"/>
+              </a:lnSpc>
               <a:buFont typeface="Wingdings" panose="05000000000000000000" pitchFamily="2" charset="2"/>
-              <a:buChar char="Ø"/>
+              <a:buChar char="ü"/>
             </a:pPr>
             <a:r>
-              <a:rPr lang="en-US" sz="1600" b="1" dirty="0">
-                <a:latin typeface="Times New Roman" panose="02020603050405020304" pitchFamily="18" charset="0"/>
-                <a:cs typeface="Times New Roman" panose="02020603050405020304" pitchFamily="18" charset="0"/>
-              </a:rPr>
-              <a:t>Chatbot Prototype -</a:t>
-            </a:r>
-            <a:r>
-              <a:rPr lang="en-US" sz="1600" dirty="0">
-                <a:latin typeface="Times New Roman" panose="02020603050405020304" pitchFamily="18" charset="0"/>
-                <a:cs typeface="Times New Roman" panose="02020603050405020304" pitchFamily="18" charset="0"/>
-              </a:rPr>
-              <a:t> Employee-facing tool for salary breakdowns, overtime checks, benchmark analysis and policy updates.</a:t>
+              <a:rPr lang="en-US" dirty="0">
+                <a:solidFill>
+                  <a:srgbClr val="1A1A2E"/>
+                </a:solidFill>
+                <a:latin typeface="Lato" panose="020F0502020204030203" pitchFamily="34" charset="0"/>
+                <a:ea typeface="Calibri" pitchFamily="34" charset="-122"/>
+                <a:cs typeface="Arial" panose="020B0604020202020204" pitchFamily="34" charset="0"/>
+              </a:rPr>
+              <a:t>Agent &amp; chatbot – employee facing tool for communication.</a:t>
             </a:r>
           </a:p>
           <a:p>
             <a:pPr marL="285750" indent="-285750" algn="just">
-              <a:buFont typeface="Arial" panose="020B0604020202020204" pitchFamily="34" charset="0"/>
-              <a:buChar char="•"/>
+              <a:lnSpc>
+                <a:spcPct val="150000"/>
+              </a:lnSpc>
+              <a:buFont typeface="Wingdings" panose="05000000000000000000" pitchFamily="2" charset="2"/>
+              <a:buChar char="ü"/>
+            </a:pPr>
+            <a:r>
+              <a:rPr lang="en-US" dirty="0">
+                <a:solidFill>
+                  <a:srgbClr val="1A1A2E"/>
+                </a:solidFill>
+                <a:latin typeface="Lato" panose="020F0502020204030203" pitchFamily="34" charset="0"/>
+                <a:ea typeface="Calibri" pitchFamily="34" charset="-122"/>
+                <a:cs typeface="Arial" panose="020B0604020202020204" pitchFamily="34" charset="0"/>
+              </a:rPr>
+              <a:t>Employee and Employer friendly. </a:t>
+            </a:r>
+          </a:p>
+          <a:p>
+            <a:pPr marL="285750" indent="-285750" algn="just">
+              <a:lnSpc>
+                <a:spcPct val="150000"/>
+              </a:lnSpc>
+              <a:buFont typeface="Wingdings" panose="05000000000000000000" pitchFamily="2" charset="2"/>
+              <a:buChar char="ü"/>
             </a:pPr>
             <a:endParaRPr lang="en-US" dirty="0">
-              <a:latin typeface="Times New Roman" panose="02020603050405020304" pitchFamily="18" charset="0"/>
-              <a:cs typeface="Times New Roman" panose="02020603050405020304" pitchFamily="18" charset="0"/>
+              <a:solidFill>
+                <a:srgbClr val="1A1A2E"/>
+              </a:solidFill>
+              <a:latin typeface="Lato" panose="020F0502020204030203" pitchFamily="34" charset="0"/>
+              <a:ea typeface="Calibri" pitchFamily="34" charset="-122"/>
+              <a:cs typeface="Arial" panose="020B0604020202020204" pitchFamily="34" charset="0"/>
+            </a:endParaRPr>
+          </a:p>
+          <a:p>
+            <a:pPr marL="0" indent="0">
+              <a:buNone/>
+            </a:pPr>
+            <a:endParaRPr lang="en-US" dirty="0">
+              <a:latin typeface="Lato" panose="020F0502020204030203" pitchFamily="34" charset="0"/>
+              <a:cs typeface="Arial" panose="020B0604020202020204" pitchFamily="34" charset="0"/>
             </a:endParaRPr>
           </a:p>
         </p:txBody>
@@ -7280,7 +7012,7 @@
     </p:custDataLst>
     <p:extLst>
       <p:ext uri="{BB962C8B-B14F-4D97-AF65-F5344CB8AC3E}">
-        <p14:creationId xmlns:p14="http://schemas.microsoft.com/office/powerpoint/2010/main" val="3415441670"/>
+        <p14:creationId xmlns:p14="http://schemas.microsoft.com/office/powerpoint/2010/main" val="3692443211"/>
       </p:ext>
     </p:extLst>
   </p:cSld>
@@ -7292,15 +7024,7 @@
 
 <file path=ppt/slides/slide8.xml><?xml version="1.0" encoding="utf-8"?>
 <p:sld xmlns:a="http://schemas.openxmlformats.org/drawingml/2006/main" xmlns:r="http://schemas.openxmlformats.org/officeDocument/2006/relationships" xmlns:p="http://schemas.openxmlformats.org/presentationml/2006/main">
-  <p:cSld name="Slide 6">
-    <p:bg>
-      <p:bgPr>
-        <a:solidFill>
-          <a:srgbClr val="FFFFFF"/>
-        </a:solidFill>
-        <a:effectLst/>
-      </p:bgPr>
-    </p:bg>
+  <p:cSld>
     <p:spTree>
       <p:nvGrpSpPr>
         <p:cNvPr id="1" name=""/>
@@ -7317,7 +7041,13 @@
       </p:grpSpPr>
       <p:sp>
         <p:nvSpPr>
-          <p:cNvPr id="4" name="Text 2"/>
+          <p:cNvPr id="2" name="Text 2">
+            <a:extLst>
+              <a:ext uri="{FF2B5EF4-FFF2-40B4-BE49-F238E27FC236}">
+                <a16:creationId xmlns:a16="http://schemas.microsoft.com/office/drawing/2014/main" id="{39458BD4-2667-B44D-FBA3-2913D15F69A7}"/>
+              </a:ext>
+            </a:extLst>
+          </p:cNvPr>
           <p:cNvSpPr/>
           <p:nvPr/>
         </p:nvSpPr>
@@ -7357,229 +7087,12 @@
           </a:p>
         </p:txBody>
       </p:sp>
-      <p:sp>
-        <p:nvSpPr>
-          <p:cNvPr id="8" name="Text 6"/>
-          <p:cNvSpPr/>
-          <p:nvPr/>
-        </p:nvSpPr>
-        <p:spPr>
-          <a:xfrm>
-            <a:off x="326848" y="1279776"/>
-            <a:ext cx="3840480" cy="310896"/>
-          </a:xfrm>
-          <a:prstGeom prst="rect">
-            <a:avLst/>
-          </a:prstGeom>
-          <a:noFill/>
-          <a:ln/>
-        </p:spPr>
-        <p:txBody>
-          <a:bodyPr wrap="square" rtlCol="0" anchor="ctr"/>
-          <a:lstStyle/>
-          <a:p>
-            <a:pPr marL="0" indent="0">
-              <a:buNone/>
-            </a:pPr>
-            <a:endParaRPr lang="en-US" sz="1600" dirty="0">
-              <a:latin typeface="Times New Roman" panose="02020603050405020304" pitchFamily="18" charset="0"/>
-              <a:cs typeface="Times New Roman" panose="02020603050405020304" pitchFamily="18" charset="0"/>
-            </a:endParaRPr>
-          </a:p>
-        </p:txBody>
-      </p:sp>
-      <p:sp>
-        <p:nvSpPr>
-          <p:cNvPr id="9" name="Text 7"/>
-          <p:cNvSpPr/>
-          <p:nvPr/>
-        </p:nvSpPr>
-        <p:spPr>
-          <a:xfrm>
-            <a:off x="326848" y="1700400"/>
-            <a:ext cx="4023360" cy="1188720"/>
-          </a:xfrm>
-          <a:prstGeom prst="rect">
-            <a:avLst/>
-          </a:prstGeom>
-          <a:noFill/>
-          <a:ln/>
-        </p:spPr>
-        <p:txBody>
-          <a:bodyPr wrap="square" rtlCol="0" anchor="t"/>
-          <a:lstStyle/>
-          <a:p>
-            <a:pPr marL="0" indent="0" algn="just">
-              <a:buNone/>
-            </a:pPr>
-            <a:endParaRPr lang="en-US" sz="1600" dirty="0">
-              <a:latin typeface="Times New Roman" panose="02020603050405020304" pitchFamily="18" charset="0"/>
-              <a:cs typeface="Times New Roman" panose="02020603050405020304" pitchFamily="18" charset="0"/>
-            </a:endParaRPr>
-          </a:p>
-        </p:txBody>
-      </p:sp>
-      <p:sp>
-        <p:nvSpPr>
-          <p:cNvPr id="12" name="Text 10"/>
-          <p:cNvSpPr/>
-          <p:nvPr/>
-        </p:nvSpPr>
-        <p:spPr>
-          <a:xfrm>
-            <a:off x="4761688" y="1279776"/>
-            <a:ext cx="3840480" cy="310896"/>
-          </a:xfrm>
-          <a:prstGeom prst="rect">
-            <a:avLst/>
-          </a:prstGeom>
-          <a:noFill/>
-          <a:ln/>
-        </p:spPr>
-        <p:txBody>
-          <a:bodyPr wrap="square" rtlCol="0" anchor="ctr"/>
-          <a:lstStyle/>
-          <a:p>
-            <a:pPr marL="0" indent="0">
-              <a:buNone/>
-            </a:pPr>
-            <a:endParaRPr lang="en-US" sz="1600" dirty="0">
-              <a:latin typeface="Times New Roman" panose="02020603050405020304" pitchFamily="18" charset="0"/>
-              <a:cs typeface="Times New Roman" panose="02020603050405020304" pitchFamily="18" charset="0"/>
-            </a:endParaRPr>
-          </a:p>
-        </p:txBody>
-      </p:sp>
-      <p:sp>
-        <p:nvSpPr>
-          <p:cNvPr id="13" name="Text 11"/>
-          <p:cNvSpPr/>
-          <p:nvPr/>
-        </p:nvSpPr>
-        <p:spPr>
-          <a:xfrm>
-            <a:off x="4761688" y="1700400"/>
-            <a:ext cx="4023360" cy="1188720"/>
-          </a:xfrm>
-          <a:prstGeom prst="rect">
-            <a:avLst/>
-          </a:prstGeom>
-          <a:noFill/>
-          <a:ln/>
-        </p:spPr>
-        <p:txBody>
-          <a:bodyPr wrap="square" rtlCol="0" anchor="t"/>
-          <a:lstStyle/>
-          <a:p>
-            <a:pPr marL="0" indent="0" algn="just">
-              <a:buNone/>
-            </a:pPr>
-            <a:endParaRPr lang="en-US" sz="1600" dirty="0">
-              <a:latin typeface="Times New Roman" panose="02020603050405020304" pitchFamily="18" charset="0"/>
-              <a:cs typeface="Times New Roman" panose="02020603050405020304" pitchFamily="18" charset="0"/>
-            </a:endParaRPr>
-          </a:p>
-        </p:txBody>
-      </p:sp>
-      <p:sp>
-        <p:nvSpPr>
-          <p:cNvPr id="16" name="Text 14"/>
-          <p:cNvSpPr/>
-          <p:nvPr/>
-        </p:nvSpPr>
-        <p:spPr>
-          <a:xfrm>
-            <a:off x="326848" y="3006432"/>
-            <a:ext cx="3840480" cy="310896"/>
-          </a:xfrm>
-          <a:prstGeom prst="rect">
-            <a:avLst/>
-          </a:prstGeom>
-          <a:noFill/>
-          <a:ln/>
-        </p:spPr>
-        <p:txBody>
-          <a:bodyPr wrap="square" rtlCol="0" anchor="ctr"/>
-          <a:lstStyle/>
-          <a:p>
-            <a:pPr marL="0" indent="0">
-              <a:buNone/>
-            </a:pPr>
-            <a:endParaRPr lang="en-US" sz="1600" dirty="0">
-              <a:latin typeface="Times New Roman" panose="02020603050405020304" pitchFamily="18" charset="0"/>
-              <a:cs typeface="Times New Roman" panose="02020603050405020304" pitchFamily="18" charset="0"/>
-            </a:endParaRPr>
-          </a:p>
-        </p:txBody>
-      </p:sp>
-      <p:sp>
-        <p:nvSpPr>
-          <p:cNvPr id="17" name="Text 15"/>
-          <p:cNvSpPr/>
-          <p:nvPr/>
-        </p:nvSpPr>
-        <p:spPr>
-          <a:xfrm>
-            <a:off x="326848" y="3427056"/>
-            <a:ext cx="4023360" cy="1188720"/>
-          </a:xfrm>
-          <a:prstGeom prst="rect">
-            <a:avLst/>
-          </a:prstGeom>
-          <a:noFill/>
-          <a:ln/>
-        </p:spPr>
-        <p:txBody>
-          <a:bodyPr wrap="square" rtlCol="0" anchor="t"/>
-          <a:lstStyle/>
-          <a:p>
-            <a:pPr marL="0" indent="0" algn="just">
-              <a:buNone/>
-            </a:pPr>
-            <a:endParaRPr lang="en-US" sz="1600" dirty="0">
-              <a:latin typeface="Times New Roman" panose="02020603050405020304" pitchFamily="18" charset="0"/>
-              <a:cs typeface="Times New Roman" panose="02020603050405020304" pitchFamily="18" charset="0"/>
-            </a:endParaRPr>
-          </a:p>
-        </p:txBody>
-      </p:sp>
-      <p:sp>
-        <p:nvSpPr>
-          <p:cNvPr id="20" name="Text 18"/>
-          <p:cNvSpPr/>
-          <p:nvPr/>
-        </p:nvSpPr>
-        <p:spPr>
-          <a:xfrm>
-            <a:off x="4761688" y="3006432"/>
-            <a:ext cx="3840480" cy="310896"/>
-          </a:xfrm>
-          <a:prstGeom prst="rect">
-            <a:avLst/>
-          </a:prstGeom>
-          <a:noFill/>
-          <a:ln/>
-        </p:spPr>
-        <p:txBody>
-          <a:bodyPr wrap="square" rtlCol="0" anchor="ctr"/>
-          <a:lstStyle/>
-          <a:p>
-            <a:pPr marL="0" indent="0">
-              <a:buNone/>
-            </a:pPr>
-            <a:endParaRPr lang="en-US" sz="1600" dirty="0">
-              <a:latin typeface="Times New Roman" panose="02020603050405020304" pitchFamily="18" charset="0"/>
-              <a:cs typeface="Times New Roman" panose="02020603050405020304" pitchFamily="18" charset="0"/>
-            </a:endParaRPr>
-          </a:p>
-        </p:txBody>
-      </p:sp>
       <p:pic>
         <p:nvPicPr>
-          <p:cNvPr id="3" name="Picture 2" descr="A diagram of process automation&#10;&#10;AI-generated content may be incorrect.">
+          <p:cNvPr id="6" name="Picture 5">
             <a:extLst>
               <a:ext uri="{FF2B5EF4-FFF2-40B4-BE49-F238E27FC236}">
-                <a16:creationId xmlns:a16="http://schemas.microsoft.com/office/drawing/2014/main" id="{389ECA45-6078-17FC-FB1D-D022E472334F}"/>
+                <a16:creationId xmlns:a16="http://schemas.microsoft.com/office/drawing/2014/main" id="{0D987A8D-374B-7068-C481-8AA923513684}"/>
               </a:ext>
             </a:extLst>
           </p:cNvPr>
@@ -7589,15 +7102,15 @@
           <p:nvPr/>
         </p:nvPicPr>
         <p:blipFill>
-          <a:blip r:embed="rId4"/>
+          <a:blip r:embed="rId2"/>
           <a:stretch>
             <a:fillRect/>
           </a:stretch>
         </p:blipFill>
         <p:spPr>
           <a:xfrm>
-            <a:off x="1700704" y="1220374"/>
-            <a:ext cx="5607461" cy="3572116"/>
+            <a:off x="1125414" y="1041832"/>
+            <a:ext cx="6499349" cy="3547985"/>
           </a:xfrm>
           <a:prstGeom prst="rect">
             <a:avLst/>
@@ -7605,9 +7118,11 @@
         </p:spPr>
       </p:pic>
     </p:spTree>
-    <p:custDataLst>
-      <p:tags r:id="rId1"/>
-    </p:custDataLst>
+    <p:extLst>
+      <p:ext uri="{BB962C8B-B14F-4D97-AF65-F5344CB8AC3E}">
+        <p14:creationId xmlns:p14="http://schemas.microsoft.com/office/powerpoint/2010/main" val="3071373285"/>
+      </p:ext>
+    </p:extLst>
   </p:cSld>
   <p:clrMapOvr>
     <a:masterClrMapping/>
@@ -7707,14 +7222,14 @@
               <a:buNone/>
             </a:pPr>
             <a:r>
-              <a:rPr lang="en-US" sz="1600" dirty="0">
+              <a:rPr lang="en-US" dirty="0">
                 <a:latin typeface="Lato" panose="020F0502020204030203" pitchFamily="34" charset="0"/>
                 <a:ea typeface="Calibri" pitchFamily="34" charset="-122"/>
                 <a:cs typeface="Arial" panose="020B0604020202020204" pitchFamily="34" charset="0"/>
               </a:rPr>
               <a:t>Here's the list of some demo screenshots / features of the project:</a:t>
             </a:r>
-            <a:endParaRPr lang="en-US" sz="1600" dirty="0">
+            <a:endParaRPr lang="en-US" dirty="0">
               <a:latin typeface="Lato" panose="020F0502020204030203" pitchFamily="34" charset="0"/>
               <a:cs typeface="Arial" panose="020B0604020202020204" pitchFamily="34" charset="0"/>
             </a:endParaRPr>
@@ -7802,7 +7317,7 @@
         </p:nvSpPr>
         <p:spPr>
           <a:xfrm>
-            <a:off x="274320" y="2624242"/>
+            <a:off x="274320" y="2413802"/>
             <a:ext cx="2788920" cy="411480"/>
           </a:xfrm>
           <a:prstGeom prst="rect">
@@ -7841,8 +7356,8 @@
         </p:nvSpPr>
         <p:spPr>
           <a:xfrm>
-            <a:off x="406908" y="3066715"/>
-            <a:ext cx="2514600" cy="1957733"/>
+            <a:off x="411480" y="2919838"/>
+            <a:ext cx="2514600" cy="1371600"/>
           </a:xfrm>
           <a:prstGeom prst="rect">
             <a:avLst/>
@@ -7857,27 +7372,6 @@
             <a:pPr marL="0" indent="0" algn="ctr">
               <a:buNone/>
             </a:pPr>
-            <a:r>
-              <a:rPr lang="en-US" sz="1600" dirty="0">
-                <a:latin typeface="Times New Roman" panose="02020603050405020304" pitchFamily="18" charset="0"/>
-                <a:ea typeface="Calibri" pitchFamily="34" charset="-122"/>
-                <a:cs typeface="Times New Roman" panose="02020603050405020304" pitchFamily="18" charset="0"/>
-              </a:rPr>
-              <a:t>.  </a:t>
-            </a:r>
-          </a:p>
-          <a:p>
-            <a:pPr marL="0" indent="0" algn="ctr">
-              <a:buNone/>
-            </a:pPr>
-            <a:r>
-              <a:rPr lang="en-US" sz="1600" dirty="0">
-                <a:latin typeface="Lato" panose="020F0502020204030203" pitchFamily="34" charset="0"/>
-                <a:ea typeface="Calibri" pitchFamily="34" charset="-122"/>
-                <a:cs typeface="Arial" panose="020B0604020202020204" pitchFamily="34" charset="0"/>
-              </a:rPr>
-              <a:t> </a:t>
-            </a:r>
             <a:endParaRPr lang="en-US" sz="1600" dirty="0">
               <a:latin typeface="Lato" panose="020F0502020204030203" pitchFamily="34" charset="0"/>
               <a:cs typeface="Arial" panose="020B0604020202020204" pitchFamily="34" charset="0"/>
@@ -7927,7 +7421,7 @@
         </p:nvSpPr>
         <p:spPr>
           <a:xfrm>
-            <a:off x="3227832" y="2279758"/>
+            <a:off x="3218688" y="2196877"/>
             <a:ext cx="2788920" cy="2651760"/>
           </a:xfrm>
           <a:prstGeom prst="rect">
@@ -7963,7 +7457,7 @@
         </p:nvSpPr>
         <p:spPr>
           <a:xfrm>
-            <a:off x="3206379" y="2582732"/>
+            <a:off x="3218688" y="2413802"/>
             <a:ext cx="2788920" cy="411480"/>
           </a:xfrm>
           <a:prstGeom prst="rect">
@@ -8002,8 +7496,8 @@
         </p:nvSpPr>
         <p:spPr>
           <a:xfrm>
-            <a:off x="3355848" y="2825282"/>
-            <a:ext cx="2514600" cy="1767820"/>
+            <a:off x="3355848" y="2919838"/>
+            <a:ext cx="2514600" cy="1371600"/>
           </a:xfrm>
           <a:prstGeom prst="rect">
             <a:avLst/>
@@ -8018,17 +7512,9 @@
             <a:pPr marL="0" indent="0" algn="ctr">
               <a:buNone/>
             </a:pPr>
-            <a:r>
-              <a:rPr lang="en-US" sz="1600" dirty="0">
-                <a:latin typeface="Times New Roman" panose="02020603050405020304" pitchFamily="18" charset="0"/>
-                <a:ea typeface="Calibri" pitchFamily="34" charset="-122"/>
-                <a:cs typeface="Times New Roman" panose="02020603050405020304" pitchFamily="18" charset="0"/>
-              </a:rPr>
-              <a:t>.  </a:t>
-            </a:r>
             <a:endParaRPr lang="en-US" sz="1600" dirty="0">
-              <a:latin typeface="Times New Roman" panose="02020603050405020304" pitchFamily="18" charset="0"/>
-              <a:cs typeface="Times New Roman" panose="02020603050405020304" pitchFamily="18" charset="0"/>
+              <a:latin typeface="Lato" panose="020F0502020204030203" pitchFamily="34" charset="0"/>
+              <a:cs typeface="Arial" panose="020B0604020202020204" pitchFamily="34" charset="0"/>
             </a:endParaRPr>
           </a:p>
         </p:txBody>
@@ -8130,7 +7616,7 @@
           <a:bodyPr/>
           <a:lstStyle/>
           <a:p>
-            <a:endParaRPr lang="en-IN" dirty="0">
+            <a:endParaRPr lang="en-IN">
               <a:latin typeface="Lato" panose="020F0502020204030203" pitchFamily="34" charset="0"/>
             </a:endParaRPr>
           </a:p>
@@ -8144,7 +7630,7 @@
         </p:nvSpPr>
         <p:spPr>
           <a:xfrm>
-            <a:off x="6177574" y="2580376"/>
+            <a:off x="6163056" y="2413802"/>
             <a:ext cx="2788920" cy="411480"/>
           </a:xfrm>
           <a:prstGeom prst="rect">
@@ -8200,18 +7686,18 @@
               <a:buNone/>
             </a:pPr>
             <a:endParaRPr lang="en-US" sz="1600" dirty="0">
-              <a:latin typeface="Times New Roman" panose="02020603050405020304" pitchFamily="18" charset="0"/>
-              <a:cs typeface="Times New Roman" panose="02020603050405020304" pitchFamily="18" charset="0"/>
+              <a:latin typeface="Lato" panose="020F0502020204030203" pitchFamily="34" charset="0"/>
+              <a:cs typeface="Arial" panose="020B0604020202020204" pitchFamily="34" charset="0"/>
             </a:endParaRPr>
           </a:p>
         </p:txBody>
       </p:sp>
       <p:pic>
         <p:nvPicPr>
-          <p:cNvPr id="8" name="Picture 7">
+          <p:cNvPr id="2" name="Picture 1">
             <a:extLst>
               <a:ext uri="{FF2B5EF4-FFF2-40B4-BE49-F238E27FC236}">
-                <a16:creationId xmlns:a16="http://schemas.microsoft.com/office/drawing/2014/main" id="{CCCE4515-2238-0A71-B462-E20BA6CC00D4}"/>
+                <a16:creationId xmlns:a16="http://schemas.microsoft.com/office/drawing/2014/main" id="{DC6D1061-2E58-6FE5-0F60-7216BD1A859E}"/>
               </a:ext>
             </a:extLst>
           </p:cNvPr>
@@ -8228,37 +7714,7 @@
         </p:blipFill>
         <p:spPr>
           <a:xfrm>
-            <a:off x="6131634" y="3123641"/>
-            <a:ext cx="2924309" cy="1644925"/>
-          </a:xfrm>
-          <a:prstGeom prst="rect">
-            <a:avLst/>
-          </a:prstGeom>
-        </p:spPr>
-      </p:pic>
-      <p:pic>
-        <p:nvPicPr>
-          <p:cNvPr id="22" name="Picture 21">
-            <a:extLst>
-              <a:ext uri="{FF2B5EF4-FFF2-40B4-BE49-F238E27FC236}">
-                <a16:creationId xmlns:a16="http://schemas.microsoft.com/office/drawing/2014/main" id="{EB92A511-8756-72A8-6EFF-62B31D926F9E}"/>
-              </a:ext>
-            </a:extLst>
-          </p:cNvPr>
-          <p:cNvPicPr>
-            <a:picLocks noChangeAspect="1"/>
-          </p:cNvPicPr>
-          <p:nvPr/>
-        </p:nvPicPr>
-        <p:blipFill>
-          <a:blip r:embed="rId5"/>
-          <a:stretch>
-            <a:fillRect/>
-          </a:stretch>
-        </p:blipFill>
-        <p:spPr>
-          <a:xfrm>
-            <a:off x="259802" y="3115792"/>
+            <a:off x="258499" y="3196062"/>
             <a:ext cx="2793583" cy="1652774"/>
           </a:xfrm>
           <a:prstGeom prst="rect">
@@ -8271,7 +7727,37 @@
           <p:cNvPr id="3" name="Picture 2">
             <a:extLst>
               <a:ext uri="{FF2B5EF4-FFF2-40B4-BE49-F238E27FC236}">
-                <a16:creationId xmlns:a16="http://schemas.microsoft.com/office/drawing/2014/main" id="{D57E55DB-EAD6-A4AF-9554-5C2D748E1960}"/>
+                <a16:creationId xmlns:a16="http://schemas.microsoft.com/office/drawing/2014/main" id="{AB667B80-7B50-E4A7-E56D-7C0132FA93F8}"/>
+              </a:ext>
+            </a:extLst>
+          </p:cNvPr>
+          <p:cNvPicPr>
+            <a:picLocks noChangeAspect="1"/>
+          </p:cNvPicPr>
+          <p:nvPr/>
+        </p:nvPicPr>
+        <p:blipFill>
+          <a:blip r:embed="rId5"/>
+          <a:stretch>
+            <a:fillRect/>
+          </a:stretch>
+        </p:blipFill>
+        <p:spPr>
+          <a:xfrm>
+            <a:off x="6131634" y="3123641"/>
+            <a:ext cx="2924309" cy="1644925"/>
+          </a:xfrm>
+          <a:prstGeom prst="rect">
+            <a:avLst/>
+          </a:prstGeom>
+        </p:spPr>
+      </p:pic>
+      <p:pic>
+        <p:nvPicPr>
+          <p:cNvPr id="5" name="Picture 4">
+            <a:extLst>
+              <a:ext uri="{FF2B5EF4-FFF2-40B4-BE49-F238E27FC236}">
+                <a16:creationId xmlns:a16="http://schemas.microsoft.com/office/drawing/2014/main" id="{E2955D9E-940B-3E34-88C0-310BFA39A4AC}"/>
               </a:ext>
             </a:extLst>
           </p:cNvPr>
@@ -8288,7 +7774,7 @@
         </p:blipFill>
         <p:spPr>
           <a:xfrm>
-            <a:off x="3256208" y="3115792"/>
+            <a:off x="3276019" y="3123641"/>
             <a:ext cx="2747410" cy="1652774"/>
           </a:xfrm>
           <a:prstGeom prst="rect">
@@ -8352,18 +7838,6 @@
 </file>
 
 <file path=ppt/tags/tag16.xml><?xml version="1.0" encoding="utf-8"?>
-<p:tagLst xmlns:a="http://schemas.openxmlformats.org/drawingml/2006/main" xmlns:r="http://schemas.openxmlformats.org/officeDocument/2006/relationships" xmlns:p="http://schemas.openxmlformats.org/presentationml/2006/main">
-  <p:tag name="ARTICULATE_SLIDE_THUMBNAIL_REFRESH" val="1"/>
-</p:tagLst>
-</file>
-
-<file path=ppt/tags/tag17.xml><?xml version="1.0" encoding="utf-8"?>
-<p:tagLst xmlns:a="http://schemas.openxmlformats.org/drawingml/2006/main" xmlns:r="http://schemas.openxmlformats.org/officeDocument/2006/relationships" xmlns:p="http://schemas.openxmlformats.org/presentationml/2006/main">
-  <p:tag name="ARTICULATE_SLIDE_THUMBNAIL_REFRESH" val="1"/>
-</p:tagLst>
-</file>
-
-<file path=ppt/tags/tag18.xml><?xml version="1.0" encoding="utf-8"?>
 <p:tagLst xmlns:a="http://schemas.openxmlformats.org/drawingml/2006/main" xmlns:r="http://schemas.openxmlformats.org/officeDocument/2006/relationships" xmlns:p="http://schemas.openxmlformats.org/presentationml/2006/main">
   <p:tag name="ARTICULATE_SLIDE_THUMBNAIL_REFRESH" val="1"/>
 </p:tagLst>

--- a/PAY LENS - VISUALISING SALARY TRUTH WITH BI & AI.pptx
+++ b/PAY LENS - VISUALISING SALARY TRUTH WITH BI & AI.pptx
@@ -5,7 +5,7 @@
     <p:sldMasterId id="2147483648" r:id="rId1"/>
   </p:sldMasterIdLst>
   <p:notesMasterIdLst>
-    <p:notesMasterId r:id="rId15"/>
+    <p:notesMasterId r:id="rId16"/>
   </p:notesMasterIdLst>
   <p:sldIdLst>
     <p:sldId id="268" r:id="rId2"/>
@@ -18,14 +18,15 @@
     <p:sldId id="272" r:id="rId9"/>
     <p:sldId id="262" r:id="rId10"/>
     <p:sldId id="263" r:id="rId11"/>
-    <p:sldId id="264" r:id="rId12"/>
-    <p:sldId id="265" r:id="rId13"/>
-    <p:sldId id="266" r:id="rId14"/>
+    <p:sldId id="273" r:id="rId12"/>
+    <p:sldId id="264" r:id="rId13"/>
+    <p:sldId id="265" r:id="rId14"/>
+    <p:sldId id="266" r:id="rId15"/>
   </p:sldIdLst>
   <p:sldSz cx="9144000" cy="5143500" type="screen16x9"/>
   <p:notesSz cx="5143500" cy="9144000"/>
   <p:custDataLst>
-    <p:tags r:id="rId16"/>
+    <p:tags r:id="rId17"/>
   </p:custDataLst>
   <p:defaultTextStyle>
     <a:lvl1pPr marL="0" algn="l" defTabSz="914400" rtl="0" eaLnBrk="1" latinLnBrk="0" hangingPunct="1">
@@ -435,7 +436,7 @@
     </p:spTree>
     <p:extLst>
       <p:ext uri="{BB962C8B-B14F-4D97-AF65-F5344CB8AC3E}">
-        <p14:creationId xmlns:p14="http://schemas.microsoft.com/office/powerpoint/2010/main" val="1024086991"/>
+        <p14:creationId xmlns:p14="http://schemas.microsoft.com/office/powerpoint/2010/main" val="816732490"/>
       </p:ext>
     </p:extLst>
   </p:cSld>
@@ -595,6 +596,90 @@
             <a:fld id="{F7021451-1387-4CA6-816F-3879F97B5CBC}" type="slidenum">
               <a:rPr lang="en-US"/>
               <a:t>13</a:t>
+            </a:fld>
+            <a:endParaRPr lang="en-US"/>
+          </a:p>
+        </p:txBody>
+      </p:sp>
+    </p:spTree>
+    <p:extLst>
+      <p:ext uri="{BB962C8B-B14F-4D97-AF65-F5344CB8AC3E}">
+        <p14:creationId xmlns:p14="http://schemas.microsoft.com/office/powerpoint/2010/main" val="1024086991"/>
+      </p:ext>
+    </p:extLst>
+  </p:cSld>
+  <p:clrMapOvr>
+    <a:masterClrMapping/>
+  </p:clrMapOvr>
+</p:notes>
+</file>
+
+<file path=ppt/notesSlides/notesSlide13.xml><?xml version="1.0" encoding="utf-8"?>
+<p:notes xmlns:a="http://schemas.openxmlformats.org/drawingml/2006/main" xmlns:r="http://schemas.openxmlformats.org/officeDocument/2006/relationships" xmlns:p="http://schemas.openxmlformats.org/presentationml/2006/main">
+  <p:cSld>
+    <p:spTree>
+      <p:nvGrpSpPr>
+        <p:cNvPr id="1" name=""/>
+        <p:cNvGrpSpPr/>
+        <p:nvPr/>
+      </p:nvGrpSpPr>
+      <p:grpSpPr>
+        <a:xfrm>
+          <a:off x="0" y="0"/>
+          <a:ext cx="0" cy="0"/>
+          <a:chOff x="0" y="0"/>
+          <a:chExt cx="0" cy="0"/>
+        </a:xfrm>
+      </p:grpSpPr>
+      <p:sp>
+        <p:nvSpPr>
+          <p:cNvPr id="2" name="Slide Image Placeholder 1"/>
+          <p:cNvSpPr>
+            <a:spLocks noGrp="1" noRot="1" noChangeAspect="1"/>
+          </p:cNvSpPr>
+          <p:nvPr>
+            <p:ph type="sldImg"/>
+          </p:nvPr>
+        </p:nvSpPr>
+        <p:spPr/>
+      </p:sp>
+      <p:sp>
+        <p:nvSpPr>
+          <p:cNvPr id="3" name="Notes Placeholder 2"/>
+          <p:cNvSpPr>
+            <a:spLocks noGrp="1"/>
+          </p:cNvSpPr>
+          <p:nvPr>
+            <p:ph type="body" idx="1"/>
+          </p:nvPr>
+        </p:nvSpPr>
+        <p:spPr/>
+        <p:txBody>
+          <a:bodyPr/>
+          <a:lstStyle/>
+          <a:p>
+            <a:endParaRPr lang="en-US" dirty="0"/>
+          </a:p>
+        </p:txBody>
+      </p:sp>
+      <p:sp>
+        <p:nvSpPr>
+          <p:cNvPr id="4" name="Slide Number Placeholder 3"/>
+          <p:cNvSpPr>
+            <a:spLocks noGrp="1"/>
+          </p:cNvSpPr>
+          <p:nvPr>
+            <p:ph type="sldNum" sz="quarter" idx="10"/>
+          </p:nvPr>
+        </p:nvSpPr>
+        <p:spPr/>
+        <p:txBody>
+          <a:bodyPr/>
+          <a:lstStyle/>
+          <a:p>
+            <a:fld id="{F7021451-1387-4CA6-816F-3879F97B5CBC}" type="slidenum">
+              <a:rPr lang="en-US"/>
+              <a:t>14</a:t>
             </a:fld>
             <a:endParaRPr lang="en-US"/>
           </a:p>
@@ -3402,7 +3487,7 @@
         </p:nvSpPr>
         <p:spPr>
           <a:xfrm>
-            <a:off x="2302781" y="4344678"/>
+            <a:off x="2306056" y="4321559"/>
             <a:ext cx="1633432" cy="154209"/>
           </a:xfrm>
           <a:prstGeom prst="rect">
@@ -3502,7 +3587,7 @@
         </p:blipFill>
         <p:spPr>
           <a:xfrm>
-            <a:off x="1879018" y="4336133"/>
+            <a:off x="1884463" y="4299730"/>
             <a:ext cx="395331" cy="381795"/>
           </a:xfrm>
           <a:prstGeom prst="rect">
@@ -3524,7 +3609,7 @@
         </p:nvSpPr>
         <p:spPr>
           <a:xfrm>
-            <a:off x="3924234" y="4279537"/>
+            <a:off x="4118699" y="4336419"/>
             <a:ext cx="1809978" cy="154209"/>
           </a:xfrm>
           <a:prstGeom prst="rect">
@@ -3568,15 +3653,15 @@
         </p:nvSpPr>
         <p:spPr>
           <a:xfrm>
-            <a:off x="3945013" y="4413410"/>
-            <a:ext cx="2272871" cy="483915"/>
+            <a:off x="4126286" y="4489743"/>
+            <a:ext cx="2539417" cy="227435"/>
           </a:xfrm>
           <a:prstGeom prst="rect">
             <a:avLst/>
           </a:prstGeom>
         </p:spPr>
         <p:txBody>
-          <a:bodyPr lIns="0" tIns="0" rIns="0" bIns="0" rtlCol="0" anchor="t">
+          <a:bodyPr wrap="square" lIns="0" tIns="0" rIns="0" bIns="0" rtlCol="0" anchor="t">
             <a:spAutoFit/>
           </a:bodyPr>
           <a:lstStyle/>
@@ -3624,7 +3709,7 @@
         </p:blipFill>
         <p:spPr>
           <a:xfrm>
-            <a:off x="3523298" y="4318413"/>
+            <a:off x="3644651" y="4304027"/>
             <a:ext cx="398279" cy="389719"/>
           </a:xfrm>
           <a:prstGeom prst="rect">
@@ -3646,7 +3731,7 @@
         </p:nvGrpSpPr>
         <p:grpSpPr>
           <a:xfrm>
-            <a:off x="514884" y="4294693"/>
+            <a:off x="394047" y="4279537"/>
             <a:ext cx="2272871" cy="389019"/>
             <a:chOff x="3139699" y="4295282"/>
             <a:chExt cx="2272871" cy="389019"/>
@@ -3791,7 +3876,7 @@
         </p:blipFill>
         <p:spPr>
           <a:xfrm>
-            <a:off x="109190" y="4290789"/>
+            <a:off x="20446" y="4282967"/>
             <a:ext cx="375815" cy="381063"/>
           </a:xfrm>
           <a:prstGeom prst="rect">
@@ -4398,7 +4483,7 @@
                 </a:solidFill>
                 <a:latin typeface="Times New Roman" panose="02020603050405020304" pitchFamily="18" charset="0"/>
               </a:rPr>
-              <a:t>https://drive.google.com/file/d/16qmxqP11MpPYHH1ihfjbx9XcL1QYBSVm/view?usp=sharing</a:t>
+              <a:t>https://drive.google.com/file/d/1VPKu_8jVQDIYuchmSw_D6hoB72iISXag/view?usp=sharing</a:t>
             </a:r>
             <a:endParaRPr lang="en-US" sz="900" dirty="0"/>
           </a:p>
@@ -4537,6 +4622,426 @@
 </file>
 
 <file path=ppt/slides/slide11.xml><?xml version="1.0" encoding="utf-8"?>
+<p:sld xmlns:a="http://schemas.openxmlformats.org/drawingml/2006/main" xmlns:r="http://schemas.openxmlformats.org/officeDocument/2006/relationships" xmlns:p="http://schemas.openxmlformats.org/presentationml/2006/main">
+  <p:cSld>
+    <p:bg>
+      <p:bgPr>
+        <a:solidFill>
+          <a:srgbClr val="FFFFFF"/>
+        </a:solidFill>
+        <a:effectLst/>
+      </p:bgPr>
+    </p:bg>
+    <p:spTree>
+      <p:nvGrpSpPr>
+        <p:cNvPr id="1" name=""/>
+        <p:cNvGrpSpPr/>
+        <p:nvPr/>
+      </p:nvGrpSpPr>
+      <p:grpSpPr>
+        <a:xfrm>
+          <a:off x="0" y="0"/>
+          <a:ext cx="0" cy="0"/>
+          <a:chOff x="0" y="0"/>
+          <a:chExt cx="0" cy="0"/>
+        </a:xfrm>
+      </p:grpSpPr>
+      <p:sp>
+        <p:nvSpPr>
+          <p:cNvPr id="4" name="Text 2"/>
+          <p:cNvSpPr/>
+          <p:nvPr/>
+        </p:nvSpPr>
+        <p:spPr>
+          <a:xfrm>
+            <a:off x="130351" y="612064"/>
+            <a:ext cx="8229600" cy="438912"/>
+          </a:xfrm>
+          <a:prstGeom prst="rect">
+            <a:avLst/>
+          </a:prstGeom>
+          <a:noFill/>
+          <a:ln/>
+        </p:spPr>
+        <p:txBody>
+          <a:bodyPr wrap="square" rtlCol="0" anchor="ctr"/>
+          <a:lstStyle/>
+          <a:p>
+            <a:pPr marL="0" indent="0">
+              <a:buNone/>
+            </a:pPr>
+            <a:r>
+              <a:rPr lang="en-US" sz="2000" b="1" dirty="0">
+                <a:solidFill>
+                  <a:srgbClr val="1B3A8A"/>
+                </a:solidFill>
+                <a:latin typeface="Lato" panose="020F0502020204030203" pitchFamily="34" charset="0"/>
+                <a:ea typeface="Calibri" pitchFamily="34" charset="-122"/>
+                <a:cs typeface="Arial" panose="020B0604020202020204" pitchFamily="34" charset="0"/>
+              </a:rPr>
+              <a:t>All links </a:t>
+            </a:r>
+            <a:endParaRPr lang="en-US" sz="2000" dirty="0">
+              <a:latin typeface="Lato" panose="020F0502020204030203" pitchFamily="34" charset="0"/>
+              <a:cs typeface="Arial" panose="020B0604020202020204" pitchFamily="34" charset="0"/>
+            </a:endParaRPr>
+          </a:p>
+        </p:txBody>
+      </p:sp>
+      <p:sp>
+        <p:nvSpPr>
+          <p:cNvPr id="14" name="Text 12"/>
+          <p:cNvSpPr/>
+          <p:nvPr/>
+        </p:nvSpPr>
+        <p:spPr>
+          <a:xfrm>
+            <a:off x="125486" y="1084927"/>
+            <a:ext cx="6247179" cy="3446509"/>
+          </a:xfrm>
+          <a:prstGeom prst="rect">
+            <a:avLst/>
+          </a:prstGeom>
+          <a:noFill/>
+          <a:ln/>
+        </p:spPr>
+        <p:txBody>
+          <a:bodyPr wrap="square" rtlCol="0" anchor="t"/>
+          <a:lstStyle/>
+          <a:p>
+            <a:pPr marL="285750" indent="-285750" algn="just">
+              <a:lnSpc>
+                <a:spcPct val="150000"/>
+              </a:lnSpc>
+              <a:buFont typeface="Wingdings" panose="05000000000000000000" pitchFamily="2" charset="2"/>
+              <a:buChar char="ü"/>
+            </a:pPr>
+            <a:r>
+              <a:rPr lang="en-US" dirty="0">
+                <a:solidFill>
+                  <a:srgbClr val="1A1A2E"/>
+                </a:solidFill>
+                <a:ea typeface="Calibri" pitchFamily="34" charset="-122"/>
+                <a:cs typeface="Arial" panose="020B0604020202020204" pitchFamily="34" charset="0"/>
+              </a:rPr>
+              <a:t>Web application - </a:t>
+            </a:r>
+            <a:r>
+              <a:rPr lang="en-IN" sz="1500" dirty="0">
+                <a:hlinkClick r:id="rId4"/>
+              </a:rPr>
+              <a:t>Pay Lens AI</a:t>
+            </a:r>
+            <a:r>
+              <a:rPr lang="en-US" sz="1500" dirty="0">
+                <a:solidFill>
+                  <a:srgbClr val="1A1A2E"/>
+                </a:solidFill>
+                <a:ea typeface="Calibri" pitchFamily="34" charset="-122"/>
+                <a:cs typeface="Arial" panose="020B0604020202020204" pitchFamily="34" charset="0"/>
+              </a:rPr>
+              <a:t> </a:t>
+            </a:r>
+          </a:p>
+          <a:p>
+            <a:pPr marL="285750" indent="-285750" algn="just">
+              <a:lnSpc>
+                <a:spcPct val="150000"/>
+              </a:lnSpc>
+              <a:buFont typeface="Wingdings" panose="05000000000000000000" pitchFamily="2" charset="2"/>
+              <a:buChar char="ü"/>
+            </a:pPr>
+            <a:r>
+              <a:rPr lang="en-US" dirty="0">
+                <a:solidFill>
+                  <a:srgbClr val="1A1A2E"/>
+                </a:solidFill>
+                <a:ea typeface="Calibri" pitchFamily="34" charset="-122"/>
+                <a:cs typeface="Arial" panose="020B0604020202020204" pitchFamily="34" charset="0"/>
+              </a:rPr>
+              <a:t>Azure portal – </a:t>
+            </a:r>
+            <a:r>
+              <a:rPr lang="en-US" sz="1500" dirty="0">
+                <a:solidFill>
+                  <a:srgbClr val="1A1A2E"/>
+                </a:solidFill>
+                <a:ea typeface="Calibri" pitchFamily="34" charset="-122"/>
+                <a:cs typeface="Arial" panose="020B0604020202020204" pitchFamily="34" charset="0"/>
+                <a:hlinkClick r:id="rId5"/>
+              </a:rPr>
+              <a:t>https://happy-sand-03668880f.7.azurestaticapps.net</a:t>
+            </a:r>
+            <a:endParaRPr lang="en-US" sz="1500" dirty="0">
+              <a:solidFill>
+                <a:srgbClr val="1A1A2E"/>
+              </a:solidFill>
+              <a:ea typeface="Calibri" pitchFamily="34" charset="-122"/>
+              <a:cs typeface="Arial" panose="020B0604020202020204" pitchFamily="34" charset="0"/>
+            </a:endParaRPr>
+          </a:p>
+          <a:p>
+            <a:pPr marL="285750" indent="-285750" algn="just">
+              <a:lnSpc>
+                <a:spcPct val="150000"/>
+              </a:lnSpc>
+              <a:buFont typeface="Wingdings" panose="05000000000000000000" pitchFamily="2" charset="2"/>
+              <a:buChar char="ü"/>
+            </a:pPr>
+            <a:r>
+              <a:rPr lang="en-US" dirty="0">
+                <a:solidFill>
+                  <a:srgbClr val="1A1A2E"/>
+                </a:solidFill>
+                <a:ea typeface="Calibri" pitchFamily="34" charset="-122"/>
+                <a:cs typeface="Arial" panose="020B0604020202020204" pitchFamily="34" charset="0"/>
+              </a:rPr>
+              <a:t>Agent - </a:t>
+            </a:r>
+            <a:r>
+              <a:rPr lang="en-IN" sz="1500" u="sng" dirty="0">
+                <a:solidFill>
+                  <a:srgbClr val="467886"/>
+                </a:solidFill>
+                <a:effectLst/>
+                <a:latin typeface="Aptos" panose="020B0004020202020204" pitchFamily="34" charset="0"/>
+                <a:ea typeface="Aptos" panose="020B0004020202020204" pitchFamily="34" charset="0"/>
+                <a:cs typeface="Times New Roman" panose="02020603050405020304" pitchFamily="18" charset="0"/>
+                <a:hlinkClick r:id="rId6"/>
+              </a:rPr>
+              <a:t>Overview - pay lens _ GPT | Microsoft Copilot Studio</a:t>
+            </a:r>
+            <a:endParaRPr lang="en-US" sz="1500" u="sng" dirty="0">
+              <a:solidFill>
+                <a:srgbClr val="1A1A2E"/>
+              </a:solidFill>
+              <a:effectLst/>
+              <a:latin typeface="Aptos" panose="020B0004020202020204" pitchFamily="34" charset="0"/>
+              <a:ea typeface="Calibri" pitchFamily="34" charset="-122"/>
+              <a:cs typeface="Arial" panose="020B0604020202020204" pitchFamily="34" charset="0"/>
+            </a:endParaRPr>
+          </a:p>
+          <a:p>
+            <a:pPr marL="285750" indent="-285750" algn="just">
+              <a:lnSpc>
+                <a:spcPct val="150000"/>
+              </a:lnSpc>
+              <a:buFont typeface="Wingdings" panose="05000000000000000000" pitchFamily="2" charset="2"/>
+              <a:buChar char="ü"/>
+            </a:pPr>
+            <a:r>
+              <a:rPr lang="en-US" dirty="0">
+                <a:solidFill>
+                  <a:srgbClr val="1A1A2E"/>
+                </a:solidFill>
+                <a:latin typeface="Aptos" panose="020B0004020202020204" pitchFamily="34" charset="0"/>
+                <a:ea typeface="Calibri" pitchFamily="34" charset="-122"/>
+                <a:cs typeface="Arial" panose="020B0604020202020204" pitchFamily="34" charset="0"/>
+              </a:rPr>
+              <a:t>Chatbot - </a:t>
+            </a:r>
+            <a:r>
+              <a:rPr lang="en-IN" sz="1500" u="sng" dirty="0">
+                <a:solidFill>
+                  <a:srgbClr val="467886"/>
+                </a:solidFill>
+                <a:effectLst/>
+                <a:latin typeface="Aptos" panose="020B0004020202020204" pitchFamily="34" charset="0"/>
+                <a:ea typeface="Aptos" panose="020B0004020202020204" pitchFamily="34" charset="0"/>
+                <a:cs typeface="Times New Roman" panose="02020603050405020304" pitchFamily="18" charset="0"/>
+                <a:hlinkClick r:id="rId7"/>
+              </a:rPr>
+              <a:t>Topics - pay lens _ GPT | Microsoft Copilot Studio</a:t>
+            </a:r>
+            <a:endParaRPr lang="en-US" sz="1500" u="sng" dirty="0">
+              <a:solidFill>
+                <a:srgbClr val="1A1A2E"/>
+              </a:solidFill>
+              <a:latin typeface="Aptos" panose="020B0004020202020204" pitchFamily="34" charset="0"/>
+              <a:ea typeface="Calibri" pitchFamily="34" charset="-122"/>
+              <a:cs typeface="Arial" panose="020B0604020202020204" pitchFamily="34" charset="0"/>
+            </a:endParaRPr>
+          </a:p>
+          <a:p>
+            <a:pPr marL="285750" indent="-285750" algn="just">
+              <a:lnSpc>
+                <a:spcPct val="150000"/>
+              </a:lnSpc>
+              <a:buFont typeface="Wingdings" panose="05000000000000000000" pitchFamily="2" charset="2"/>
+              <a:buChar char="ü"/>
+            </a:pPr>
+            <a:r>
+              <a:rPr lang="en-US" dirty="0">
+                <a:solidFill>
+                  <a:srgbClr val="1A1A2E"/>
+                </a:solidFill>
+                <a:latin typeface="Aptos" panose="020B0004020202020204" pitchFamily="34" charset="0"/>
+                <a:ea typeface="Calibri" pitchFamily="34" charset="-122"/>
+                <a:cs typeface="Arial" panose="020B0604020202020204" pitchFamily="34" charset="0"/>
+              </a:rPr>
+              <a:t>Dashboard -</a:t>
+            </a:r>
+            <a:r>
+              <a:rPr lang="en-US" u="sng" dirty="0">
+                <a:solidFill>
+                  <a:srgbClr val="1A1A2E"/>
+                </a:solidFill>
+                <a:latin typeface="Aptos" panose="020B0004020202020204" pitchFamily="34" charset="0"/>
+                <a:ea typeface="Calibri" pitchFamily="34" charset="-122"/>
+                <a:cs typeface="Arial" panose="020B0604020202020204" pitchFamily="34" charset="0"/>
+              </a:rPr>
+              <a:t> </a:t>
+            </a:r>
+            <a:r>
+              <a:rPr lang="en-US" sz="1500" u="sng" dirty="0">
+                <a:solidFill>
+                  <a:srgbClr val="467886"/>
+                </a:solidFill>
+                <a:effectLst/>
+                <a:latin typeface="Aptos" panose="020B0004020202020204" pitchFamily="34" charset="0"/>
+                <a:ea typeface="Aptos" panose="020B0004020202020204" pitchFamily="34" charset="0"/>
+                <a:cs typeface="Times New Roman" panose="02020603050405020304" pitchFamily="18" charset="0"/>
+                <a:hlinkClick r:id="rId8"/>
+              </a:rPr>
+              <a:t>https://app.powerbi.com/reportEmbed?reportId=1a98f1ac-1cd1-4e94-880f-00e0484eec27&amp;autoAuth=true&amp;ctid=aed43286-0f66-47d6-942b-d31a4b8addca</a:t>
+            </a:r>
+            <a:endParaRPr lang="en-US" sz="1500" dirty="0">
+              <a:solidFill>
+                <a:srgbClr val="1A1A2E"/>
+              </a:solidFill>
+              <a:ea typeface="Calibri" pitchFamily="34" charset="-122"/>
+              <a:cs typeface="Arial" panose="020B0604020202020204" pitchFamily="34" charset="0"/>
+            </a:endParaRPr>
+          </a:p>
+          <a:p>
+            <a:pPr marL="285750" indent="-285750" algn="just">
+              <a:lnSpc>
+                <a:spcPct val="150000"/>
+              </a:lnSpc>
+              <a:buFont typeface="Wingdings" panose="05000000000000000000" pitchFamily="2" charset="2"/>
+              <a:buChar char="ü"/>
+            </a:pPr>
+            <a:endParaRPr lang="en-US" dirty="0">
+              <a:solidFill>
+                <a:srgbClr val="1A1A2E"/>
+              </a:solidFill>
+              <a:ea typeface="Calibri" pitchFamily="34" charset="-122"/>
+              <a:cs typeface="Arial" panose="020B0604020202020204" pitchFamily="34" charset="0"/>
+            </a:endParaRPr>
+          </a:p>
+          <a:p>
+            <a:pPr algn="just">
+              <a:lnSpc>
+                <a:spcPct val="150000"/>
+              </a:lnSpc>
+            </a:pPr>
+            <a:endParaRPr lang="en-US" dirty="0">
+              <a:solidFill>
+                <a:srgbClr val="1A1A2E"/>
+              </a:solidFill>
+              <a:ea typeface="Calibri" pitchFamily="34" charset="-122"/>
+              <a:cs typeface="Arial" panose="020B0604020202020204" pitchFamily="34" charset="0"/>
+            </a:endParaRPr>
+          </a:p>
+        </p:txBody>
+      </p:sp>
+      <p:sp>
+        <p:nvSpPr>
+          <p:cNvPr id="19" name="Text 17"/>
+          <p:cNvSpPr/>
+          <p:nvPr/>
+        </p:nvSpPr>
+        <p:spPr>
+          <a:xfrm>
+            <a:off x="5303520" y="3474720"/>
+            <a:ext cx="3017520" cy="502920"/>
+          </a:xfrm>
+          <a:prstGeom prst="rect">
+            <a:avLst/>
+          </a:prstGeom>
+          <a:noFill/>
+          <a:ln/>
+        </p:spPr>
+        <p:txBody>
+          <a:bodyPr wrap="square" rtlCol="0" anchor="ctr"/>
+          <a:lstStyle/>
+          <a:p>
+            <a:pPr marL="0" indent="0" algn="ctr">
+              <a:buNone/>
+            </a:pPr>
+            <a:r>
+              <a:rPr lang="en-US" sz="1600" b="1" kern="0" spc="200" dirty="0">
+                <a:solidFill>
+                  <a:srgbClr val="FFFFFF"/>
+                </a:solidFill>
+                <a:latin typeface="Lato" panose="020F0502020204030203" pitchFamily="34" charset="0"/>
+                <a:ea typeface="Calibri" pitchFamily="34" charset="-122"/>
+                <a:cs typeface="Calibri" pitchFamily="34" charset="-120"/>
+              </a:rPr>
+              <a:t>CONCLUSION</a:t>
+            </a:r>
+            <a:endParaRPr lang="en-US" sz="1600" dirty="0">
+              <a:latin typeface="Lato" panose="020F0502020204030203" pitchFamily="34" charset="0"/>
+            </a:endParaRPr>
+          </a:p>
+        </p:txBody>
+      </p:sp>
+      <p:pic>
+        <p:nvPicPr>
+          <p:cNvPr id="20" name="Picture 19" descr="A blue circle with a pencil and paper with a star on it&#10;&#10;AI-generated content may be incorrect.">
+            <a:extLst>
+              <a:ext uri="{FF2B5EF4-FFF2-40B4-BE49-F238E27FC236}">
+                <a16:creationId xmlns:a16="http://schemas.microsoft.com/office/drawing/2014/main" id="{BAE68F53-65EE-1751-E92D-7025D978B68E}"/>
+              </a:ext>
+            </a:extLst>
+          </p:cNvPr>
+          <p:cNvPicPr>
+            <a:picLocks noChangeAspect="1"/>
+          </p:cNvPicPr>
+          <p:nvPr/>
+        </p:nvPicPr>
+        <p:blipFill>
+          <a:blip r:embed="rId9">
+            <a:duotone>
+              <a:schemeClr val="accent1">
+                <a:shade val="45000"/>
+                <a:satMod val="135000"/>
+              </a:schemeClr>
+              <a:prstClr val="white"/>
+            </a:duotone>
+          </a:blip>
+          <a:srcRect l="25397" t="26296" r="26825" b="29752"/>
+          <a:stretch>
+            <a:fillRect/>
+          </a:stretch>
+        </p:blipFill>
+        <p:spPr>
+          <a:xfrm>
+            <a:off x="6542304" y="1475845"/>
+            <a:ext cx="2382621" cy="2191809"/>
+          </a:xfrm>
+          <a:prstGeom prst="rect">
+            <a:avLst/>
+          </a:prstGeom>
+        </p:spPr>
+      </p:pic>
+    </p:spTree>
+    <p:custDataLst>
+      <p:tags r:id="rId1"/>
+    </p:custDataLst>
+    <p:extLst>
+      <p:ext uri="{BB962C8B-B14F-4D97-AF65-F5344CB8AC3E}">
+        <p14:creationId xmlns:p14="http://schemas.microsoft.com/office/powerpoint/2010/main" val="1510213068"/>
+      </p:ext>
+    </p:extLst>
+  </p:cSld>
+  <p:clrMapOvr>
+    <a:masterClrMapping/>
+  </p:clrMapOvr>
+</p:sld>
+</file>
+
+<file path=ppt/slides/slide12.xml><?xml version="1.0" encoding="utf-8"?>
 <p:sld xmlns:a="http://schemas.openxmlformats.org/drawingml/2006/main" xmlns:r="http://schemas.openxmlformats.org/officeDocument/2006/relationships" xmlns:p="http://schemas.openxmlformats.org/presentationml/2006/main">
   <p:cSld name="Slide 9">
     <p:bg>
@@ -4612,7 +5117,7 @@
         <p:spPr>
           <a:xfrm>
             <a:off x="125486" y="1084927"/>
-            <a:ext cx="4446513" cy="3474720"/>
+            <a:ext cx="4721859" cy="3446509"/>
           </a:xfrm>
           <a:prstGeom prst="rect">
             <a:avLst/>
@@ -4735,6 +5240,25 @@
                 <a:cs typeface="Arial" panose="020B0604020202020204" pitchFamily="34" charset="0"/>
               </a:rPr>
               <a:t>Bridging transparency – skill - Analytical Gap.</a:t>
+            </a:r>
+          </a:p>
+          <a:p>
+            <a:pPr marL="285750" indent="-285750" algn="just">
+              <a:lnSpc>
+                <a:spcPct val="150000"/>
+              </a:lnSpc>
+              <a:buFont typeface="Wingdings" panose="05000000000000000000" pitchFamily="2" charset="2"/>
+              <a:buChar char="ü"/>
+            </a:pPr>
+            <a:r>
+              <a:rPr lang="en-US" dirty="0">
+                <a:solidFill>
+                  <a:srgbClr val="1A1A2E"/>
+                </a:solidFill>
+                <a:ea typeface="Calibri" pitchFamily="34" charset="-122"/>
+                <a:cs typeface="Arial" panose="020B0604020202020204" pitchFamily="34" charset="0"/>
+              </a:rPr>
+              <a:t>Extension of live pay correction simulator </a:t>
             </a:r>
             <a:endParaRPr lang="en-US" dirty="0">
               <a:cs typeface="Arial" panose="020B0604020202020204" pitchFamily="34" charset="0"/>
@@ -4814,271 +5338,8 @@
         </p:blipFill>
         <p:spPr>
           <a:xfrm>
-            <a:off x="4898406" y="971550"/>
-            <a:ext cx="3597456" cy="3309355"/>
-          </a:xfrm>
-          <a:prstGeom prst="rect">
-            <a:avLst/>
-          </a:prstGeom>
-        </p:spPr>
-      </p:pic>
-    </p:spTree>
-    <p:custDataLst>
-      <p:tags r:id="rId1"/>
-    </p:custDataLst>
-  </p:cSld>
-  <p:clrMapOvr>
-    <a:masterClrMapping/>
-  </p:clrMapOvr>
-</p:sld>
-</file>
-
-<file path=ppt/slides/slide12.xml><?xml version="1.0" encoding="utf-8"?>
-<p:sld xmlns:a="http://schemas.openxmlformats.org/drawingml/2006/main" xmlns:r="http://schemas.openxmlformats.org/officeDocument/2006/relationships" xmlns:p="http://schemas.openxmlformats.org/presentationml/2006/main">
-  <p:cSld name="Slide 10">
-    <p:spTree>
-      <p:nvGrpSpPr>
-        <p:cNvPr id="1" name=""/>
-        <p:cNvGrpSpPr/>
-        <p:nvPr/>
-      </p:nvGrpSpPr>
-      <p:grpSpPr>
-        <a:xfrm>
-          <a:off x="0" y="0"/>
-          <a:ext cx="0" cy="0"/>
-          <a:chOff x="0" y="0"/>
-          <a:chExt cx="0" cy="0"/>
-        </a:xfrm>
-      </p:grpSpPr>
-      <p:sp>
-        <p:nvSpPr>
-          <p:cNvPr id="4" name="Text 2"/>
-          <p:cNvSpPr/>
-          <p:nvPr/>
-        </p:nvSpPr>
-        <p:spPr>
-          <a:xfrm>
-            <a:off x="123247" y="613561"/>
-            <a:ext cx="8229600" cy="438912"/>
-          </a:xfrm>
-          <a:prstGeom prst="rect">
-            <a:avLst/>
-          </a:prstGeom>
-          <a:noFill/>
-          <a:ln/>
-        </p:spPr>
-        <p:txBody>
-          <a:bodyPr wrap="square" rtlCol="0" anchor="ctr"/>
-          <a:lstStyle/>
-          <a:p>
-            <a:pPr marL="0" indent="0">
-              <a:buNone/>
-            </a:pPr>
-            <a:r>
-              <a:rPr lang="en-US" sz="2000" b="1" dirty="0">
-                <a:solidFill>
-                  <a:srgbClr val="1B3A8A"/>
-                </a:solidFill>
-                <a:latin typeface="Lato" panose="020F0502020204030203" pitchFamily="34" charset="0"/>
-                <a:ea typeface="Calibri" pitchFamily="34" charset="-122"/>
-                <a:cs typeface="Arial" panose="020B0604020202020204" pitchFamily="34" charset="0"/>
-              </a:rPr>
-              <a:t>Future Scope</a:t>
-            </a:r>
-            <a:endParaRPr lang="en-US" sz="2000" dirty="0">
-              <a:latin typeface="Lato" panose="020F0502020204030203" pitchFamily="34" charset="0"/>
-              <a:cs typeface="Arial" panose="020B0604020202020204" pitchFamily="34" charset="0"/>
-            </a:endParaRPr>
-          </a:p>
-        </p:txBody>
-      </p:sp>
-      <p:sp>
-        <p:nvSpPr>
-          <p:cNvPr id="14" name="Text 12"/>
-          <p:cNvSpPr/>
-          <p:nvPr/>
-        </p:nvSpPr>
-        <p:spPr>
-          <a:xfrm>
-            <a:off x="123247" y="1082104"/>
-            <a:ext cx="5116968" cy="3595404"/>
-          </a:xfrm>
-          <a:prstGeom prst="rect">
-            <a:avLst/>
-          </a:prstGeom>
-          <a:noFill/>
-          <a:ln/>
-        </p:spPr>
-        <p:txBody>
-          <a:bodyPr wrap="square" rtlCol="0" anchor="t"/>
-          <a:lstStyle/>
-          <a:p>
-            <a:pPr marL="285750" indent="-285750" algn="just">
-              <a:lnSpc>
-                <a:spcPct val="150000"/>
-              </a:lnSpc>
-              <a:buFont typeface="Wingdings" panose="05000000000000000000" pitchFamily="2" charset="2"/>
-              <a:buChar char="ü"/>
-            </a:pPr>
-            <a:r>
-              <a:rPr lang="en-US" dirty="0">
-                <a:cs typeface="Times New Roman" panose="02020603050405020304" pitchFamily="18" charset="0"/>
-              </a:rPr>
-              <a:t>Extend solution to SMEs, startups, and educational institutions for payroll transparency.</a:t>
-            </a:r>
-          </a:p>
-          <a:p>
-            <a:pPr marL="285750" indent="-285750" algn="just">
-              <a:lnSpc>
-                <a:spcPct val="150000"/>
-              </a:lnSpc>
-              <a:buFont typeface="Wingdings" panose="05000000000000000000" pitchFamily="2" charset="2"/>
-              <a:buChar char="ü"/>
-            </a:pPr>
-            <a:r>
-              <a:rPr lang="en-US" dirty="0">
-                <a:cs typeface="Times New Roman" panose="02020603050405020304" pitchFamily="18" charset="0"/>
-              </a:rPr>
-              <a:t>Excel through Macros and VBA and power Query enabled</a:t>
-            </a:r>
-            <a:r>
-              <a:rPr lang="en-US" dirty="0">
-                <a:latin typeface="Times New Roman" panose="02020603050405020304" pitchFamily="18" charset="0"/>
-                <a:cs typeface="Times New Roman" panose="02020603050405020304" pitchFamily="18" charset="0"/>
-              </a:rPr>
-              <a:t>.</a:t>
-            </a:r>
-          </a:p>
-          <a:p>
-            <a:pPr marL="285750" indent="-285750" algn="just">
-              <a:lnSpc>
-                <a:spcPct val="150000"/>
-              </a:lnSpc>
-              <a:buFont typeface="Wingdings" panose="05000000000000000000" pitchFamily="2" charset="2"/>
-              <a:buChar char="ü"/>
-            </a:pPr>
-            <a:r>
-              <a:rPr lang="en-IN" dirty="0">
-                <a:cs typeface="Times New Roman" panose="02020603050405020304" pitchFamily="18" charset="0"/>
-              </a:rPr>
-              <a:t>Real-Time Data Integration</a:t>
-            </a:r>
-            <a:endParaRPr lang="en-US" dirty="0">
-              <a:solidFill>
-                <a:srgbClr val="1A1A2E"/>
-              </a:solidFill>
-              <a:ea typeface="Calibri" pitchFamily="34" charset="-122"/>
-              <a:cs typeface="Times New Roman" panose="02020603050405020304" pitchFamily="18" charset="0"/>
-            </a:endParaRPr>
-          </a:p>
-          <a:p>
-            <a:pPr marL="285750" indent="-285750" algn="just">
-              <a:lnSpc>
-                <a:spcPct val="150000"/>
-              </a:lnSpc>
-              <a:buFont typeface="Wingdings" panose="05000000000000000000" pitchFamily="2" charset="2"/>
-              <a:buChar char="ü"/>
-            </a:pPr>
-            <a:r>
-              <a:rPr lang="en-US" dirty="0">
-                <a:cs typeface="Times New Roman" panose="02020603050405020304" pitchFamily="18" charset="0"/>
-              </a:rPr>
-              <a:t>Predictive Analytics </a:t>
-            </a:r>
-            <a:endParaRPr lang="en-US" dirty="0">
-              <a:solidFill>
-                <a:srgbClr val="1A1A2E"/>
-              </a:solidFill>
-              <a:ea typeface="Calibri" pitchFamily="34" charset="-122"/>
-              <a:cs typeface="Times New Roman" panose="02020603050405020304" pitchFamily="18" charset="0"/>
-            </a:endParaRPr>
-          </a:p>
-          <a:p>
-            <a:pPr marL="285750" indent="-285750" algn="just">
-              <a:lnSpc>
-                <a:spcPct val="150000"/>
-              </a:lnSpc>
-              <a:buFont typeface="Wingdings" panose="05000000000000000000" pitchFamily="2" charset="2"/>
-              <a:buChar char="ü"/>
-            </a:pPr>
-            <a:r>
-              <a:rPr lang="en-US" dirty="0">
-                <a:cs typeface="Times New Roman" panose="02020603050405020304" pitchFamily="18" charset="0"/>
-              </a:rPr>
-              <a:t>Mobile App Interface</a:t>
-            </a:r>
-          </a:p>
-          <a:p>
-            <a:pPr marL="285750" indent="-285750" algn="just">
-              <a:lnSpc>
-                <a:spcPct val="150000"/>
-              </a:lnSpc>
-              <a:buFont typeface="Wingdings" panose="05000000000000000000" pitchFamily="2" charset="2"/>
-              <a:buChar char="ü"/>
-            </a:pPr>
-            <a:r>
-              <a:rPr lang="en-US" dirty="0">
-                <a:cs typeface="Times New Roman" panose="02020603050405020304" pitchFamily="18" charset="0"/>
-              </a:rPr>
-              <a:t>Multilingual Support</a:t>
-            </a:r>
-          </a:p>
-          <a:p>
-            <a:pPr marL="285750" indent="-285750" algn="just">
-              <a:lnSpc>
-                <a:spcPct val="150000"/>
-              </a:lnSpc>
-              <a:buFont typeface="Wingdings" panose="05000000000000000000" pitchFamily="2" charset="2"/>
-              <a:buChar char="ü"/>
-            </a:pPr>
-            <a:r>
-              <a:rPr lang="en-US" dirty="0">
-                <a:cs typeface="Times New Roman" panose="02020603050405020304" pitchFamily="18" charset="0"/>
-              </a:rPr>
-              <a:t>Automated Benchmarking</a:t>
-            </a:r>
-          </a:p>
-          <a:p>
-            <a:pPr marL="0" indent="0">
-              <a:buNone/>
-            </a:pPr>
-            <a:endParaRPr lang="en-US" dirty="0">
-              <a:latin typeface="Lato" panose="020F0502020204030203" pitchFamily="34" charset="0"/>
-              <a:cs typeface="Arial" panose="020B0604020202020204" pitchFamily="34" charset="0"/>
-            </a:endParaRPr>
-          </a:p>
-        </p:txBody>
-      </p:sp>
-      <p:pic>
-        <p:nvPicPr>
-          <p:cNvPr id="2" name="Picture 1">
-            <a:extLst>
-              <a:ext uri="{FF2B5EF4-FFF2-40B4-BE49-F238E27FC236}">
-                <a16:creationId xmlns:a16="http://schemas.microsoft.com/office/drawing/2014/main" id="{412449DB-BF51-DAAE-EA83-F4C008967631}"/>
-              </a:ext>
-            </a:extLst>
-          </p:cNvPr>
-          <p:cNvPicPr>
-            <a:picLocks noChangeAspect="1"/>
-          </p:cNvPicPr>
-          <p:nvPr/>
-        </p:nvPicPr>
-        <p:blipFill>
-          <a:blip r:embed="rId4">
-            <a:extLst>
-              <a:ext uri="{28A0092B-C50C-407E-A947-70E740481C1C}">
-                <a14:useLocalDpi xmlns:a14="http://schemas.microsoft.com/office/drawing/2010/main" val="0"/>
-              </a:ext>
-            </a:extLst>
-          </a:blip>
-          <a:stretch>
-            <a:fillRect/>
-          </a:stretch>
-        </p:blipFill>
-        <p:spPr>
-          <a:xfrm>
-            <a:off x="5456431" y="1498209"/>
-            <a:ext cx="3687569" cy="2765677"/>
+            <a:off x="5515236" y="1050976"/>
+            <a:ext cx="3261979" cy="3000745"/>
           </a:xfrm>
           <a:prstGeom prst="rect">
             <a:avLst/>
@@ -5097,6 +5358,269 @@
 </file>
 
 <file path=ppt/slides/slide13.xml><?xml version="1.0" encoding="utf-8"?>
+<p:sld xmlns:a="http://schemas.openxmlformats.org/drawingml/2006/main" xmlns:r="http://schemas.openxmlformats.org/officeDocument/2006/relationships" xmlns:p="http://schemas.openxmlformats.org/presentationml/2006/main">
+  <p:cSld name="Slide 10">
+    <p:spTree>
+      <p:nvGrpSpPr>
+        <p:cNvPr id="1" name=""/>
+        <p:cNvGrpSpPr/>
+        <p:nvPr/>
+      </p:nvGrpSpPr>
+      <p:grpSpPr>
+        <a:xfrm>
+          <a:off x="0" y="0"/>
+          <a:ext cx="0" cy="0"/>
+          <a:chOff x="0" y="0"/>
+          <a:chExt cx="0" cy="0"/>
+        </a:xfrm>
+      </p:grpSpPr>
+      <p:sp>
+        <p:nvSpPr>
+          <p:cNvPr id="4" name="Text 2"/>
+          <p:cNvSpPr/>
+          <p:nvPr/>
+        </p:nvSpPr>
+        <p:spPr>
+          <a:xfrm>
+            <a:off x="123247" y="613561"/>
+            <a:ext cx="8229600" cy="438912"/>
+          </a:xfrm>
+          <a:prstGeom prst="rect">
+            <a:avLst/>
+          </a:prstGeom>
+          <a:noFill/>
+          <a:ln/>
+        </p:spPr>
+        <p:txBody>
+          <a:bodyPr wrap="square" rtlCol="0" anchor="ctr"/>
+          <a:lstStyle/>
+          <a:p>
+            <a:pPr marL="0" indent="0">
+              <a:buNone/>
+            </a:pPr>
+            <a:r>
+              <a:rPr lang="en-US" sz="2000" b="1" dirty="0">
+                <a:solidFill>
+                  <a:srgbClr val="1B3A8A"/>
+                </a:solidFill>
+                <a:latin typeface="Lato" panose="020F0502020204030203" pitchFamily="34" charset="0"/>
+                <a:ea typeface="Calibri" pitchFamily="34" charset="-122"/>
+                <a:cs typeface="Arial" panose="020B0604020202020204" pitchFamily="34" charset="0"/>
+              </a:rPr>
+              <a:t>Future Scope</a:t>
+            </a:r>
+            <a:endParaRPr lang="en-US" sz="2000" dirty="0">
+              <a:latin typeface="Lato" panose="020F0502020204030203" pitchFamily="34" charset="0"/>
+              <a:cs typeface="Arial" panose="020B0604020202020204" pitchFamily="34" charset="0"/>
+            </a:endParaRPr>
+          </a:p>
+        </p:txBody>
+      </p:sp>
+      <p:sp>
+        <p:nvSpPr>
+          <p:cNvPr id="14" name="Text 12"/>
+          <p:cNvSpPr/>
+          <p:nvPr/>
+        </p:nvSpPr>
+        <p:spPr>
+          <a:xfrm>
+            <a:off x="123246" y="1082104"/>
+            <a:ext cx="4969259" cy="3714979"/>
+          </a:xfrm>
+          <a:prstGeom prst="rect">
+            <a:avLst/>
+          </a:prstGeom>
+          <a:noFill/>
+          <a:ln/>
+        </p:spPr>
+        <p:txBody>
+          <a:bodyPr wrap="square" rtlCol="0" anchor="t"/>
+          <a:lstStyle/>
+          <a:p>
+            <a:pPr marL="285750" indent="-285750" algn="just">
+              <a:lnSpc>
+                <a:spcPct val="150000"/>
+              </a:lnSpc>
+              <a:buFont typeface="Wingdings" panose="05000000000000000000" pitchFamily="2" charset="2"/>
+              <a:buChar char="ü"/>
+            </a:pPr>
+            <a:r>
+              <a:rPr lang="en-US" dirty="0">
+                <a:cs typeface="Times New Roman" panose="02020603050405020304" pitchFamily="18" charset="0"/>
+              </a:rPr>
+              <a:t>Extend solution to SMEs, startups, and educational institutions for payroll transparency.</a:t>
+            </a:r>
+          </a:p>
+          <a:p>
+            <a:pPr marL="285750" indent="-285750" algn="just">
+              <a:lnSpc>
+                <a:spcPct val="150000"/>
+              </a:lnSpc>
+              <a:buFont typeface="Wingdings" panose="05000000000000000000" pitchFamily="2" charset="2"/>
+              <a:buChar char="ü"/>
+            </a:pPr>
+            <a:r>
+              <a:rPr lang="en-US" dirty="0">
+                <a:cs typeface="Times New Roman" panose="02020603050405020304" pitchFamily="18" charset="0"/>
+              </a:rPr>
+              <a:t>Excel through Macros and VBA and power Query enabled</a:t>
+            </a:r>
+            <a:r>
+              <a:rPr lang="en-US" dirty="0">
+                <a:latin typeface="Times New Roman" panose="02020603050405020304" pitchFamily="18" charset="0"/>
+                <a:cs typeface="Times New Roman" panose="02020603050405020304" pitchFamily="18" charset="0"/>
+              </a:rPr>
+              <a:t>.</a:t>
+            </a:r>
+          </a:p>
+          <a:p>
+            <a:pPr marL="285750" indent="-285750" algn="just">
+              <a:lnSpc>
+                <a:spcPct val="150000"/>
+              </a:lnSpc>
+              <a:buFont typeface="Wingdings" panose="05000000000000000000" pitchFamily="2" charset="2"/>
+              <a:buChar char="ü"/>
+            </a:pPr>
+            <a:r>
+              <a:rPr lang="en-IN" dirty="0">
+                <a:cs typeface="Times New Roman" panose="02020603050405020304" pitchFamily="18" charset="0"/>
+              </a:rPr>
+              <a:t>Real-Time Data Integration</a:t>
+            </a:r>
+            <a:endParaRPr lang="en-US" dirty="0">
+              <a:solidFill>
+                <a:srgbClr val="1A1A2E"/>
+              </a:solidFill>
+              <a:ea typeface="Calibri" pitchFamily="34" charset="-122"/>
+              <a:cs typeface="Times New Roman" panose="02020603050405020304" pitchFamily="18" charset="0"/>
+            </a:endParaRPr>
+          </a:p>
+          <a:p>
+            <a:pPr marL="285750" indent="-285750" algn="just">
+              <a:lnSpc>
+                <a:spcPct val="150000"/>
+              </a:lnSpc>
+              <a:buFont typeface="Wingdings" panose="05000000000000000000" pitchFamily="2" charset="2"/>
+              <a:buChar char="ü"/>
+            </a:pPr>
+            <a:r>
+              <a:rPr lang="en-US" dirty="0">
+                <a:cs typeface="Times New Roman" panose="02020603050405020304" pitchFamily="18" charset="0"/>
+              </a:rPr>
+              <a:t>Predictive Analytics </a:t>
+            </a:r>
+            <a:endParaRPr lang="en-US" dirty="0">
+              <a:solidFill>
+                <a:srgbClr val="1A1A2E"/>
+              </a:solidFill>
+              <a:ea typeface="Calibri" pitchFamily="34" charset="-122"/>
+              <a:cs typeface="Times New Roman" panose="02020603050405020304" pitchFamily="18" charset="0"/>
+            </a:endParaRPr>
+          </a:p>
+          <a:p>
+            <a:pPr marL="285750" indent="-285750" algn="just">
+              <a:lnSpc>
+                <a:spcPct val="150000"/>
+              </a:lnSpc>
+              <a:buFont typeface="Wingdings" panose="05000000000000000000" pitchFamily="2" charset="2"/>
+              <a:buChar char="ü"/>
+            </a:pPr>
+            <a:r>
+              <a:rPr lang="en-US" dirty="0">
+                <a:cs typeface="Times New Roman" panose="02020603050405020304" pitchFamily="18" charset="0"/>
+              </a:rPr>
+              <a:t>Mobile App Interface</a:t>
+            </a:r>
+          </a:p>
+          <a:p>
+            <a:pPr marL="285750" indent="-285750" algn="just">
+              <a:lnSpc>
+                <a:spcPct val="150000"/>
+              </a:lnSpc>
+              <a:buFont typeface="Wingdings" panose="05000000000000000000" pitchFamily="2" charset="2"/>
+              <a:buChar char="ü"/>
+            </a:pPr>
+            <a:r>
+              <a:rPr lang="en-US" dirty="0">
+                <a:cs typeface="Times New Roman" panose="02020603050405020304" pitchFamily="18" charset="0"/>
+              </a:rPr>
+              <a:t>Multilingual Support</a:t>
+            </a:r>
+          </a:p>
+          <a:p>
+            <a:pPr marL="285750" indent="-285750" algn="just">
+              <a:lnSpc>
+                <a:spcPct val="150000"/>
+              </a:lnSpc>
+              <a:buFont typeface="Wingdings" panose="05000000000000000000" pitchFamily="2" charset="2"/>
+              <a:buChar char="ü"/>
+            </a:pPr>
+            <a:r>
+              <a:rPr lang="en-US" dirty="0">
+                <a:cs typeface="Times New Roman" panose="02020603050405020304" pitchFamily="18" charset="0"/>
+              </a:rPr>
+              <a:t>Automated Benchmarking</a:t>
+            </a:r>
+          </a:p>
+          <a:p>
+            <a:pPr marL="0" indent="0">
+              <a:buNone/>
+            </a:pPr>
+            <a:endParaRPr lang="en-US" dirty="0">
+              <a:latin typeface="Lato" panose="020F0502020204030203" pitchFamily="34" charset="0"/>
+              <a:cs typeface="Arial" panose="020B0604020202020204" pitchFamily="34" charset="0"/>
+            </a:endParaRPr>
+          </a:p>
+        </p:txBody>
+      </p:sp>
+      <p:pic>
+        <p:nvPicPr>
+          <p:cNvPr id="2" name="Picture 1">
+            <a:extLst>
+              <a:ext uri="{FF2B5EF4-FFF2-40B4-BE49-F238E27FC236}">
+                <a16:creationId xmlns:a16="http://schemas.microsoft.com/office/drawing/2014/main" id="{412449DB-BF51-DAAE-EA83-F4C008967631}"/>
+              </a:ext>
+            </a:extLst>
+          </p:cNvPr>
+          <p:cNvPicPr>
+            <a:picLocks noChangeAspect="1"/>
+          </p:cNvPicPr>
+          <p:nvPr/>
+        </p:nvPicPr>
+        <p:blipFill>
+          <a:blip r:embed="rId4">
+            <a:extLst>
+              <a:ext uri="{28A0092B-C50C-407E-A947-70E740481C1C}">
+                <a14:useLocalDpi xmlns:a14="http://schemas.microsoft.com/office/drawing/2010/main" val="0"/>
+              </a:ext>
+            </a:extLst>
+          </a:blip>
+          <a:stretch>
+            <a:fillRect/>
+          </a:stretch>
+        </p:blipFill>
+        <p:spPr>
+          <a:xfrm>
+            <a:off x="5597108" y="1647311"/>
+            <a:ext cx="3423645" cy="2567734"/>
+          </a:xfrm>
+          <a:prstGeom prst="rect">
+            <a:avLst/>
+          </a:prstGeom>
+        </p:spPr>
+      </p:pic>
+    </p:spTree>
+    <p:custDataLst>
+      <p:tags r:id="rId1"/>
+    </p:custDataLst>
+  </p:cSld>
+  <p:clrMapOvr>
+    <a:masterClrMapping/>
+  </p:clrMapOvr>
+</p:sld>
+</file>
+
+<file path=ppt/slides/slide14.xml><?xml version="1.0" encoding="utf-8"?>
 <p:sld xmlns:a="http://schemas.openxmlformats.org/drawingml/2006/main" xmlns:r="http://schemas.openxmlformats.org/officeDocument/2006/relationships" xmlns:p="http://schemas.openxmlformats.org/presentationml/2006/main">
   <p:cSld name="Slide 11">
     <p:bg>
@@ -5664,8 +6188,8 @@
         </p:nvSpPr>
         <p:spPr>
           <a:xfrm>
-            <a:off x="125239" y="1082801"/>
-            <a:ext cx="5607345" cy="4206280"/>
+            <a:off x="125239" y="884107"/>
+            <a:ext cx="6170053" cy="4206280"/>
           </a:xfrm>
           <a:prstGeom prst="rect">
             <a:avLst/>
@@ -5783,7 +6307,21 @@
                 <a:ea typeface="+mn-lt"/>
                 <a:cs typeface="Arial" panose="020B0604020202020204" pitchFamily="34" charset="0"/>
               </a:rPr>
-              <a:t>Tools – excel, power BI, copilot studio, AI assistant.</a:t>
+              <a:t>Tools – excel, power BI, copilot studio, AI assistant, </a:t>
+            </a:r>
+            <a:r>
+              <a:rPr lang="en-US" dirty="0" err="1">
+                <a:ea typeface="+mn-lt"/>
+                <a:cs typeface="Arial" panose="020B0604020202020204" pitchFamily="34" charset="0"/>
+              </a:rPr>
+              <a:t>streamlit</a:t>
+            </a:r>
+            <a:r>
+              <a:rPr lang="en-US" dirty="0">
+                <a:ea typeface="+mn-lt"/>
+                <a:cs typeface="Arial" panose="020B0604020202020204" pitchFamily="34" charset="0"/>
+              </a:rPr>
+              <a:t>. </a:t>
             </a:r>
           </a:p>
           <a:p>
@@ -5877,8 +6415,8 @@
         </p:nvSpPr>
         <p:spPr>
           <a:xfrm>
-            <a:off x="6675119" y="1174653"/>
-            <a:ext cx="2132193" cy="2430166"/>
+            <a:off x="6984608" y="1409420"/>
+            <a:ext cx="1921177" cy="2324659"/>
           </a:xfrm>
           <a:custGeom>
             <a:avLst/>
@@ -6986,6 +7524,48 @@
               <a:buFont typeface="Wingdings" panose="05000000000000000000" pitchFamily="2" charset="2"/>
               <a:buChar char="ü"/>
             </a:pPr>
+            <a:r>
+              <a:rPr lang="en-US" dirty="0">
+                <a:solidFill>
+                  <a:srgbClr val="1A1A2E"/>
+                </a:solidFill>
+                <a:latin typeface="Lato" panose="020F0502020204030203" pitchFamily="34" charset="0"/>
+                <a:ea typeface="Calibri" pitchFamily="34" charset="-122"/>
+                <a:cs typeface="Arial" panose="020B0604020202020204" pitchFamily="34" charset="0"/>
+              </a:rPr>
+              <a:t>Extension of Web application using </a:t>
+            </a:r>
+            <a:r>
+              <a:rPr lang="en-US" dirty="0" err="1">
+                <a:solidFill>
+                  <a:srgbClr val="1A1A2E"/>
+                </a:solidFill>
+                <a:latin typeface="Lato" panose="020F0502020204030203" pitchFamily="34" charset="0"/>
+                <a:ea typeface="Calibri" pitchFamily="34" charset="-122"/>
+                <a:cs typeface="Arial" panose="020B0604020202020204" pitchFamily="34" charset="0"/>
+              </a:rPr>
+              <a:t>streamlit</a:t>
+            </a:r>
+            <a:r>
+              <a:rPr lang="en-US" dirty="0">
+                <a:solidFill>
+                  <a:srgbClr val="1A1A2E"/>
+                </a:solidFill>
+                <a:latin typeface="Lato" panose="020F0502020204030203" pitchFamily="34" charset="0"/>
+                <a:ea typeface="Calibri" pitchFamily="34" charset="-122"/>
+                <a:cs typeface="Arial" panose="020B0604020202020204" pitchFamily="34" charset="0"/>
+              </a:rPr>
+              <a:t>. </a:t>
+            </a:r>
+          </a:p>
+          <a:p>
+            <a:pPr marL="285750" indent="-285750" algn="just">
+              <a:lnSpc>
+                <a:spcPct val="150000"/>
+              </a:lnSpc>
+              <a:buFont typeface="Wingdings" panose="05000000000000000000" pitchFamily="2" charset="2"/>
+              <a:buChar char="ü"/>
+            </a:pPr>
             <a:endParaRPr lang="en-US" dirty="0">
               <a:solidFill>
                 <a:srgbClr val="1A1A2E"/>
@@ -7089,10 +7669,10 @@
       </p:sp>
       <p:pic>
         <p:nvPicPr>
-          <p:cNvPr id="6" name="Picture 5">
+          <p:cNvPr id="5" name="Picture 4">
             <a:extLst>
               <a:ext uri="{FF2B5EF4-FFF2-40B4-BE49-F238E27FC236}">
-                <a16:creationId xmlns:a16="http://schemas.microsoft.com/office/drawing/2014/main" id="{0D987A8D-374B-7068-C481-8AA923513684}"/>
+                <a16:creationId xmlns:a16="http://schemas.microsoft.com/office/drawing/2014/main" id="{20109F65-47FD-C027-04F8-7B06CEAAE976}"/>
               </a:ext>
             </a:extLst>
           </p:cNvPr>
@@ -7109,8 +7689,8 @@
         </p:blipFill>
         <p:spPr>
           <a:xfrm>
-            <a:off x="1125414" y="1041832"/>
-            <a:ext cx="6499349" cy="3547985"/>
+            <a:off x="801858" y="1137223"/>
+            <a:ext cx="7119998" cy="3230795"/>
           </a:xfrm>
           <a:prstGeom prst="rect">
             <a:avLst/>
@@ -7838,6 +8418,12 @@
 </file>
 
 <file path=ppt/tags/tag16.xml><?xml version="1.0" encoding="utf-8"?>
+<p:tagLst xmlns:a="http://schemas.openxmlformats.org/drawingml/2006/main" xmlns:r="http://schemas.openxmlformats.org/officeDocument/2006/relationships" xmlns:p="http://schemas.openxmlformats.org/presentationml/2006/main">
+  <p:tag name="ARTICULATE_SLIDE_THUMBNAIL_REFRESH" val="1"/>
+</p:tagLst>
+</file>
+
+<file path=ppt/tags/tag17.xml><?xml version="1.0" encoding="utf-8"?>
 <p:tagLst xmlns:a="http://schemas.openxmlformats.org/drawingml/2006/main" xmlns:r="http://schemas.openxmlformats.org/officeDocument/2006/relationships" xmlns:p="http://schemas.openxmlformats.org/presentationml/2006/main">
   <p:tag name="ARTICULATE_SLIDE_THUMBNAIL_REFRESH" val="1"/>
 </p:tagLst>
